--- a/docs/aster-pricing.pptx
+++ b/docs/aster-pricing.pptx
@@ -2552,7 +2552,7 @@
           </p:nvPr>
         </p:nvGraphicFramePr>
         <p:xfrm>
-          <a:off x="548640" y="1874520"/>
+          <a:off x="548640" y="1847088"/>
           <a:ext cx="7680960" cy="914400"/>
         </p:xfrm>
         <a:graphic>
@@ -2565,7 +2565,7 @@
                 <a:gridCol w="1645920"/>
                 <a:gridCol w="1645920"/>
               </a:tblGrid>
-              <a:tr h="411480">
+              <a:tr h="384048">
                 <a:tc>
                   <a:txBody>
                     <a:bodyPr/>
@@ -2839,7 +2839,7 @@
                   </a:tcPr>
                 </a:tc>
               </a:tr>
-              <a:tr h="384048">
+              <a:tr h="347472">
                 <a:tc>
                   <a:txBody>
                     <a:bodyPr/>
@@ -3113,7 +3113,7 @@
                   </a:tcPr>
                 </a:tc>
               </a:tr>
-              <a:tr h="384048">
+              <a:tr h="347472">
                 <a:tc>
                   <a:txBody>
                     <a:bodyPr/>
@@ -3387,7 +3387,7 @@
                   </a:tcPr>
                 </a:tc>
               </a:tr>
-              <a:tr h="384048">
+              <a:tr h="347472">
                 <a:tc>
                   <a:txBody>
                     <a:bodyPr/>
@@ -3661,7 +3661,7 @@
                   </a:tcPr>
                 </a:tc>
               </a:tr>
-              <a:tr h="384048">
+              <a:tr h="347472">
                 <a:tc>
                   <a:txBody>
                     <a:bodyPr/>
@@ -3935,7 +3935,281 @@
                   </a:tcPr>
                 </a:tc>
               </a:tr>
-              <a:tr h="384048">
+              <a:tr h="347472">
+                <a:tc>
+                  <a:txBody>
+                    <a:bodyPr/>
+                    <a:lstStyle/>
+                    <a:p>
+                      <a:pPr algn="l" indent="0" marL="0">
+                        <a:buNone/>
+                      </a:pPr>
+                      <a:r>
+                        <a:rPr lang="en-US" sz="1250" b="1" dirty="0">
+                          <a:solidFill>
+                            <a:srgbClr val="12132A"/>
+                          </a:solidFill>
+                          <a:latin typeface="Calibri" pitchFamily="34" charset="0"/>
+                          <a:ea typeface="Calibri" pitchFamily="34" charset="-122"/>
+                          <a:cs typeface="Calibri" pitchFamily="34" charset="-120"/>
+                        </a:rPr>
+                        <a:t>Partner share (10%)</a:t>
+                      </a:r>
+                      <a:endParaRPr lang="en-US" sz="1250" dirty="0">
+                        <a:latin typeface="Calibri" charset="0"/>
+                        <a:ea typeface="Calibri" charset="0"/>
+                        <a:cs typeface="Calibri" charset="0"/>
+                      </a:endParaRPr>
+                    </a:p>
+                  </a:txBody>
+                  <a:tcPr marL="101600" marR="101600" marT="25400" marB="25400" anchor="ctr">
+                    <a:lnL w="6350" cap="flat" cmpd="sng" algn="ctr">
+                      <a:solidFill>
+                        <a:srgbClr val="E6E8F0"/>
+                      </a:solidFill>
+                      <a:prstDash val="solid"/>
+                      <a:round/>
+                      <a:headEnd type="none" w="med" len="med"/>
+                      <a:tailEnd type="none" w="med" len="med"/>
+                    </a:lnL>
+                    <a:lnR w="6350" cap="flat" cmpd="sng" algn="ctr">
+                      <a:solidFill>
+                        <a:srgbClr val="E6E8F0"/>
+                      </a:solidFill>
+                      <a:prstDash val="solid"/>
+                      <a:round/>
+                      <a:headEnd type="none" w="med" len="med"/>
+                      <a:tailEnd type="none" w="med" len="med"/>
+                    </a:lnR>
+                    <a:lnT w="6350" cap="flat" cmpd="sng" algn="ctr">
+                      <a:solidFill>
+                        <a:srgbClr val="E6E8F0"/>
+                      </a:solidFill>
+                      <a:prstDash val="solid"/>
+                      <a:round/>
+                      <a:headEnd type="none" w="med" len="med"/>
+                      <a:tailEnd type="none" w="med" len="med"/>
+                    </a:lnT>
+                    <a:lnB w="6350" cap="flat" cmpd="sng" algn="ctr">
+                      <a:solidFill>
+                        <a:srgbClr val="E6E8F0"/>
+                      </a:solidFill>
+                      <a:prstDash val="solid"/>
+                      <a:round/>
+                      <a:headEnd type="none" w="med" len="med"/>
+                      <a:tailEnd type="none" w="med" len="med"/>
+                    </a:lnB>
+                    <a:solidFill>
+                      <a:srgbClr val="FFFFFF"/>
+                    </a:solidFill>
+                  </a:tcPr>
+                </a:tc>
+                <a:tc>
+                  <a:txBody>
+                    <a:bodyPr/>
+                    <a:lstStyle/>
+                    <a:p>
+                      <a:pPr algn="ctr" indent="0" marL="0">
+                        <a:buNone/>
+                      </a:pPr>
+                      <a:r>
+                        <a:rPr lang="en-US" sz="1250" dirty="0">
+                          <a:solidFill>
+                            <a:srgbClr val="4A5568"/>
+                          </a:solidFill>
+                          <a:latin typeface="Calibri" pitchFamily="34" charset="0"/>
+                          <a:ea typeface="Calibri" pitchFamily="34" charset="-122"/>
+                          <a:cs typeface="Calibri" pitchFamily="34" charset="-120"/>
+                        </a:rPr>
+                        <a:t>RM10</a:t>
+                      </a:r>
+                      <a:endParaRPr lang="en-US" sz="1250" dirty="0">
+                        <a:latin typeface="Calibri" charset="0"/>
+                        <a:ea typeface="Calibri" charset="0"/>
+                        <a:cs typeface="Calibri" charset="0"/>
+                      </a:endParaRPr>
+                    </a:p>
+                  </a:txBody>
+                  <a:tcPr marL="101600" marR="101600" marT="25400" marB="25400" anchor="ctr">
+                    <a:lnL w="6350" cap="flat" cmpd="sng" algn="ctr">
+                      <a:solidFill>
+                        <a:srgbClr val="E6E8F0"/>
+                      </a:solidFill>
+                      <a:prstDash val="solid"/>
+                      <a:round/>
+                      <a:headEnd type="none" w="med" len="med"/>
+                      <a:tailEnd type="none" w="med" len="med"/>
+                    </a:lnL>
+                    <a:lnR w="6350" cap="flat" cmpd="sng" algn="ctr">
+                      <a:solidFill>
+                        <a:srgbClr val="E6E8F0"/>
+                      </a:solidFill>
+                      <a:prstDash val="solid"/>
+                      <a:round/>
+                      <a:headEnd type="none" w="med" len="med"/>
+                      <a:tailEnd type="none" w="med" len="med"/>
+                    </a:lnR>
+                    <a:lnT w="6350" cap="flat" cmpd="sng" algn="ctr">
+                      <a:solidFill>
+                        <a:srgbClr val="E6E8F0"/>
+                      </a:solidFill>
+                      <a:prstDash val="solid"/>
+                      <a:round/>
+                      <a:headEnd type="none" w="med" len="med"/>
+                      <a:tailEnd type="none" w="med" len="med"/>
+                    </a:lnT>
+                    <a:lnB w="6350" cap="flat" cmpd="sng" algn="ctr">
+                      <a:solidFill>
+                        <a:srgbClr val="E6E8F0"/>
+                      </a:solidFill>
+                      <a:prstDash val="solid"/>
+                      <a:round/>
+                      <a:headEnd type="none" w="med" len="med"/>
+                      <a:tailEnd type="none" w="med" len="med"/>
+                    </a:lnB>
+                    <a:solidFill>
+                      <a:srgbClr val="FFFFFF"/>
+                    </a:solidFill>
+                  </a:tcPr>
+                </a:tc>
+                <a:tc>
+                  <a:txBody>
+                    <a:bodyPr/>
+                    <a:lstStyle/>
+                    <a:p>
+                      <a:pPr algn="ctr" indent="0" marL="0">
+                        <a:buNone/>
+                      </a:pPr>
+                      <a:r>
+                        <a:rPr lang="en-US" sz="1250" dirty="0">
+                          <a:solidFill>
+                            <a:srgbClr val="4A5568"/>
+                          </a:solidFill>
+                          <a:latin typeface="Calibri" pitchFamily="34" charset="0"/>
+                          <a:ea typeface="Calibri" pitchFamily="34" charset="-122"/>
+                          <a:cs typeface="Calibri" pitchFamily="34" charset="-120"/>
+                        </a:rPr>
+                        <a:t>RM60</a:t>
+                      </a:r>
+                      <a:endParaRPr lang="en-US" sz="1250" dirty="0">
+                        <a:latin typeface="Calibri" charset="0"/>
+                        <a:ea typeface="Calibri" charset="0"/>
+                        <a:cs typeface="Calibri" charset="0"/>
+                      </a:endParaRPr>
+                    </a:p>
+                  </a:txBody>
+                  <a:tcPr marL="101600" marR="101600" marT="25400" marB="25400" anchor="ctr">
+                    <a:lnL w="6350" cap="flat" cmpd="sng" algn="ctr">
+                      <a:solidFill>
+                        <a:srgbClr val="E6E8F0"/>
+                      </a:solidFill>
+                      <a:prstDash val="solid"/>
+                      <a:round/>
+                      <a:headEnd type="none" w="med" len="med"/>
+                      <a:tailEnd type="none" w="med" len="med"/>
+                    </a:lnL>
+                    <a:lnR w="6350" cap="flat" cmpd="sng" algn="ctr">
+                      <a:solidFill>
+                        <a:srgbClr val="E6E8F0"/>
+                      </a:solidFill>
+                      <a:prstDash val="solid"/>
+                      <a:round/>
+                      <a:headEnd type="none" w="med" len="med"/>
+                      <a:tailEnd type="none" w="med" len="med"/>
+                    </a:lnR>
+                    <a:lnT w="6350" cap="flat" cmpd="sng" algn="ctr">
+                      <a:solidFill>
+                        <a:srgbClr val="E6E8F0"/>
+                      </a:solidFill>
+                      <a:prstDash val="solid"/>
+                      <a:round/>
+                      <a:headEnd type="none" w="med" len="med"/>
+                      <a:tailEnd type="none" w="med" len="med"/>
+                    </a:lnT>
+                    <a:lnB w="6350" cap="flat" cmpd="sng" algn="ctr">
+                      <a:solidFill>
+                        <a:srgbClr val="E6E8F0"/>
+                      </a:solidFill>
+                      <a:prstDash val="solid"/>
+                      <a:round/>
+                      <a:headEnd type="none" w="med" len="med"/>
+                      <a:tailEnd type="none" w="med" len="med"/>
+                    </a:lnB>
+                    <a:solidFill>
+                      <a:srgbClr val="FFFFFF"/>
+                    </a:solidFill>
+                  </a:tcPr>
+                </a:tc>
+                <a:tc>
+                  <a:txBody>
+                    <a:bodyPr/>
+                    <a:lstStyle/>
+                    <a:p>
+                      <a:pPr algn="ctr" indent="0" marL="0">
+                        <a:buNone/>
+                      </a:pPr>
+                      <a:r>
+                        <a:rPr lang="en-US" sz="1250" dirty="0">
+                          <a:solidFill>
+                            <a:srgbClr val="4A5568"/>
+                          </a:solidFill>
+                          <a:latin typeface="Calibri" pitchFamily="34" charset="0"/>
+                          <a:ea typeface="Calibri" pitchFamily="34" charset="-122"/>
+                          <a:cs typeface="Calibri" pitchFamily="34" charset="-120"/>
+                        </a:rPr>
+                        <a:t>RM140</a:t>
+                      </a:r>
+                      <a:endParaRPr lang="en-US" sz="1250" dirty="0">
+                        <a:latin typeface="Calibri" charset="0"/>
+                        <a:ea typeface="Calibri" charset="0"/>
+                        <a:cs typeface="Calibri" charset="0"/>
+                      </a:endParaRPr>
+                    </a:p>
+                  </a:txBody>
+                  <a:tcPr marL="101600" marR="101600" marT="25400" marB="25400" anchor="ctr">
+                    <a:lnL w="6350" cap="flat" cmpd="sng" algn="ctr">
+                      <a:solidFill>
+                        <a:srgbClr val="E6E8F0"/>
+                      </a:solidFill>
+                      <a:prstDash val="solid"/>
+                      <a:round/>
+                      <a:headEnd type="none" w="med" len="med"/>
+                      <a:tailEnd type="none" w="med" len="med"/>
+                    </a:lnL>
+                    <a:lnR w="6350" cap="flat" cmpd="sng" algn="ctr">
+                      <a:solidFill>
+                        <a:srgbClr val="E6E8F0"/>
+                      </a:solidFill>
+                      <a:prstDash val="solid"/>
+                      <a:round/>
+                      <a:headEnd type="none" w="med" len="med"/>
+                      <a:tailEnd type="none" w="med" len="med"/>
+                    </a:lnR>
+                    <a:lnT w="6350" cap="flat" cmpd="sng" algn="ctr">
+                      <a:solidFill>
+                        <a:srgbClr val="E6E8F0"/>
+                      </a:solidFill>
+                      <a:prstDash val="solid"/>
+                      <a:round/>
+                      <a:headEnd type="none" w="med" len="med"/>
+                      <a:tailEnd type="none" w="med" len="med"/>
+                    </a:lnT>
+                    <a:lnB w="6350" cap="flat" cmpd="sng" algn="ctr">
+                      <a:solidFill>
+                        <a:srgbClr val="E6E8F0"/>
+                      </a:solidFill>
+                      <a:prstDash val="solid"/>
+                      <a:round/>
+                      <a:headEnd type="none" w="med" len="med"/>
+                      <a:tailEnd type="none" w="med" len="med"/>
+                    </a:lnB>
+                    <a:solidFill>
+                      <a:srgbClr val="FFFFFF"/>
+                    </a:solidFill>
+                  </a:tcPr>
+                </a:tc>
+              </a:tr>
+              <a:tr h="347472">
                 <a:tc>
                   <a:txBody>
                     <a:bodyPr/>
@@ -4209,7 +4483,7 @@
                   </a:tcPr>
                 </a:tc>
               </a:tr>
-              <a:tr h="384048">
+              <a:tr h="347472">
                 <a:tc>
                   <a:txBody>
                     <a:bodyPr/>
@@ -4483,7 +4757,7 @@
                   </a:tcPr>
                 </a:tc>
               </a:tr>
-              <a:tr h="457200">
+              <a:tr h="402336">
                 <a:tc>
                   <a:txBody>
                     <a:bodyPr/>
@@ -4569,7 +4843,7 @@
                           <a:ea typeface="Calibri" pitchFamily="34" charset="-122"/>
                           <a:cs typeface="Calibri" pitchFamily="34" charset="-120"/>
                         </a:rPr>
-                        <a:t>RM34</a:t>
+                        <a:t>RM44</a:t>
                       </a:r>
                       <a:endParaRPr lang="en-US" sz="1250" dirty="0">
                         <a:latin typeface="Calibri" charset="0"/>
@@ -4637,7 +4911,7 @@
                           <a:ea typeface="Calibri" pitchFamily="34" charset="-122"/>
                           <a:cs typeface="Calibri" pitchFamily="34" charset="-120"/>
                         </a:rPr>
-                        <a:t>RM171</a:t>
+                        <a:t>RM231</a:t>
                       </a:r>
                       <a:endParaRPr lang="en-US" sz="1250" dirty="0">
                         <a:latin typeface="Calibri" charset="0"/>
@@ -4705,7 +4979,7 @@
                           <a:ea typeface="Calibri" pitchFamily="34" charset="-122"/>
                           <a:cs typeface="Calibri" pitchFamily="34" charset="-120"/>
                         </a:rPr>
-                        <a:t>RM401</a:t>
+                        <a:t>RM541</a:t>
                       </a:r>
                       <a:endParaRPr lang="en-US" sz="1250" dirty="0">
                         <a:latin typeface="Calibri" charset="0"/>
@@ -4757,7 +5031,7 @@
                   </a:tcPr>
                 </a:tc>
               </a:tr>
-              <a:tr h="457200">
+              <a:tr h="402336">
                 <a:tc>
                   <a:txBody>
                     <a:bodyPr/>
@@ -5031,7 +5305,7 @@
                   </a:tcPr>
                 </a:tc>
               </a:tr>
-              <a:tr h="502920">
+              <a:tr h="438912">
                 <a:tc>
                   <a:txBody>
                     <a:bodyPr/>
@@ -5117,7 +5391,7 @@
                           <a:ea typeface="Calibri" pitchFamily="34" charset="-122"/>
                           <a:cs typeface="Calibri" pitchFamily="34" charset="-120"/>
                         </a:rPr>
-                        <a:t>66%</a:t>
+                        <a:t>56%</a:t>
                       </a:r>
                       <a:endParaRPr lang="en-US" sz="1400" dirty="0">
                         <a:latin typeface="Calibri" charset="0"/>
@@ -5185,7 +5459,7 @@
                           <a:ea typeface="Calibri" pitchFamily="34" charset="-122"/>
                           <a:cs typeface="Calibri" pitchFamily="34" charset="-120"/>
                         </a:rPr>
-                        <a:t>71%</a:t>
+                        <a:t>61%</a:t>
                       </a:r>
                       <a:endParaRPr lang="en-US" sz="1400" dirty="0">
                         <a:latin typeface="Calibri" charset="0"/>
@@ -5253,7 +5527,7 @@
                           <a:ea typeface="Calibri" pitchFamily="34" charset="-122"/>
                           <a:cs typeface="Calibri" pitchFamily="34" charset="-120"/>
                         </a:rPr>
-                        <a:t>71%</a:t>
+                        <a:t>61%</a:t>
                       </a:r>
                       <a:endParaRPr lang="en-US" sz="1400" dirty="0">
                         <a:latin typeface="Calibri" charset="0"/>
@@ -5454,7 +5728,7 @@
                 <a:ea typeface="Calibri" pitchFamily="34" charset="-122"/>
                 <a:cs typeface="Calibri" pitchFamily="34" charset="-120"/>
               </a:rPr>
-              <a:t>66%</a:t>
+              <a:t>56%</a:t>
             </a:r>
             <a:endParaRPr lang="en-US" sz="3000" dirty="0"/>
           </a:p>
@@ -5605,7 +5879,7 @@
                 <a:ea typeface="Calibri" pitchFamily="34" charset="-122"/>
                 <a:cs typeface="Calibri" pitchFamily="34" charset="-120"/>
               </a:rPr>
-              <a:t>71%</a:t>
+              <a:t>61%</a:t>
             </a:r>
             <a:endParaRPr lang="en-US" sz="3000" dirty="0"/>
           </a:p>
@@ -5756,7 +6030,7 @@
                 <a:ea typeface="Calibri" pitchFamily="34" charset="-122"/>
                 <a:cs typeface="Calibri" pitchFamily="34" charset="-120"/>
               </a:rPr>
-              <a:t>71%</a:t>
+              <a:t>61%</a:t>
             </a:r>
             <a:endParaRPr lang="en-US" sz="3000" dirty="0"/>
           </a:p>
@@ -5795,7 +6069,7 @@
                 <a:ea typeface="Calibri" pitchFamily="34" charset="-122"/>
                 <a:cs typeface="Calibri" pitchFamily="34" charset="-120"/>
               </a:rPr>
-              <a:t>Assumes typical AI usage at the plan allowance and ~5 / 25 / 70 video interviews per month. Monthly card billing (annual lowers the Stripe fee). Platform share amortises toward zero with scale. Realistic usage runs lower, so margins run higher.</a:t>
+              <a:t>Partner share = 10% of every sale. Assumes typical AI usage at the plan allowance and ~5 / 25 / 70 video interviews/mo; monthly card billing (annual lowers the Stripe fee). Platform share amortises toward zero with scale. Realistic usage runs lower, so margins run higher.</a:t>
             </a:r>
             <a:endParaRPr lang="en-US" sz="950" dirty="0"/>
           </a:p>
@@ -6022,7 +6296,7 @@
                 <a:ea typeface="Calibri" pitchFamily="34" charset="-122"/>
                 <a:cs typeface="Calibri" pitchFamily="34" charset="-120"/>
               </a:rPr>
-              <a:t>Once an account exhausts its allowance, every extra action sells at the list rate. Cost here includes both AI inference and the one-time Stripe fee, spread across a minimum 20-credit top-up. Growth accounts that buy top-ups lift blended margin.</a:t>
+              <a:t>Once an account exhausts its allowance, every extra action sells at the list rate. Cost here includes AI inference, the one-time Stripe fee (min 20-credit top-up) and the 10% partner share. Growth accounts that buy top-ups lift blended margin.</a:t>
             </a:r>
             <a:endParaRPr lang="en-US" sz="1400" dirty="0"/>
           </a:p>
@@ -6134,7 +6408,7 @@
                 <a:ea typeface="Calibri" pitchFamily="34" charset="-122"/>
                 <a:cs typeface="Calibri" pitchFamily="34" charset="-120"/>
               </a:rPr>
-              <a:t>92%</a:t>
+              <a:t>82%</a:t>
             </a:r>
             <a:endParaRPr lang="en-US" sz="4600" dirty="0"/>
           </a:p>
@@ -6277,7 +6551,7 @@
                 <a:ea typeface="Calibri" pitchFamily="34" charset="-122"/>
                 <a:cs typeface="Calibri" pitchFamily="34" charset="-120"/>
               </a:rPr>
-              <a:t>RM0.33</a:t>
+              <a:t>RM0.74</a:t>
             </a:r>
             <a:endParaRPr lang="en-US" sz="1300" dirty="0"/>
           </a:p>
@@ -6389,7 +6663,7 @@
                 <a:ea typeface="Calibri" pitchFamily="34" charset="-122"/>
                 <a:cs typeface="Calibri" pitchFamily="34" charset="-120"/>
               </a:rPr>
-              <a:t>82%</a:t>
+              <a:t>72%</a:t>
             </a:r>
             <a:endParaRPr lang="en-US" sz="4600" dirty="0"/>
           </a:p>
@@ -6532,7 +6806,7 @@
                 <a:ea typeface="Calibri" pitchFamily="34" charset="-122"/>
                 <a:cs typeface="Calibri" pitchFamily="34" charset="-120"/>
               </a:rPr>
-              <a:t>RM0.30</a:t>
+              <a:t>RM0.46</a:t>
             </a:r>
             <a:endParaRPr lang="en-US" sz="1300" dirty="0"/>
           </a:p>
@@ -6644,7 +6918,7 @@
                 <a:ea typeface="Calibri" pitchFamily="34" charset="-122"/>
                 <a:cs typeface="Calibri" pitchFamily="34" charset="-120"/>
               </a:rPr>
-              <a:t>91%</a:t>
+              <a:t>81%</a:t>
             </a:r>
             <a:endParaRPr lang="en-US" sz="4600" dirty="0"/>
           </a:p>
@@ -6787,7 +7061,7 @@
                 <a:ea typeface="Calibri" pitchFamily="34" charset="-122"/>
                 <a:cs typeface="Calibri" pitchFamily="34" charset="-120"/>
               </a:rPr>
-              <a:t>RM0.18</a:t>
+              <a:t>RM0.39</a:t>
             </a:r>
             <a:endParaRPr lang="en-US" sz="1300" dirty="0"/>
           </a:p>
@@ -6826,7 +7100,7 @@
                 <a:ea typeface="Calibri" pitchFamily="34" charset="-122"/>
                 <a:cs typeface="Calibri" pitchFamily="34" charset="-120"/>
               </a:rPr>
-              <a:t>Cost = AI inference + Stripe (3% + RM1 per top-up, min 20 credits). The fixed fee amortises across the batch, so per-credit processing is a few sen and margin stays in the 80s+.</a:t>
+              <a:t>Cost = AI inference + Stripe (3% + RM1 per top-up, min 20 credits) + 10% partner share. Even after all three, top-ups stay the highest-margin revenue at 70%+.</a:t>
             </a:r>
             <a:endParaRPr lang="en-US" sz="1100" dirty="0"/>
           </a:p>
@@ -9820,7 +10094,7 @@
                 <a:ea typeface="Calibri" pitchFamily="34" charset="-122"/>
                 <a:cs typeface="Calibri" pitchFamily="34" charset="-120"/>
               </a:rPr>
-              <a:t>~72% </a:t>
+              <a:t>~62% </a:t>
             </a:r>
             <a:pPr algn="l" indent="0" marL="0">
               <a:buNone/>
@@ -9912,7 +10186,7 @@
                 <a:ea typeface="Calibri" pitchFamily="34" charset="-122"/>
                 <a:cs typeface="Calibri" pitchFamily="34" charset="-120"/>
               </a:rPr>
-              <a:t>Illustrative. Enterprise is a custom plan with no list price; modelled here at an assumed ~RM6,000/mo for the scenario only. Adjust mix, Enterprise deal size, and top-up rate as pricing is finalised.</a:t>
+              <a:t>Illustrative. Enterprise is a custom plan with no list price; modelled here at an assumed ~RM6,000/mo for the scenario only. ARR is gross revenue; the 10% partner share is captured in the margins on slide 10. Adjust mix, Enterprise deal size, and top-up rate as pricing is finalised.</a:t>
             </a:r>
             <a:endParaRPr lang="en-US" sz="1000" dirty="0"/>
           </a:p>
@@ -11585,7 +11859,7 @@
                 <a:ea typeface="Calibri" pitchFamily="34" charset="-122"/>
                 <a:cs typeface="Calibri" pitchFamily="34" charset="-120"/>
               </a:rPr>
-              <a:t>66–71%</a:t>
+              <a:t>56–61%</a:t>
             </a:r>
             <a:endParaRPr lang="en-US" sz="3000" dirty="0"/>
           </a:p>
@@ -26150,7 +26424,7 @@
           </p:nvPr>
         </p:nvGraphicFramePr>
         <p:xfrm>
-          <a:off x="548640" y="2011680"/>
+          <a:off x="548640" y="1965960"/>
           <a:ext cx="7863840" cy="914400"/>
         </p:xfrm>
         <a:graphic>
@@ -26163,7 +26437,7 @@
                 <a:gridCol w="2514600"/>
                 <a:gridCol w="1371600"/>
               </a:tblGrid>
-              <a:tr h="457200">
+              <a:tr h="402336">
                 <a:tc>
                   <a:txBody>
                     <a:bodyPr/>
@@ -26437,7 +26711,7 @@
                   </a:tcPr>
                 </a:tc>
               </a:tr>
-              <a:tr h="457200">
+              <a:tr h="402336">
                 <a:tc>
                   <a:txBody>
                     <a:bodyPr/>
@@ -26711,7 +26985,7 @@
                   </a:tcPr>
                 </a:tc>
               </a:tr>
-              <a:tr h="457200">
+              <a:tr h="402336">
                 <a:tc>
                   <a:txBody>
                     <a:bodyPr/>
@@ -26985,7 +27259,7 @@
                   </a:tcPr>
                 </a:tc>
               </a:tr>
-              <a:tr h="457200">
+              <a:tr h="402336">
                 <a:tc>
                   <a:txBody>
                     <a:bodyPr/>
@@ -27259,7 +27533,7 @@
                   </a:tcPr>
                 </a:tc>
               </a:tr>
-              <a:tr h="457200">
+              <a:tr h="402336">
                 <a:tc>
                   <a:txBody>
                     <a:bodyPr/>
@@ -27533,7 +27807,7 @@
                   </a:tcPr>
                 </a:tc>
               </a:tr>
-              <a:tr h="457200">
+              <a:tr h="402336">
                 <a:tc>
                   <a:txBody>
                     <a:bodyPr/>
@@ -27807,7 +28081,7 @@
                   </a:tcPr>
                 </a:tc>
               </a:tr>
-              <a:tr h="457200">
+              <a:tr h="402336">
                 <a:tc>
                   <a:txBody>
                     <a:bodyPr/>
@@ -28081,7 +28355,281 @@
                   </a:tcPr>
                 </a:tc>
               </a:tr>
-              <a:tr h="457200">
+              <a:tr h="402336">
+                <a:tc>
+                  <a:txBody>
+                    <a:bodyPr/>
+                    <a:lstStyle/>
+                    <a:p>
+                      <a:pPr algn="l" indent="0" marL="0">
+                        <a:buNone/>
+                      </a:pPr>
+                      <a:r>
+                        <a:rPr lang="en-US" sz="1200" b="1" dirty="0">
+                          <a:solidFill>
+                            <a:srgbClr val="12132A"/>
+                          </a:solidFill>
+                          <a:latin typeface="Calibri" pitchFamily="34" charset="0"/>
+                          <a:ea typeface="Calibri" pitchFamily="34" charset="-122"/>
+                          <a:cs typeface="Calibri" pitchFamily="34" charset="-120"/>
+                        </a:rPr>
+                        <a:t>Partner revenue share</a:t>
+                      </a:r>
+                      <a:endParaRPr lang="en-US" sz="1200" dirty="0">
+                        <a:latin typeface="Calibri" charset="0"/>
+                        <a:ea typeface="Calibri" charset="0"/>
+                        <a:cs typeface="Calibri" charset="0"/>
+                      </a:endParaRPr>
+                    </a:p>
+                  </a:txBody>
+                  <a:tcPr marL="76200" marR="76200" marT="25400" marB="25400" anchor="ctr">
+                    <a:lnL w="6350" cap="flat" cmpd="sng" algn="ctr">
+                      <a:solidFill>
+                        <a:srgbClr val="E6E8F0"/>
+                      </a:solidFill>
+                      <a:prstDash val="solid"/>
+                      <a:round/>
+                      <a:headEnd type="none" w="med" len="med"/>
+                      <a:tailEnd type="none" w="med" len="med"/>
+                    </a:lnL>
+                    <a:lnR w="6350" cap="flat" cmpd="sng" algn="ctr">
+                      <a:solidFill>
+                        <a:srgbClr val="E6E8F0"/>
+                      </a:solidFill>
+                      <a:prstDash val="solid"/>
+                      <a:round/>
+                      <a:headEnd type="none" w="med" len="med"/>
+                      <a:tailEnd type="none" w="med" len="med"/>
+                    </a:lnR>
+                    <a:lnT w="6350" cap="flat" cmpd="sng" algn="ctr">
+                      <a:solidFill>
+                        <a:srgbClr val="E6E8F0"/>
+                      </a:solidFill>
+                      <a:prstDash val="solid"/>
+                      <a:round/>
+                      <a:headEnd type="none" w="med" len="med"/>
+                      <a:tailEnd type="none" w="med" len="med"/>
+                    </a:lnT>
+                    <a:lnB w="6350" cap="flat" cmpd="sng" algn="ctr">
+                      <a:solidFill>
+                        <a:srgbClr val="E6E8F0"/>
+                      </a:solidFill>
+                      <a:prstDash val="solid"/>
+                      <a:round/>
+                      <a:headEnd type="none" w="med" len="med"/>
+                      <a:tailEnd type="none" w="med" len="med"/>
+                    </a:lnB>
+                    <a:solidFill>
+                      <a:srgbClr val="FFFFFF"/>
+                    </a:solidFill>
+                  </a:tcPr>
+                </a:tc>
+                <a:tc>
+                  <a:txBody>
+                    <a:bodyPr/>
+                    <a:lstStyle/>
+                    <a:p>
+                      <a:pPr algn="l" indent="0" marL="0">
+                        <a:buNone/>
+                      </a:pPr>
+                      <a:r>
+                        <a:rPr lang="en-US" sz="1200" dirty="0">
+                          <a:solidFill>
+                            <a:srgbClr val="4A5568"/>
+                          </a:solidFill>
+                          <a:latin typeface="Calibri" pitchFamily="34" charset="0"/>
+                          <a:ea typeface="Calibri" pitchFamily="34" charset="-122"/>
+                          <a:cs typeface="Calibri" pitchFamily="34" charset="-120"/>
+                        </a:rPr>
+                        <a:t>Channel partner</a:t>
+                      </a:r>
+                      <a:endParaRPr lang="en-US" sz="1200" dirty="0">
+                        <a:latin typeface="Calibri" charset="0"/>
+                        <a:ea typeface="Calibri" charset="0"/>
+                        <a:cs typeface="Calibri" charset="0"/>
+                      </a:endParaRPr>
+                    </a:p>
+                  </a:txBody>
+                  <a:tcPr marL="76200" marR="76200" marT="25400" marB="25400" anchor="ctr">
+                    <a:lnL w="6350" cap="flat" cmpd="sng" algn="ctr">
+                      <a:solidFill>
+                        <a:srgbClr val="E6E8F0"/>
+                      </a:solidFill>
+                      <a:prstDash val="solid"/>
+                      <a:round/>
+                      <a:headEnd type="none" w="med" len="med"/>
+                      <a:tailEnd type="none" w="med" len="med"/>
+                    </a:lnL>
+                    <a:lnR w="6350" cap="flat" cmpd="sng" algn="ctr">
+                      <a:solidFill>
+                        <a:srgbClr val="E6E8F0"/>
+                      </a:solidFill>
+                      <a:prstDash val="solid"/>
+                      <a:round/>
+                      <a:headEnd type="none" w="med" len="med"/>
+                      <a:tailEnd type="none" w="med" len="med"/>
+                    </a:lnR>
+                    <a:lnT w="6350" cap="flat" cmpd="sng" algn="ctr">
+                      <a:solidFill>
+                        <a:srgbClr val="E6E8F0"/>
+                      </a:solidFill>
+                      <a:prstDash val="solid"/>
+                      <a:round/>
+                      <a:headEnd type="none" w="med" len="med"/>
+                      <a:tailEnd type="none" w="med" len="med"/>
+                    </a:lnT>
+                    <a:lnB w="6350" cap="flat" cmpd="sng" algn="ctr">
+                      <a:solidFill>
+                        <a:srgbClr val="E6E8F0"/>
+                      </a:solidFill>
+                      <a:prstDash val="solid"/>
+                      <a:round/>
+                      <a:headEnd type="none" w="med" len="med"/>
+                      <a:tailEnd type="none" w="med" len="med"/>
+                    </a:lnB>
+                    <a:solidFill>
+                      <a:srgbClr val="FFFFFF"/>
+                    </a:solidFill>
+                  </a:tcPr>
+                </a:tc>
+                <a:tc>
+                  <a:txBody>
+                    <a:bodyPr/>
+                    <a:lstStyle/>
+                    <a:p>
+                      <a:pPr algn="l" indent="0" marL="0">
+                        <a:buNone/>
+                      </a:pPr>
+                      <a:r>
+                        <a:rPr lang="en-US" sz="1200" dirty="0">
+                          <a:solidFill>
+                            <a:srgbClr val="4A5568"/>
+                          </a:solidFill>
+                          <a:latin typeface="Calibri" pitchFamily="34" charset="0"/>
+                          <a:ea typeface="Calibri" pitchFamily="34" charset="-122"/>
+                          <a:cs typeface="Calibri" pitchFamily="34" charset="-120"/>
+                        </a:rPr>
+                        <a:t>10% of each sale</a:t>
+                      </a:r>
+                      <a:endParaRPr lang="en-US" sz="1200" dirty="0">
+                        <a:latin typeface="Calibri" charset="0"/>
+                        <a:ea typeface="Calibri" charset="0"/>
+                        <a:cs typeface="Calibri" charset="0"/>
+                      </a:endParaRPr>
+                    </a:p>
+                  </a:txBody>
+                  <a:tcPr marL="76200" marR="76200" marT="25400" marB="25400" anchor="ctr">
+                    <a:lnL w="6350" cap="flat" cmpd="sng" algn="ctr">
+                      <a:solidFill>
+                        <a:srgbClr val="E6E8F0"/>
+                      </a:solidFill>
+                      <a:prstDash val="solid"/>
+                      <a:round/>
+                      <a:headEnd type="none" w="med" len="med"/>
+                      <a:tailEnd type="none" w="med" len="med"/>
+                    </a:lnL>
+                    <a:lnR w="6350" cap="flat" cmpd="sng" algn="ctr">
+                      <a:solidFill>
+                        <a:srgbClr val="E6E8F0"/>
+                      </a:solidFill>
+                      <a:prstDash val="solid"/>
+                      <a:round/>
+                      <a:headEnd type="none" w="med" len="med"/>
+                      <a:tailEnd type="none" w="med" len="med"/>
+                    </a:lnR>
+                    <a:lnT w="6350" cap="flat" cmpd="sng" algn="ctr">
+                      <a:solidFill>
+                        <a:srgbClr val="E6E8F0"/>
+                      </a:solidFill>
+                      <a:prstDash val="solid"/>
+                      <a:round/>
+                      <a:headEnd type="none" w="med" len="med"/>
+                      <a:tailEnd type="none" w="med" len="med"/>
+                    </a:lnT>
+                    <a:lnB w="6350" cap="flat" cmpd="sng" algn="ctr">
+                      <a:solidFill>
+                        <a:srgbClr val="E6E8F0"/>
+                      </a:solidFill>
+                      <a:prstDash val="solid"/>
+                      <a:round/>
+                      <a:headEnd type="none" w="med" len="med"/>
+                      <a:tailEnd type="none" w="med" len="med"/>
+                    </a:lnB>
+                    <a:solidFill>
+                      <a:srgbClr val="FFFFFF"/>
+                    </a:solidFill>
+                  </a:tcPr>
+                </a:tc>
+                <a:tc>
+                  <a:txBody>
+                    <a:bodyPr/>
+                    <a:lstStyle/>
+                    <a:p>
+                      <a:pPr algn="ctr" indent="0" marL="0">
+                        <a:buNone/>
+                      </a:pPr>
+                      <a:r>
+                        <a:rPr lang="en-US" sz="1200" dirty="0">
+                          <a:solidFill>
+                            <a:srgbClr val="4A5568"/>
+                          </a:solidFill>
+                          <a:latin typeface="Calibri" pitchFamily="34" charset="0"/>
+                          <a:ea typeface="Calibri" pitchFamily="34" charset="-122"/>
+                          <a:cs typeface="Calibri" pitchFamily="34" charset="-120"/>
+                        </a:rPr>
+                        <a:t>Aster</a:t>
+                      </a:r>
+                      <a:endParaRPr lang="en-US" sz="1200" dirty="0">
+                        <a:latin typeface="Calibri" charset="0"/>
+                        <a:ea typeface="Calibri" charset="0"/>
+                        <a:cs typeface="Calibri" charset="0"/>
+                      </a:endParaRPr>
+                    </a:p>
+                  </a:txBody>
+                  <a:tcPr marL="76200" marR="76200" marT="25400" marB="25400" anchor="ctr">
+                    <a:lnL w="6350" cap="flat" cmpd="sng" algn="ctr">
+                      <a:solidFill>
+                        <a:srgbClr val="E6E8F0"/>
+                      </a:solidFill>
+                      <a:prstDash val="solid"/>
+                      <a:round/>
+                      <a:headEnd type="none" w="med" len="med"/>
+                      <a:tailEnd type="none" w="med" len="med"/>
+                    </a:lnL>
+                    <a:lnR w="6350" cap="flat" cmpd="sng" algn="ctr">
+                      <a:solidFill>
+                        <a:srgbClr val="E6E8F0"/>
+                      </a:solidFill>
+                      <a:prstDash val="solid"/>
+                      <a:round/>
+                      <a:headEnd type="none" w="med" len="med"/>
+                      <a:tailEnd type="none" w="med" len="med"/>
+                    </a:lnR>
+                    <a:lnT w="6350" cap="flat" cmpd="sng" algn="ctr">
+                      <a:solidFill>
+                        <a:srgbClr val="E6E8F0"/>
+                      </a:solidFill>
+                      <a:prstDash val="solid"/>
+                      <a:round/>
+                      <a:headEnd type="none" w="med" len="med"/>
+                      <a:tailEnd type="none" w="med" len="med"/>
+                    </a:lnT>
+                    <a:lnB w="6350" cap="flat" cmpd="sng" algn="ctr">
+                      <a:solidFill>
+                        <a:srgbClr val="E6E8F0"/>
+                      </a:solidFill>
+                      <a:prstDash val="solid"/>
+                      <a:round/>
+                      <a:headEnd type="none" w="med" len="med"/>
+                      <a:tailEnd type="none" w="med" len="med"/>
+                    </a:lnB>
+                    <a:solidFill>
+                      <a:srgbClr val="FFFFFF"/>
+                    </a:solidFill>
+                  </a:tcPr>
+                </a:tc>
+              </a:tr>
+              <a:tr h="402336">
                 <a:tc>
                   <a:txBody>
                     <a:bodyPr/>
@@ -28146,7 +28694,7 @@
                       <a:tailEnd type="none" w="med" len="med"/>
                     </a:lnB>
                     <a:solidFill>
-                      <a:srgbClr val="FFFFFF"/>
+                      <a:srgbClr val="F5F7FE"/>
                     </a:solidFill>
                   </a:tcPr>
                 </a:tc>
@@ -28214,7 +28762,7 @@
                       <a:tailEnd type="none" w="med" len="med"/>
                     </a:lnB>
                     <a:solidFill>
-                      <a:srgbClr val="FFFFFF"/>
+                      <a:srgbClr val="F5F7FE"/>
                     </a:solidFill>
                   </a:tcPr>
                 </a:tc>
@@ -28282,7 +28830,7 @@
                       <a:tailEnd type="none" w="med" len="med"/>
                     </a:lnB>
                     <a:solidFill>
-                      <a:srgbClr val="FFFFFF"/>
+                      <a:srgbClr val="F5F7FE"/>
                     </a:solidFill>
                   </a:tcPr>
                 </a:tc>
@@ -28350,7 +28898,7 @@
                       <a:tailEnd type="none" w="med" len="med"/>
                     </a:lnB>
                     <a:solidFill>
-                      <a:srgbClr val="FFFFFF"/>
+                      <a:srgbClr val="F5F7FE"/>
                     </a:solidFill>
                   </a:tcPr>
                 </a:tc>

--- a/docs/aster-pricing.pptx
+++ b/docs/aster-pricing.pptx
@@ -6296,7 +6296,7 @@
                 <a:ea typeface="Calibri" pitchFamily="34" charset="-122"/>
                 <a:cs typeface="Calibri" pitchFamily="34" charset="-120"/>
               </a:rPr>
-              <a:t>Once an account exhausts its allowance, every extra action sells at the list rate. Cost here includes AI inference, the one-time Stripe fee (min 20-credit top-up) and the 10% partner share. Growth accounts that buy top-ups lift blended margin.</a:t>
+              <a:t>Once an account exhausts its allowance, every extra action sells at the list rate. Cost here includes AI inference, the one-time Stripe fee (on each credit's minimum top-up) and the 10% partner share. Growth accounts that buy top-ups lift blended margin.</a:t>
             </a:r>
             <a:endParaRPr lang="en-US" sz="1400" dirty="0"/>
           </a:p>
@@ -6310,12 +6310,12 @@
         </p:nvSpPr>
         <p:spPr>
           <a:xfrm>
-            <a:off x="868680" y="2468880"/>
-            <a:ext cx="3383280" cy="2788920"/>
+            <a:off x="548640" y="2468880"/>
+            <a:ext cx="2651760" cy="2788920"/>
           </a:xfrm>
           <a:prstGeom prst="roundRect">
             <a:avLst>
-              <a:gd name="adj" fmla="val 3934"/>
+              <a:gd name="adj" fmla="val 4138"/>
             </a:avLst>
           </a:prstGeom>
           <a:solidFill>
@@ -6344,8 +6344,8 @@
         </p:nvSpPr>
         <p:spPr>
           <a:xfrm>
-            <a:off x="1124712" y="2697480"/>
-            <a:ext cx="2926080" cy="457200"/>
+            <a:off x="768096" y="2697480"/>
+            <a:ext cx="2249424" cy="457200"/>
           </a:xfrm>
           <a:prstGeom prst="rect">
             <a:avLst/>
@@ -6361,7 +6361,7 @@
               <a:buNone/>
             </a:pPr>
             <a:r>
-              <a:rPr lang="en-US" sz="1550" b="1" dirty="0">
+              <a:rPr lang="en-US" sz="1500" b="1" dirty="0">
                 <a:solidFill>
                   <a:srgbClr val="12132A"/>
                 </a:solidFill>
@@ -6371,7 +6371,7 @@
               </a:rPr>
               <a:t>Screening</a:t>
             </a:r>
-            <a:endParaRPr lang="en-US" sz="1550" dirty="0"/>
+            <a:endParaRPr lang="en-US" sz="1500" dirty="0"/>
           </a:p>
         </p:txBody>
       </p:sp>
@@ -6383,8 +6383,8 @@
         </p:nvSpPr>
         <p:spPr>
           <a:xfrm>
-            <a:off x="1124712" y="3200400"/>
-            <a:ext cx="2871216" cy="777240"/>
+            <a:off x="768096" y="3218688"/>
+            <a:ext cx="2212848" cy="731520"/>
           </a:xfrm>
           <a:prstGeom prst="rect">
             <a:avLst/>
@@ -6400,7 +6400,7 @@
               <a:buNone/>
             </a:pPr>
             <a:r>
-              <a:rPr lang="en-US" sz="4600" b="1" dirty="0">
+              <a:rPr lang="en-US" sz="4000" b="1" dirty="0">
                 <a:solidFill>
                   <a:srgbClr val="16A34A"/>
                 </a:solidFill>
@@ -6408,9 +6408,9 @@
                 <a:ea typeface="Calibri" pitchFamily="34" charset="-122"/>
                 <a:cs typeface="Calibri" pitchFamily="34" charset="-120"/>
               </a:rPr>
-              <a:t>82%</a:t>
+              <a:t>78%</a:t>
             </a:r>
-            <a:endParaRPr lang="en-US" sz="4600" dirty="0"/>
+            <a:endParaRPr lang="en-US" sz="4000" dirty="0"/>
           </a:p>
         </p:txBody>
       </p:sp>
@@ -6422,8 +6422,8 @@
         </p:nvSpPr>
         <p:spPr>
           <a:xfrm>
-            <a:off x="1124712" y="4005072"/>
-            <a:ext cx="2871216" cy="274320"/>
+            <a:off x="768096" y="3986784"/>
+            <a:ext cx="2212848" cy="274320"/>
           </a:xfrm>
           <a:prstGeom prst="rect">
             <a:avLst/>
@@ -6439,7 +6439,7 @@
               <a:buNone/>
             </a:pPr>
             <a:r>
-              <a:rPr lang="en-US" sz="1100" dirty="0">
+              <a:rPr lang="en-US" sz="1050" dirty="0">
                 <a:solidFill>
                   <a:srgbClr val="6B7280"/>
                 </a:solidFill>
@@ -6449,7 +6449,7 @@
               </a:rPr>
               <a:t>gross margin at list</a:t>
             </a:r>
-            <a:endParaRPr lang="en-US" sz="1100" dirty="0"/>
+            <a:endParaRPr lang="en-US" sz="1050" dirty="0"/>
           </a:p>
         </p:txBody>
       </p:sp>
@@ -6461,8 +6461,8 @@
         </p:nvSpPr>
         <p:spPr>
           <a:xfrm>
-            <a:off x="1124712" y="4370832"/>
-            <a:ext cx="2871216" cy="0"/>
+            <a:off x="768096" y="4352544"/>
+            <a:ext cx="2212848" cy="0"/>
           </a:xfrm>
           <a:prstGeom prst="line">
             <a:avLst/>
@@ -6484,8 +6484,8 @@
         </p:nvSpPr>
         <p:spPr>
           <a:xfrm>
-            <a:off x="1124712" y="4480560"/>
-            <a:ext cx="2926080" cy="457200"/>
+            <a:off x="768096" y="4462272"/>
+            <a:ext cx="2249424" cy="640080"/>
           </a:xfrm>
           <a:prstGeom prst="rect">
             <a:avLst/>
@@ -6494,14 +6494,17 @@
           <a:ln/>
         </p:spPr>
         <p:txBody>
-          <a:bodyPr wrap="square" lIns="0" tIns="0" rIns="0" bIns="0" rtlCol="0" anchor="ctr"/>
+          <a:bodyPr wrap="square" lIns="0" tIns="0" rIns="0" bIns="0" rtlCol="0" anchor="t"/>
           <a:lstStyle/>
           <a:p>
             <a:pPr algn="l" indent="0" marL="0">
+              <a:lnSpc>
+                <a:spcPct val="110000"/>
+              </a:lnSpc>
               <a:buNone/>
             </a:pPr>
             <a:r>
-              <a:rPr lang="en-US" sz="1300" dirty="0">
+              <a:rPr lang="en-US" sz="1250" dirty="0">
                 <a:solidFill>
                   <a:srgbClr val="4A5568"/>
                 </a:solidFill>
@@ -6512,10 +6515,13 @@
               <a:t>Price </a:t>
             </a:r>
             <a:pPr algn="l" indent="0" marL="0">
+              <a:lnSpc>
+                <a:spcPct val="110000"/>
+              </a:lnSpc>
               <a:buNone/>
             </a:pPr>
             <a:r>
-              <a:rPr lang="en-US" sz="1300" b="1" dirty="0">
+              <a:rPr lang="en-US" sz="1250" b="1" dirty="0">
                 <a:solidFill>
                   <a:srgbClr val="12132A"/>
                 </a:solidFill>
@@ -6523,13 +6529,34 @@
                 <a:ea typeface="Calibri" pitchFamily="34" charset="-122"/>
                 <a:cs typeface="Calibri" pitchFamily="34" charset="-120"/>
               </a:rPr>
-              <a:t>RM4.09   </a:t>
+              <a:t>RM2.85</a:t>
             </a:r>
             <a:pPr algn="l" indent="0" marL="0">
+              <a:lnSpc>
+                <a:spcPct val="110000"/>
+              </a:lnSpc>
               <a:buNone/>
             </a:pPr>
             <a:r>
-              <a:rPr lang="en-US" sz="1300" dirty="0">
+              <a:rPr lang="en-US" sz="1250" dirty="0">
+                <a:solidFill>
+                  <a:srgbClr val="000000"/>
+                </a:solidFill>
+                <a:latin typeface="Calibri" pitchFamily="34" charset="0"/>
+                <a:ea typeface="Calibri" pitchFamily="34" charset="-122"/>
+                <a:cs typeface="Calibri" pitchFamily="34" charset="-120"/>
+              </a:rPr>
+              <a:t>
+</a:t>
+            </a:r>
+            <a:pPr algn="l" indent="0" marL="0">
+              <a:lnSpc>
+                <a:spcPct val="110000"/>
+              </a:lnSpc>
+              <a:buNone/>
+            </a:pPr>
+            <a:r>
+              <a:rPr lang="en-US" sz="1250" dirty="0">
                 <a:solidFill>
                   <a:srgbClr val="4A5568"/>
                 </a:solidFill>
@@ -6540,10 +6567,13 @@
               <a:t>Cost </a:t>
             </a:r>
             <a:pPr algn="l" indent="0" marL="0">
+              <a:lnSpc>
+                <a:spcPct val="110000"/>
+              </a:lnSpc>
               <a:buNone/>
             </a:pPr>
             <a:r>
-              <a:rPr lang="en-US" sz="1300" b="1" dirty="0">
+              <a:rPr lang="en-US" sz="1250" b="1" dirty="0">
                 <a:solidFill>
                   <a:srgbClr val="12132A"/>
                 </a:solidFill>
@@ -6551,9 +6581,9 @@
                 <a:ea typeface="Calibri" pitchFamily="34" charset="-122"/>
                 <a:cs typeface="Calibri" pitchFamily="34" charset="-120"/>
               </a:rPr>
-              <a:t>RM0.74</a:t>
+              <a:t>RM0.64</a:t>
             </a:r>
-            <a:endParaRPr lang="en-US" sz="1300" dirty="0"/>
+            <a:endParaRPr lang="en-US" sz="1250" dirty="0"/>
           </a:p>
         </p:txBody>
       </p:sp>
@@ -6565,12 +6595,12 @@
         </p:nvSpPr>
         <p:spPr>
           <a:xfrm>
-            <a:off x="4572000" y="2468880"/>
-            <a:ext cx="3383280" cy="2788920"/>
+            <a:off x="3392424" y="2468880"/>
+            <a:ext cx="2651760" cy="2788920"/>
           </a:xfrm>
           <a:prstGeom prst="roundRect">
             <a:avLst>
-              <a:gd name="adj" fmla="val 3934"/>
+              <a:gd name="adj" fmla="val 4138"/>
             </a:avLst>
           </a:prstGeom>
           <a:solidFill>
@@ -6599,8 +6629,8 @@
         </p:nvSpPr>
         <p:spPr>
           <a:xfrm>
-            <a:off x="4828032" y="2697480"/>
-            <a:ext cx="2926080" cy="457200"/>
+            <a:off x="3611880" y="2697480"/>
+            <a:ext cx="2249424" cy="457200"/>
           </a:xfrm>
           <a:prstGeom prst="rect">
             <a:avLst/>
@@ -6616,7 +6646,7 @@
               <a:buNone/>
             </a:pPr>
             <a:r>
-              <a:rPr lang="en-US" sz="1550" b="1" dirty="0">
+              <a:rPr lang="en-US" sz="1500" b="1" dirty="0">
                 <a:solidFill>
                   <a:srgbClr val="12132A"/>
                 </a:solidFill>
@@ -6624,9 +6654,9 @@
                 <a:ea typeface="Calibri" pitchFamily="34" charset="-122"/>
                 <a:cs typeface="Calibri" pitchFamily="34" charset="-120"/>
               </a:rPr>
-              <a:t>AI Rank / Insight / Q</a:t>
+              <a:t>AI Rank</a:t>
             </a:r>
-            <a:endParaRPr lang="en-US" sz="1550" dirty="0"/>
+            <a:endParaRPr lang="en-US" sz="1500" dirty="0"/>
           </a:p>
         </p:txBody>
       </p:sp>
@@ -6638,8 +6668,8 @@
         </p:nvSpPr>
         <p:spPr>
           <a:xfrm>
-            <a:off x="4828032" y="3200400"/>
-            <a:ext cx="2871216" cy="777240"/>
+            <a:off x="3611880" y="3218688"/>
+            <a:ext cx="2212848" cy="731520"/>
           </a:xfrm>
           <a:prstGeom prst="rect">
             <a:avLst/>
@@ -6655,7 +6685,7 @@
               <a:buNone/>
             </a:pPr>
             <a:r>
-              <a:rPr lang="en-US" sz="4600" b="1" dirty="0">
+              <a:rPr lang="en-US" sz="4000" b="1" dirty="0">
                 <a:solidFill>
                   <a:srgbClr val="16A34A"/>
                 </a:solidFill>
@@ -6663,9 +6693,9 @@
                 <a:ea typeface="Calibri" pitchFamily="34" charset="-122"/>
                 <a:cs typeface="Calibri" pitchFamily="34" charset="-120"/>
               </a:rPr>
-              <a:t>72%</a:t>
+              <a:t>75%</a:t>
             </a:r>
-            <a:endParaRPr lang="en-US" sz="4600" dirty="0"/>
+            <a:endParaRPr lang="en-US" sz="4000" dirty="0"/>
           </a:p>
         </p:txBody>
       </p:sp>
@@ -6677,8 +6707,8 @@
         </p:nvSpPr>
         <p:spPr>
           <a:xfrm>
-            <a:off x="4828032" y="4005072"/>
-            <a:ext cx="2871216" cy="274320"/>
+            <a:off x="3611880" y="3986784"/>
+            <a:ext cx="2212848" cy="274320"/>
           </a:xfrm>
           <a:prstGeom prst="rect">
             <a:avLst/>
@@ -6694,7 +6724,7 @@
               <a:buNone/>
             </a:pPr>
             <a:r>
-              <a:rPr lang="en-US" sz="1100" dirty="0">
+              <a:rPr lang="en-US" sz="1050" dirty="0">
                 <a:solidFill>
                   <a:srgbClr val="6B7280"/>
                 </a:solidFill>
@@ -6704,7 +6734,7 @@
               </a:rPr>
               <a:t>gross margin at list</a:t>
             </a:r>
-            <a:endParaRPr lang="en-US" sz="1100" dirty="0"/>
+            <a:endParaRPr lang="en-US" sz="1050" dirty="0"/>
           </a:p>
         </p:txBody>
       </p:sp>
@@ -6716,8 +6746,8 @@
         </p:nvSpPr>
         <p:spPr>
           <a:xfrm>
-            <a:off x="4828032" y="4370832"/>
-            <a:ext cx="2871216" cy="0"/>
+            <a:off x="3611880" y="4352544"/>
+            <a:ext cx="2212848" cy="0"/>
           </a:xfrm>
           <a:prstGeom prst="line">
             <a:avLst/>
@@ -6739,8 +6769,8 @@
         </p:nvSpPr>
         <p:spPr>
           <a:xfrm>
-            <a:off x="4828032" y="4480560"/>
-            <a:ext cx="2926080" cy="457200"/>
+            <a:off x="3611880" y="4462272"/>
+            <a:ext cx="2249424" cy="640080"/>
           </a:xfrm>
           <a:prstGeom prst="rect">
             <a:avLst/>
@@ -6749,14 +6779,17 @@
           <a:ln/>
         </p:spPr>
         <p:txBody>
-          <a:bodyPr wrap="square" lIns="0" tIns="0" rIns="0" bIns="0" rtlCol="0" anchor="ctr"/>
+          <a:bodyPr wrap="square" lIns="0" tIns="0" rIns="0" bIns="0" rtlCol="0" anchor="t"/>
           <a:lstStyle/>
           <a:p>
             <a:pPr algn="l" indent="0" marL="0">
+              <a:lnSpc>
+                <a:spcPct val="110000"/>
+              </a:lnSpc>
               <a:buNone/>
             </a:pPr>
             <a:r>
-              <a:rPr lang="en-US" sz="1300" dirty="0">
+              <a:rPr lang="en-US" sz="1250" dirty="0">
                 <a:solidFill>
                   <a:srgbClr val="4A5568"/>
                 </a:solidFill>
@@ -6767,10 +6800,13 @@
               <a:t>Price </a:t>
             </a:r>
             <a:pPr algn="l" indent="0" marL="0">
+              <a:lnSpc>
+                <a:spcPct val="110000"/>
+              </a:lnSpc>
               <a:buNone/>
             </a:pPr>
             <a:r>
-              <a:rPr lang="en-US" sz="1300" b="1" dirty="0">
+              <a:rPr lang="en-US" sz="1250" b="1" dirty="0">
                 <a:solidFill>
                   <a:srgbClr val="12132A"/>
                 </a:solidFill>
@@ -6778,13 +6814,34 @@
                 <a:ea typeface="Calibri" pitchFamily="34" charset="-122"/>
                 <a:cs typeface="Calibri" pitchFamily="34" charset="-120"/>
               </a:rPr>
-              <a:t>RM1.64   </a:t>
+              <a:t>RM2.45</a:t>
             </a:r>
             <a:pPr algn="l" indent="0" marL="0">
+              <a:lnSpc>
+                <a:spcPct val="110000"/>
+              </a:lnSpc>
               <a:buNone/>
             </a:pPr>
             <a:r>
-              <a:rPr lang="en-US" sz="1300" dirty="0">
+              <a:rPr lang="en-US" sz="1250" dirty="0">
+                <a:solidFill>
+                  <a:srgbClr val="000000"/>
+                </a:solidFill>
+                <a:latin typeface="Calibri" pitchFamily="34" charset="0"/>
+                <a:ea typeface="Calibri" pitchFamily="34" charset="-122"/>
+                <a:cs typeface="Calibri" pitchFamily="34" charset="-120"/>
+              </a:rPr>
+              <a:t>
+</a:t>
+            </a:r>
+            <a:pPr algn="l" indent="0" marL="0">
+              <a:lnSpc>
+                <a:spcPct val="110000"/>
+              </a:lnSpc>
+              <a:buNone/>
+            </a:pPr>
+            <a:r>
+              <a:rPr lang="en-US" sz="1250" dirty="0">
                 <a:solidFill>
                   <a:srgbClr val="4A5568"/>
                 </a:solidFill>
@@ -6795,10 +6852,13 @@
               <a:t>Cost </a:t>
             </a:r>
             <a:pPr algn="l" indent="0" marL="0">
+              <a:lnSpc>
+                <a:spcPct val="110000"/>
+              </a:lnSpc>
               <a:buNone/>
             </a:pPr>
             <a:r>
-              <a:rPr lang="en-US" sz="1300" b="1" dirty="0">
+              <a:rPr lang="en-US" sz="1250" b="1" dirty="0">
                 <a:solidFill>
                   <a:srgbClr val="12132A"/>
                 </a:solidFill>
@@ -6806,9 +6866,9 @@
                 <a:ea typeface="Calibri" pitchFamily="34" charset="-122"/>
                 <a:cs typeface="Calibri" pitchFamily="34" charset="-120"/>
               </a:rPr>
-              <a:t>RM0.46</a:t>
+              <a:t>RM0.62</a:t>
             </a:r>
-            <a:endParaRPr lang="en-US" sz="1300" dirty="0"/>
+            <a:endParaRPr lang="en-US" sz="1250" dirty="0"/>
           </a:p>
         </p:txBody>
       </p:sp>
@@ -6820,12 +6880,12 @@
         </p:nvSpPr>
         <p:spPr>
           <a:xfrm>
-            <a:off x="8275320" y="2468880"/>
-            <a:ext cx="3383280" cy="2788920"/>
+            <a:off x="6236208" y="2468880"/>
+            <a:ext cx="2651760" cy="2788920"/>
           </a:xfrm>
           <a:prstGeom prst="roundRect">
             <a:avLst>
-              <a:gd name="adj" fmla="val 3934"/>
+              <a:gd name="adj" fmla="val 4138"/>
             </a:avLst>
           </a:prstGeom>
           <a:solidFill>
@@ -6854,8 +6914,8 @@
         </p:nvSpPr>
         <p:spPr>
           <a:xfrm>
-            <a:off x="8531352" y="2697480"/>
-            <a:ext cx="2926080" cy="457200"/>
+            <a:off x="6455664" y="2697480"/>
+            <a:ext cx="2249424" cy="457200"/>
           </a:xfrm>
           <a:prstGeom prst="rect">
             <a:avLst/>
@@ -6871,7 +6931,7 @@
               <a:buNone/>
             </a:pPr>
             <a:r>
-              <a:rPr lang="en-US" sz="1550" b="1" dirty="0">
+              <a:rPr lang="en-US" sz="1500" b="1" dirty="0">
                 <a:solidFill>
                   <a:srgbClr val="12132A"/>
                 </a:solidFill>
@@ -6879,9 +6939,9 @@
                 <a:ea typeface="Calibri" pitchFamily="34" charset="-122"/>
                 <a:cs typeface="Calibri" pitchFamily="34" charset="-120"/>
               </a:rPr>
-              <a:t>Job draft (Opus)</a:t>
+              <a:t>Interview Q</a:t>
             </a:r>
-            <a:endParaRPr lang="en-US" sz="1550" dirty="0"/>
+            <a:endParaRPr lang="en-US" sz="1500" dirty="0"/>
           </a:p>
         </p:txBody>
       </p:sp>
@@ -6893,8 +6953,8 @@
         </p:nvSpPr>
         <p:spPr>
           <a:xfrm>
-            <a:off x="8531352" y="3200400"/>
-            <a:ext cx="2871216" cy="777240"/>
+            <a:off x="6455664" y="3218688"/>
+            <a:ext cx="2212848" cy="731520"/>
           </a:xfrm>
           <a:prstGeom prst="rect">
             <a:avLst/>
@@ -6910,7 +6970,7 @@
               <a:buNone/>
             </a:pPr>
             <a:r>
-              <a:rPr lang="en-US" sz="4600" b="1" dirty="0">
+              <a:rPr lang="en-US" sz="4000" b="1" dirty="0">
                 <a:solidFill>
                   <a:srgbClr val="16A34A"/>
                 </a:solidFill>
@@ -6918,9 +6978,9 @@
                 <a:ea typeface="Calibri" pitchFamily="34" charset="-122"/>
                 <a:cs typeface="Calibri" pitchFamily="34" charset="-120"/>
               </a:rPr>
-              <a:t>81%</a:t>
+              <a:t>73%</a:t>
             </a:r>
-            <a:endParaRPr lang="en-US" sz="4600" dirty="0"/>
+            <a:endParaRPr lang="en-US" sz="4000" dirty="0"/>
           </a:p>
         </p:txBody>
       </p:sp>
@@ -6932,8 +6992,8 @@
         </p:nvSpPr>
         <p:spPr>
           <a:xfrm>
-            <a:off x="8531352" y="4005072"/>
-            <a:ext cx="2871216" cy="274320"/>
+            <a:off x="6455664" y="3986784"/>
+            <a:ext cx="2212848" cy="274320"/>
           </a:xfrm>
           <a:prstGeom prst="rect">
             <a:avLst/>
@@ -6949,7 +7009,7 @@
               <a:buNone/>
             </a:pPr>
             <a:r>
-              <a:rPr lang="en-US" sz="1100" dirty="0">
+              <a:rPr lang="en-US" sz="1050" dirty="0">
                 <a:solidFill>
                   <a:srgbClr val="6B7280"/>
                 </a:solidFill>
@@ -6959,7 +7019,7 @@
               </a:rPr>
               <a:t>gross margin at list</a:t>
             </a:r>
-            <a:endParaRPr lang="en-US" sz="1100" dirty="0"/>
+            <a:endParaRPr lang="en-US" sz="1050" dirty="0"/>
           </a:p>
         </p:txBody>
       </p:sp>
@@ -6971,8 +7031,8 @@
         </p:nvSpPr>
         <p:spPr>
           <a:xfrm>
-            <a:off x="8531352" y="4370832"/>
-            <a:ext cx="2871216" cy="0"/>
+            <a:off x="6455664" y="4352544"/>
+            <a:ext cx="2212848" cy="0"/>
           </a:xfrm>
           <a:prstGeom prst="line">
             <a:avLst/>
@@ -6994,8 +7054,153 @@
         </p:nvSpPr>
         <p:spPr>
           <a:xfrm>
-            <a:off x="8531352" y="4480560"/>
-            <a:ext cx="2926080" cy="457200"/>
+            <a:off x="6455664" y="4462272"/>
+            <a:ext cx="2249424" cy="640080"/>
+          </a:xfrm>
+          <a:prstGeom prst="rect">
+            <a:avLst/>
+          </a:prstGeom>
+          <a:noFill/>
+          <a:ln/>
+        </p:spPr>
+        <p:txBody>
+          <a:bodyPr wrap="square" lIns="0" tIns="0" rIns="0" bIns="0" rtlCol="0" anchor="t"/>
+          <a:lstStyle/>
+          <a:p>
+            <a:pPr algn="l" indent="0" marL="0">
+              <a:lnSpc>
+                <a:spcPct val="110000"/>
+              </a:lnSpc>
+              <a:buNone/>
+            </a:pPr>
+            <a:r>
+              <a:rPr lang="en-US" sz="1250" dirty="0">
+                <a:solidFill>
+                  <a:srgbClr val="4A5568"/>
+                </a:solidFill>
+                <a:latin typeface="Calibri" pitchFamily="34" charset="0"/>
+                <a:ea typeface="Calibri" pitchFamily="34" charset="-122"/>
+                <a:cs typeface="Calibri" pitchFamily="34" charset="-120"/>
+              </a:rPr>
+              <a:t>Price </a:t>
+            </a:r>
+            <a:pPr algn="l" indent="0" marL="0">
+              <a:lnSpc>
+                <a:spcPct val="110000"/>
+              </a:lnSpc>
+              <a:buNone/>
+            </a:pPr>
+            <a:r>
+              <a:rPr lang="en-US" sz="1250" b="1" dirty="0">
+                <a:solidFill>
+                  <a:srgbClr val="12132A"/>
+                </a:solidFill>
+                <a:latin typeface="Calibri" pitchFamily="34" charset="0"/>
+                <a:ea typeface="Calibri" pitchFamily="34" charset="-122"/>
+                <a:cs typeface="Calibri" pitchFamily="34" charset="-120"/>
+              </a:rPr>
+              <a:t>RM0.40</a:t>
+            </a:r>
+            <a:pPr algn="l" indent="0" marL="0">
+              <a:lnSpc>
+                <a:spcPct val="110000"/>
+              </a:lnSpc>
+              <a:buNone/>
+            </a:pPr>
+            <a:r>
+              <a:rPr lang="en-US" sz="1250" dirty="0">
+                <a:solidFill>
+                  <a:srgbClr val="000000"/>
+                </a:solidFill>
+                <a:latin typeface="Calibri" pitchFamily="34" charset="0"/>
+                <a:ea typeface="Calibri" pitchFamily="34" charset="-122"/>
+                <a:cs typeface="Calibri" pitchFamily="34" charset="-120"/>
+              </a:rPr>
+              <a:t>
+</a:t>
+            </a:r>
+            <a:pPr algn="l" indent="0" marL="0">
+              <a:lnSpc>
+                <a:spcPct val="110000"/>
+              </a:lnSpc>
+              <a:buNone/>
+            </a:pPr>
+            <a:r>
+              <a:rPr lang="en-US" sz="1250" dirty="0">
+                <a:solidFill>
+                  <a:srgbClr val="4A5568"/>
+                </a:solidFill>
+                <a:latin typeface="Calibri" pitchFamily="34" charset="0"/>
+                <a:ea typeface="Calibri" pitchFamily="34" charset="-122"/>
+                <a:cs typeface="Calibri" pitchFamily="34" charset="-120"/>
+              </a:rPr>
+              <a:t>Cost </a:t>
+            </a:r>
+            <a:pPr algn="l" indent="0" marL="0">
+              <a:lnSpc>
+                <a:spcPct val="110000"/>
+              </a:lnSpc>
+              <a:buNone/>
+            </a:pPr>
+            <a:r>
+              <a:rPr lang="en-US" sz="1250" b="1" dirty="0">
+                <a:solidFill>
+                  <a:srgbClr val="12132A"/>
+                </a:solidFill>
+                <a:latin typeface="Calibri" pitchFamily="34" charset="0"/>
+                <a:ea typeface="Calibri" pitchFamily="34" charset="-122"/>
+                <a:cs typeface="Calibri" pitchFamily="34" charset="-120"/>
+              </a:rPr>
+              <a:t>RM0.11</a:t>
+            </a:r>
+            <a:endParaRPr lang="en-US" sz="1250" dirty="0"/>
+          </a:p>
+        </p:txBody>
+      </p:sp>
+      <p:sp>
+        <p:nvSpPr>
+          <p:cNvPr id="23" name="Shape 21"/>
+          <p:cNvSpPr/>
+          <p:nvPr/>
+        </p:nvSpPr>
+        <p:spPr>
+          <a:xfrm>
+            <a:off x="9079992" y="2468880"/>
+            <a:ext cx="2651760" cy="2788920"/>
+          </a:xfrm>
+          <a:prstGeom prst="roundRect">
+            <a:avLst>
+              <a:gd name="adj" fmla="val 4138"/>
+            </a:avLst>
+          </a:prstGeom>
+          <a:solidFill>
+            <a:srgbClr val="FFFFFF"/>
+          </a:solidFill>
+          <a:ln w="12700">
+            <a:solidFill>
+              <a:srgbClr val="DEDEE3"/>
+            </a:solidFill>
+            <a:prstDash val="solid"/>
+          </a:ln>
+          <a:effectLst>
+            <a:outerShdw sx="100000" sy="100000" kx="0" ky="0" algn="bl" rotWithShape="0" blurRad="101600" dist="25400" dir="5400000">
+              <a:srgbClr val="9AA0B5">
+                <a:alpha val="18000"/>
+              </a:srgbClr>
+            </a:outerShdw>
+          </a:effectLst>
+        </p:spPr>
+      </p:sp>
+      <p:sp>
+        <p:nvSpPr>
+          <p:cNvPr id="24" name="Text 22"/>
+          <p:cNvSpPr/>
+          <p:nvPr/>
+        </p:nvSpPr>
+        <p:spPr>
+          <a:xfrm>
+            <a:off x="9299448" y="2697480"/>
+            <a:ext cx="2249424" cy="457200"/>
           </a:xfrm>
           <a:prstGeom prst="rect">
             <a:avLst/>
@@ -7011,7 +7216,150 @@
               <a:buNone/>
             </a:pPr>
             <a:r>
-              <a:rPr lang="en-US" sz="1300" dirty="0">
+              <a:rPr lang="en-US" sz="1500" b="1" dirty="0">
+                <a:solidFill>
+                  <a:srgbClr val="12132A"/>
+                </a:solidFill>
+                <a:latin typeface="Calibri" pitchFamily="34" charset="0"/>
+                <a:ea typeface="Calibri" pitchFamily="34" charset="-122"/>
+                <a:cs typeface="Calibri" pitchFamily="34" charset="-120"/>
+              </a:rPr>
+              <a:t>Job draft</a:t>
+            </a:r>
+            <a:endParaRPr lang="en-US" sz="1500" dirty="0"/>
+          </a:p>
+        </p:txBody>
+      </p:sp>
+      <p:sp>
+        <p:nvSpPr>
+          <p:cNvPr id="25" name="Text 23"/>
+          <p:cNvSpPr/>
+          <p:nvPr/>
+        </p:nvSpPr>
+        <p:spPr>
+          <a:xfrm>
+            <a:off x="9299448" y="3218688"/>
+            <a:ext cx="2212848" cy="731520"/>
+          </a:xfrm>
+          <a:prstGeom prst="rect">
+            <a:avLst/>
+          </a:prstGeom>
+          <a:noFill/>
+          <a:ln/>
+        </p:spPr>
+        <p:txBody>
+          <a:bodyPr wrap="square" lIns="0" tIns="0" rIns="0" bIns="0" rtlCol="0" anchor="ctr"/>
+          <a:lstStyle/>
+          <a:p>
+            <a:pPr algn="l" indent="0" marL="0">
+              <a:buNone/>
+            </a:pPr>
+            <a:r>
+              <a:rPr lang="en-US" sz="4000" b="1" dirty="0">
+                <a:solidFill>
+                  <a:srgbClr val="16A34A"/>
+                </a:solidFill>
+                <a:latin typeface="Calibri" pitchFamily="34" charset="0"/>
+                <a:ea typeface="Calibri" pitchFamily="34" charset="-122"/>
+                <a:cs typeface="Calibri" pitchFamily="34" charset="-120"/>
+              </a:rPr>
+              <a:t>69%</a:t>
+            </a:r>
+            <a:endParaRPr lang="en-US" sz="4000" dirty="0"/>
+          </a:p>
+        </p:txBody>
+      </p:sp>
+      <p:sp>
+        <p:nvSpPr>
+          <p:cNvPr id="26" name="Text 24"/>
+          <p:cNvSpPr/>
+          <p:nvPr/>
+        </p:nvSpPr>
+        <p:spPr>
+          <a:xfrm>
+            <a:off x="9299448" y="3986784"/>
+            <a:ext cx="2212848" cy="274320"/>
+          </a:xfrm>
+          <a:prstGeom prst="rect">
+            <a:avLst/>
+          </a:prstGeom>
+          <a:noFill/>
+          <a:ln/>
+        </p:spPr>
+        <p:txBody>
+          <a:bodyPr wrap="square" lIns="0" tIns="0" rIns="0" bIns="0" rtlCol="0" anchor="ctr"/>
+          <a:lstStyle/>
+          <a:p>
+            <a:pPr algn="l" indent="0" marL="0">
+              <a:buNone/>
+            </a:pPr>
+            <a:r>
+              <a:rPr lang="en-US" sz="1050" dirty="0">
+                <a:solidFill>
+                  <a:srgbClr val="6B7280"/>
+                </a:solidFill>
+                <a:latin typeface="Calibri" pitchFamily="34" charset="0"/>
+                <a:ea typeface="Calibri" pitchFamily="34" charset="-122"/>
+                <a:cs typeface="Calibri" pitchFamily="34" charset="-120"/>
+              </a:rPr>
+              <a:t>gross margin at list</a:t>
+            </a:r>
+            <a:endParaRPr lang="en-US" sz="1050" dirty="0"/>
+          </a:p>
+        </p:txBody>
+      </p:sp>
+      <p:sp>
+        <p:nvSpPr>
+          <p:cNvPr id="27" name="Shape 25"/>
+          <p:cNvSpPr/>
+          <p:nvPr/>
+        </p:nvSpPr>
+        <p:spPr>
+          <a:xfrm>
+            <a:off x="9299448" y="4352544"/>
+            <a:ext cx="2212848" cy="0"/>
+          </a:xfrm>
+          <a:prstGeom prst="line">
+            <a:avLst/>
+          </a:prstGeom>
+          <a:noFill/>
+          <a:ln w="12700">
+            <a:solidFill>
+              <a:srgbClr val="DEDEE3"/>
+            </a:solidFill>
+            <a:prstDash val="solid"/>
+          </a:ln>
+        </p:spPr>
+      </p:sp>
+      <p:sp>
+        <p:nvSpPr>
+          <p:cNvPr id="28" name="Text 26"/>
+          <p:cNvSpPr/>
+          <p:nvPr/>
+        </p:nvSpPr>
+        <p:spPr>
+          <a:xfrm>
+            <a:off x="9299448" y="4462272"/>
+            <a:ext cx="2249424" cy="640080"/>
+          </a:xfrm>
+          <a:prstGeom prst="rect">
+            <a:avLst/>
+          </a:prstGeom>
+          <a:noFill/>
+          <a:ln/>
+        </p:spPr>
+        <p:txBody>
+          <a:bodyPr wrap="square" lIns="0" tIns="0" rIns="0" bIns="0" rtlCol="0" anchor="t"/>
+          <a:lstStyle/>
+          <a:p>
+            <a:pPr algn="l" indent="0" marL="0">
+              <a:lnSpc>
+                <a:spcPct val="110000"/>
+              </a:lnSpc>
+              <a:buNone/>
+            </a:pPr>
+            <a:r>
+              <a:rPr lang="en-US" sz="1250" dirty="0">
                 <a:solidFill>
                   <a:srgbClr val="4A5568"/>
                 </a:solidFill>
@@ -7022,10 +7370,13 @@
               <a:t>Price </a:t>
             </a:r>
             <a:pPr algn="l" indent="0" marL="0">
+              <a:lnSpc>
+                <a:spcPct val="110000"/>
+              </a:lnSpc>
               <a:buNone/>
             </a:pPr>
             <a:r>
-              <a:rPr lang="en-US" sz="1300" b="1" dirty="0">
+              <a:rPr lang="en-US" sz="1250" b="1" dirty="0">
                 <a:solidFill>
                   <a:srgbClr val="12132A"/>
                 </a:solidFill>
@@ -7033,13 +7384,34 @@
                 <a:ea typeface="Calibri" pitchFamily="34" charset="-122"/>
                 <a:cs typeface="Calibri" pitchFamily="34" charset="-120"/>
               </a:rPr>
-              <a:t>RM2.05   </a:t>
+              <a:t>RM2.25</a:t>
             </a:r>
             <a:pPr algn="l" indent="0" marL="0">
+              <a:lnSpc>
+                <a:spcPct val="110000"/>
+              </a:lnSpc>
               <a:buNone/>
             </a:pPr>
             <a:r>
-              <a:rPr lang="en-US" sz="1300" dirty="0">
+              <a:rPr lang="en-US" sz="1250" dirty="0">
+                <a:solidFill>
+                  <a:srgbClr val="000000"/>
+                </a:solidFill>
+                <a:latin typeface="Calibri" pitchFamily="34" charset="0"/>
+                <a:ea typeface="Calibri" pitchFamily="34" charset="-122"/>
+                <a:cs typeface="Calibri" pitchFamily="34" charset="-120"/>
+              </a:rPr>
+              <a:t>
+</a:t>
+            </a:r>
+            <a:pPr algn="l" indent="0" marL="0">
+              <a:lnSpc>
+                <a:spcPct val="110000"/>
+              </a:lnSpc>
+              <a:buNone/>
+            </a:pPr>
+            <a:r>
+              <a:rPr lang="en-US" sz="1250" dirty="0">
                 <a:solidFill>
                   <a:srgbClr val="4A5568"/>
                 </a:solidFill>
@@ -7050,10 +7422,13 @@
               <a:t>Cost </a:t>
             </a:r>
             <a:pPr algn="l" indent="0" marL="0">
+              <a:lnSpc>
+                <a:spcPct val="110000"/>
+              </a:lnSpc>
               <a:buNone/>
             </a:pPr>
             <a:r>
-              <a:rPr lang="en-US" sz="1300" b="1" dirty="0">
+              <a:rPr lang="en-US" sz="1250" b="1" dirty="0">
                 <a:solidFill>
                   <a:srgbClr val="12132A"/>
                 </a:solidFill>
@@ -7061,15 +7436,15 @@
                 <a:ea typeface="Calibri" pitchFamily="34" charset="-122"/>
                 <a:cs typeface="Calibri" pitchFamily="34" charset="-120"/>
               </a:rPr>
-              <a:t>RM0.39</a:t>
+              <a:t>RM0.69</a:t>
             </a:r>
-            <a:endParaRPr lang="en-US" sz="1300" dirty="0"/>
+            <a:endParaRPr lang="en-US" sz="1250" dirty="0"/>
           </a:p>
         </p:txBody>
       </p:sp>
       <p:sp>
         <p:nvSpPr>
-          <p:cNvPr id="23" name="Text 21"/>
+          <p:cNvPr id="29" name="Text 27"/>
           <p:cNvSpPr/>
           <p:nvPr/>
         </p:nvSpPr>
@@ -7100,7 +7475,7 @@
                 <a:ea typeface="Calibri" pitchFamily="34" charset="-122"/>
                 <a:cs typeface="Calibri" pitchFamily="34" charset="-120"/>
               </a:rPr>
-              <a:t>Cost = AI inference + Stripe (3% + RM1 per top-up, min 20 credits) + 10% partner share. Even after all three, top-ups stay the highest-margin revenue at 70%+.</a:t>
+              <a:t>Cost = AI inference + Stripe (3% + RM1 per top-up) + 10% partner share, on each credit's minimum top-up. Even after all three, top-ups clear ~70% margin.</a:t>
             </a:r>
             <a:endParaRPr lang="en-US" sz="1100" dirty="0"/>
           </a:p>
@@ -7108,7 +7483,7 @@
       </p:sp>
       <p:sp>
         <p:nvSpPr>
-          <p:cNvPr id="24" name="Text 22"/>
+          <p:cNvPr id="30" name="Text 28"/>
           <p:cNvSpPr/>
           <p:nvPr/>
         </p:nvSpPr>
@@ -7147,7 +7522,7 @@
       </p:sp>
       <p:sp>
         <p:nvSpPr>
-          <p:cNvPr id="25" name="Text 23"/>
+          <p:cNvPr id="31" name="Text 29"/>
           <p:cNvSpPr/>
           <p:nvPr/>
         </p:nvSpPr>
@@ -11971,7 +12346,7 @@
                 <a:ea typeface="Calibri" pitchFamily="34" charset="-122"/>
                 <a:cs typeface="Calibri" pitchFamily="34" charset="-120"/>
               </a:rPr>
-              <a:t>70–97%</a:t>
+              <a:t>80–90%</a:t>
             </a:r>
             <a:endParaRPr lang="en-US" sz="3000" dirty="0"/>
           </a:p>
@@ -12147,7 +12522,7 @@
                 <a:ea typeface="Calibri" pitchFamily="34" charset="-122"/>
                 <a:cs typeface="Calibri" pitchFamily="34" charset="-120"/>
               </a:rPr>
-              <a:t>Each tier bundles enough screening and AI credits to run its open roles. The bundle is worth 4–5× the plan price at list credit rates, which anchors upgrades.</a:t>
+              <a:t>Each tier bundles enough screening and AI credits to run its open roles. The bundle is worth 2–3× the plan price at list credit rates, which anchors upgrades.</a:t>
             </a:r>
             <a:endParaRPr lang="en-US" sz="1250" dirty="0"/>
           </a:p>
@@ -12284,7 +12659,7 @@
                 <a:ea typeface="Calibri" pitchFamily="34" charset="-122"/>
                 <a:cs typeface="Calibri" pitchFamily="34" charset="-120"/>
               </a:rPr>
-              <a:t>Overage sells at RM4.09 / RM1.64 / RM2.05 per action against an AI cost of a few sen. This is where blended margin expands as accounts grow.</a:t>
+              <a:t>Overage sells at RM0.40–RM2.85 per action against a few sen of AI cost. This is where blended margin expands as accounts grow.</a:t>
             </a:r>
             <a:endParaRPr lang="en-US" sz="1250" dirty="0"/>
           </a:p>
@@ -20147,7 +20522,7 @@
                 <a:ea typeface="Calibri" pitchFamily="34" charset="-122"/>
                 <a:cs typeface="Calibri" pitchFamily="34" charset="-120"/>
               </a:rPr>
-              <a:t>The included AI is worth 4–5× the plan price</a:t>
+              <a:t>The included AI is worth 2–3× the plan price</a:t>
             </a:r>
             <a:endParaRPr lang="en-US" sz="3400" dirty="0"/>
           </a:p>
@@ -20298,7 +20673,7 @@
                 <a:ea typeface="Calibri" pitchFamily="34" charset="-122"/>
                 <a:cs typeface="Calibri" pitchFamily="34" charset="-120"/>
               </a:rPr>
-              <a:t>4.8×</a:t>
+              <a:t>3.3×</a:t>
             </a:r>
             <a:endParaRPr lang="en-US" sz="2400" dirty="0"/>
           </a:p>
@@ -20415,7 +20790,7 @@
                 <a:ea typeface="Calibri" pitchFamily="34" charset="-122"/>
                 <a:cs typeface="Calibri" pitchFamily="34" charset="-120"/>
               </a:rPr>
-              <a:t>RM474</a:t>
+              <a:t>RM328</a:t>
             </a:r>
             <a:endParaRPr lang="en-US" sz="2800" dirty="0"/>
           </a:p>
@@ -20628,7 +21003,7 @@
                 <a:ea typeface="Calibri" pitchFamily="34" charset="-122"/>
                 <a:cs typeface="Calibri" pitchFamily="34" charset="-120"/>
               </a:rPr>
-              <a:t>4.2×</a:t>
+              <a:t>2.8×</a:t>
             </a:r>
             <a:endParaRPr lang="en-US" sz="2400" dirty="0"/>
           </a:p>
@@ -20745,7 +21120,7 @@
                 <a:ea typeface="Calibri" pitchFamily="34" charset="-122"/>
                 <a:cs typeface="Calibri" pitchFamily="34" charset="-120"/>
               </a:rPr>
-              <a:t>RM2,511</a:t>
+              <a:t>RM1,653</a:t>
             </a:r>
             <a:endParaRPr lang="en-US" sz="2800" dirty="0"/>
           </a:p>
@@ -20958,7 +21333,7 @@
                 <a:ea typeface="Calibri" pitchFamily="34" charset="-122"/>
                 <a:cs typeface="Calibri" pitchFamily="34" charset="-120"/>
               </a:rPr>
-              <a:t>3.8×</a:t>
+              <a:t>2.4×</a:t>
             </a:r>
             <a:endParaRPr lang="en-US" sz="2400" dirty="0"/>
           </a:p>
@@ -21075,7 +21450,7 @@
                 <a:ea typeface="Calibri" pitchFamily="34" charset="-122"/>
                 <a:cs typeface="Calibri" pitchFamily="34" charset="-120"/>
               </a:rPr>
-              <a:t>RM5,317</a:t>
+              <a:t>RM3,420</a:t>
             </a:r>
             <a:endParaRPr lang="en-US" sz="2800" dirty="0"/>
           </a:p>
@@ -21215,7 +21590,7 @@
                 <a:ea typeface="Calibri" pitchFamily="34" charset="-122"/>
                 <a:cs typeface="Calibri" pitchFamily="34" charset="-120"/>
               </a:rPr>
-              <a:t>Included value = monthly allowance priced at list credit rates (RM4.09 screening · RM1.64 AI Rank / Insight / Questions).</a:t>
+              <a:t>Included value = monthly allowance priced at list credit rates (RM2.85 screening · RM2.45 AI Rank · RM0.40 questions). AI Insight allowance not valued here.</a:t>
             </a:r>
             <a:endParaRPr lang="en-US" sz="1050" dirty="0"/>
           </a:p>
@@ -21432,10 +21807,11 @@
             <a:tbl>
               <a:tblPr/>
               <a:tblGrid>
-                <a:gridCol w="3749040"/>
-                <a:gridCol w="2011680"/>
+                <a:gridCol w="3017520"/>
+                <a:gridCol w="1371600"/>
+                <a:gridCol w="1371600"/>
               </a:tblGrid>
-              <a:tr h="475488">
+              <a:tr h="512064">
                 <a:tc>
                   <a:txBody>
                     <a:bodyPr/>
@@ -21445,7 +21821,7 @@
                         <a:buNone/>
                       </a:pPr>
                       <a:r>
-                        <a:rPr lang="en-US" sz="1300" b="1" dirty="0">
+                        <a:rPr lang="en-US" sz="1250" b="1" dirty="0">
                           <a:solidFill>
                             <a:srgbClr val="FFFFFF"/>
                           </a:solidFill>
@@ -21455,7 +21831,7 @@
                         </a:rPr>
                         <a:t>Credit</a:t>
                       </a:r>
-                      <a:endParaRPr lang="en-US" sz="1300" dirty="0">
+                      <a:endParaRPr lang="en-US" sz="1250" dirty="0">
                         <a:latin typeface="Calibri" charset="0"/>
                         <a:ea typeface="Calibri" charset="0"/>
                         <a:cs typeface="Calibri" charset="0"/>
@@ -21513,7 +21889,7 @@
                         <a:buNone/>
                       </a:pPr>
                       <a:r>
-                        <a:rPr lang="en-US" sz="1300" b="1" dirty="0">
+                        <a:rPr lang="en-US" sz="1250" b="1" dirty="0">
                           <a:solidFill>
                             <a:srgbClr val="FFFFFF"/>
                           </a:solidFill>
@@ -21521,9 +21897,9 @@
                           <a:ea typeface="Calibri" pitchFamily="34" charset="-122"/>
                           <a:cs typeface="Calibri" pitchFamily="34" charset="-120"/>
                         </a:rPr>
-                        <a:t>List price (MYR)</a:t>
+                        <a:t>Price (MYR)</a:t>
                       </a:r>
-                      <a:endParaRPr lang="en-US" sz="1300" dirty="0">
+                      <a:endParaRPr lang="en-US" sz="1250" dirty="0">
                         <a:latin typeface="Calibri" charset="0"/>
                         <a:ea typeface="Calibri" charset="0"/>
                         <a:cs typeface="Calibri" charset="0"/>
@@ -21572,8 +21948,76 @@
                     </a:solidFill>
                   </a:tcPr>
                 </a:tc>
+                <a:tc>
+                  <a:txBody>
+                    <a:bodyPr/>
+                    <a:lstStyle/>
+                    <a:p>
+                      <a:pPr algn="ctr" indent="0" marL="0">
+                        <a:buNone/>
+                      </a:pPr>
+                      <a:r>
+                        <a:rPr lang="en-US" sz="1250" b="1" dirty="0">
+                          <a:solidFill>
+                            <a:srgbClr val="FFFFFF"/>
+                          </a:solidFill>
+                          <a:latin typeface="Calibri" pitchFamily="34" charset="0"/>
+                          <a:ea typeface="Calibri" pitchFamily="34" charset="-122"/>
+                          <a:cs typeface="Calibri" pitchFamily="34" charset="-120"/>
+                        </a:rPr>
+                        <a:t>Min top-up</a:t>
+                      </a:r>
+                      <a:endParaRPr lang="en-US" sz="1250" dirty="0">
+                        <a:latin typeface="Calibri" charset="0"/>
+                        <a:ea typeface="Calibri" charset="0"/>
+                        <a:cs typeface="Calibri" charset="0"/>
+                      </a:endParaRPr>
+                    </a:p>
+                  </a:txBody>
+                  <a:tcPr marL="101600" marR="101600" marT="25400" marB="25400" anchor="ctr">
+                    <a:lnL w="6350" cap="flat" cmpd="sng" algn="ctr">
+                      <a:solidFill>
+                        <a:srgbClr val="E6E8F0"/>
+                      </a:solidFill>
+                      <a:prstDash val="solid"/>
+                      <a:round/>
+                      <a:headEnd type="none" w="med" len="med"/>
+                      <a:tailEnd type="none" w="med" len="med"/>
+                    </a:lnL>
+                    <a:lnR w="6350" cap="flat" cmpd="sng" algn="ctr">
+                      <a:solidFill>
+                        <a:srgbClr val="E6E8F0"/>
+                      </a:solidFill>
+                      <a:prstDash val="solid"/>
+                      <a:round/>
+                      <a:headEnd type="none" w="med" len="med"/>
+                      <a:tailEnd type="none" w="med" len="med"/>
+                    </a:lnR>
+                    <a:lnT w="6350" cap="flat" cmpd="sng" algn="ctr">
+                      <a:solidFill>
+                        <a:srgbClr val="E6E8F0"/>
+                      </a:solidFill>
+                      <a:prstDash val="solid"/>
+                      <a:round/>
+                      <a:headEnd type="none" w="med" len="med"/>
+                      <a:tailEnd type="none" w="med" len="med"/>
+                    </a:lnT>
+                    <a:lnB w="6350" cap="flat" cmpd="sng" algn="ctr">
+                      <a:solidFill>
+                        <a:srgbClr val="E6E8F0"/>
+                      </a:solidFill>
+                      <a:prstDash val="solid"/>
+                      <a:round/>
+                      <a:headEnd type="none" w="med" len="med"/>
+                      <a:tailEnd type="none" w="med" len="med"/>
+                    </a:lnB>
+                    <a:solidFill>
+                      <a:srgbClr val="0A1FC2"/>
+                    </a:solidFill>
+                  </a:tcPr>
+                </a:tc>
               </a:tr>
-              <a:tr h="475488">
+              <a:tr h="512064">
                 <a:tc>
                   <a:txBody>
                     <a:bodyPr/>
@@ -21583,7 +22027,7 @@
                         <a:buNone/>
                       </a:pPr>
                       <a:r>
-                        <a:rPr lang="en-US" sz="1300" dirty="0">
+                        <a:rPr lang="en-US" sz="1250" dirty="0">
                           <a:solidFill>
                             <a:srgbClr val="12132A"/>
                           </a:solidFill>
@@ -21593,7 +22037,7 @@
                         </a:rPr>
                         <a:t>Applicant / resume screening</a:t>
                       </a:r>
-                      <a:endParaRPr lang="en-US" sz="1300" dirty="0">
+                      <a:endParaRPr lang="en-US" sz="1250" dirty="0">
                         <a:latin typeface="Calibri" charset="0"/>
                         <a:ea typeface="Calibri" charset="0"/>
                         <a:cs typeface="Calibri" charset="0"/>
@@ -21651,7 +22095,7 @@
                         <a:buNone/>
                       </a:pPr>
                       <a:r>
-                        <a:rPr lang="en-US" sz="1300" b="1" dirty="0">
+                        <a:rPr lang="en-US" sz="1250" b="1" dirty="0">
                           <a:solidFill>
                             <a:srgbClr val="0B2AE0"/>
                           </a:solidFill>
@@ -21659,9 +22103,9 @@
                           <a:ea typeface="Calibri" pitchFamily="34" charset="-122"/>
                           <a:cs typeface="Calibri" pitchFamily="34" charset="-120"/>
                         </a:rPr>
-                        <a:t>RM4.09</a:t>
+                        <a:t>RM2.85</a:t>
                       </a:r>
-                      <a:endParaRPr lang="en-US" sz="1300" dirty="0">
+                      <a:endParaRPr lang="en-US" sz="1250" dirty="0">
                         <a:latin typeface="Calibri" charset="0"/>
                         <a:ea typeface="Calibri" charset="0"/>
                         <a:cs typeface="Calibri" charset="0"/>
@@ -21710,8 +22154,76 @@
                     </a:solidFill>
                   </a:tcPr>
                 </a:tc>
+                <a:tc>
+                  <a:txBody>
+                    <a:bodyPr/>
+                    <a:lstStyle/>
+                    <a:p>
+                      <a:pPr algn="ctr" indent="0" marL="0">
+                        <a:buNone/>
+                      </a:pPr>
+                      <a:r>
+                        <a:rPr lang="en-US" sz="1250" dirty="0">
+                          <a:solidFill>
+                            <a:srgbClr val="12132A"/>
+                          </a:solidFill>
+                          <a:latin typeface="Calibri" pitchFamily="34" charset="0"/>
+                          <a:ea typeface="Calibri" pitchFamily="34" charset="-122"/>
+                          <a:cs typeface="Calibri" pitchFamily="34" charset="-120"/>
+                        </a:rPr>
+                        <a:t>10</a:t>
+                      </a:r>
+                      <a:endParaRPr lang="en-US" sz="1250" dirty="0">
+                        <a:latin typeface="Calibri" charset="0"/>
+                        <a:ea typeface="Calibri" charset="0"/>
+                        <a:cs typeface="Calibri" charset="0"/>
+                      </a:endParaRPr>
+                    </a:p>
+                  </a:txBody>
+                  <a:tcPr marL="101600" marR="101600" marT="25400" marB="25400" anchor="ctr">
+                    <a:lnL w="6350" cap="flat" cmpd="sng" algn="ctr">
+                      <a:solidFill>
+                        <a:srgbClr val="E6E8F0"/>
+                      </a:solidFill>
+                      <a:prstDash val="solid"/>
+                      <a:round/>
+                      <a:headEnd type="none" w="med" len="med"/>
+                      <a:tailEnd type="none" w="med" len="med"/>
+                    </a:lnL>
+                    <a:lnR w="6350" cap="flat" cmpd="sng" algn="ctr">
+                      <a:solidFill>
+                        <a:srgbClr val="E6E8F0"/>
+                      </a:solidFill>
+                      <a:prstDash val="solid"/>
+                      <a:round/>
+                      <a:headEnd type="none" w="med" len="med"/>
+                      <a:tailEnd type="none" w="med" len="med"/>
+                    </a:lnR>
+                    <a:lnT w="6350" cap="flat" cmpd="sng" algn="ctr">
+                      <a:solidFill>
+                        <a:srgbClr val="E6E8F0"/>
+                      </a:solidFill>
+                      <a:prstDash val="solid"/>
+                      <a:round/>
+                      <a:headEnd type="none" w="med" len="med"/>
+                      <a:tailEnd type="none" w="med" len="med"/>
+                    </a:lnT>
+                    <a:lnB w="6350" cap="flat" cmpd="sng" algn="ctr">
+                      <a:solidFill>
+                        <a:srgbClr val="E6E8F0"/>
+                      </a:solidFill>
+                      <a:prstDash val="solid"/>
+                      <a:round/>
+                      <a:headEnd type="none" w="med" len="med"/>
+                      <a:tailEnd type="none" w="med" len="med"/>
+                    </a:lnB>
+                    <a:solidFill>
+                      <a:srgbClr val="FFFFFF"/>
+                    </a:solidFill>
+                  </a:tcPr>
+                </a:tc>
               </a:tr>
-              <a:tr h="475488">
+              <a:tr h="512064">
                 <a:tc>
                   <a:txBody>
                     <a:bodyPr/>
@@ -21721,7 +22233,7 @@
                         <a:buNone/>
                       </a:pPr>
                       <a:r>
-                        <a:rPr lang="en-US" sz="1300" dirty="0">
+                        <a:rPr lang="en-US" sz="1250" dirty="0">
                           <a:solidFill>
                             <a:srgbClr val="12132A"/>
                           </a:solidFill>
@@ -21731,7 +22243,7 @@
                         </a:rPr>
                         <a:t>AI Rank</a:t>
                       </a:r>
-                      <a:endParaRPr lang="en-US" sz="1300" dirty="0">
+                      <a:endParaRPr lang="en-US" sz="1250" dirty="0">
                         <a:latin typeface="Calibri" charset="0"/>
                         <a:ea typeface="Calibri" charset="0"/>
                         <a:cs typeface="Calibri" charset="0"/>
@@ -21789,7 +22301,7 @@
                         <a:buNone/>
                       </a:pPr>
                       <a:r>
-                        <a:rPr lang="en-US" sz="1300" b="1" dirty="0">
+                        <a:rPr lang="en-US" sz="1250" b="1" dirty="0">
                           <a:solidFill>
                             <a:srgbClr val="0B2AE0"/>
                           </a:solidFill>
@@ -21797,9 +22309,9 @@
                           <a:ea typeface="Calibri" pitchFamily="34" charset="-122"/>
                           <a:cs typeface="Calibri" pitchFamily="34" charset="-120"/>
                         </a:rPr>
-                        <a:t>RM1.64</a:t>
+                        <a:t>RM2.45</a:t>
                       </a:r>
-                      <a:endParaRPr lang="en-US" sz="1300" dirty="0">
+                      <a:endParaRPr lang="en-US" sz="1250" dirty="0">
                         <a:latin typeface="Calibri" charset="0"/>
                         <a:ea typeface="Calibri" charset="0"/>
                         <a:cs typeface="Calibri" charset="0"/>
@@ -21848,8 +22360,76 @@
                     </a:solidFill>
                   </a:tcPr>
                 </a:tc>
+                <a:tc>
+                  <a:txBody>
+                    <a:bodyPr/>
+                    <a:lstStyle/>
+                    <a:p>
+                      <a:pPr algn="ctr" indent="0" marL="0">
+                        <a:buNone/>
+                      </a:pPr>
+                      <a:r>
+                        <a:rPr lang="en-US" sz="1250" dirty="0">
+                          <a:solidFill>
+                            <a:srgbClr val="12132A"/>
+                          </a:solidFill>
+                          <a:latin typeface="Calibri" pitchFamily="34" charset="0"/>
+                          <a:ea typeface="Calibri" pitchFamily="34" charset="-122"/>
+                          <a:cs typeface="Calibri" pitchFamily="34" charset="-120"/>
+                        </a:rPr>
+                        <a:t>10</a:t>
+                      </a:r>
+                      <a:endParaRPr lang="en-US" sz="1250" dirty="0">
+                        <a:latin typeface="Calibri" charset="0"/>
+                        <a:ea typeface="Calibri" charset="0"/>
+                        <a:cs typeface="Calibri" charset="0"/>
+                      </a:endParaRPr>
+                    </a:p>
+                  </a:txBody>
+                  <a:tcPr marL="101600" marR="101600" marT="25400" marB="25400" anchor="ctr">
+                    <a:lnL w="6350" cap="flat" cmpd="sng" algn="ctr">
+                      <a:solidFill>
+                        <a:srgbClr val="E6E8F0"/>
+                      </a:solidFill>
+                      <a:prstDash val="solid"/>
+                      <a:round/>
+                      <a:headEnd type="none" w="med" len="med"/>
+                      <a:tailEnd type="none" w="med" len="med"/>
+                    </a:lnL>
+                    <a:lnR w="6350" cap="flat" cmpd="sng" algn="ctr">
+                      <a:solidFill>
+                        <a:srgbClr val="E6E8F0"/>
+                      </a:solidFill>
+                      <a:prstDash val="solid"/>
+                      <a:round/>
+                      <a:headEnd type="none" w="med" len="med"/>
+                      <a:tailEnd type="none" w="med" len="med"/>
+                    </a:lnR>
+                    <a:lnT w="6350" cap="flat" cmpd="sng" algn="ctr">
+                      <a:solidFill>
+                        <a:srgbClr val="E6E8F0"/>
+                      </a:solidFill>
+                      <a:prstDash val="solid"/>
+                      <a:round/>
+                      <a:headEnd type="none" w="med" len="med"/>
+                      <a:tailEnd type="none" w="med" len="med"/>
+                    </a:lnT>
+                    <a:lnB w="6350" cap="flat" cmpd="sng" algn="ctr">
+                      <a:solidFill>
+                        <a:srgbClr val="E6E8F0"/>
+                      </a:solidFill>
+                      <a:prstDash val="solid"/>
+                      <a:round/>
+                      <a:headEnd type="none" w="med" len="med"/>
+                      <a:tailEnd type="none" w="med" len="med"/>
+                    </a:lnB>
+                    <a:solidFill>
+                      <a:srgbClr val="F5F7FE"/>
+                    </a:solidFill>
+                  </a:tcPr>
+                </a:tc>
               </a:tr>
-              <a:tr h="475488">
+              <a:tr h="512064">
                 <a:tc>
                   <a:txBody>
                     <a:bodyPr/>
@@ -21859,7 +22439,7 @@
                         <a:buNone/>
                       </a:pPr>
                       <a:r>
-                        <a:rPr lang="en-US" sz="1300" dirty="0">
+                        <a:rPr lang="en-US" sz="1250" dirty="0">
                           <a:solidFill>
                             <a:srgbClr val="12132A"/>
                           </a:solidFill>
@@ -21867,9 +22447,9 @@
                           <a:ea typeface="Calibri" pitchFamily="34" charset="-122"/>
                           <a:cs typeface="Calibri" pitchFamily="34" charset="-120"/>
                         </a:rPr>
-                        <a:t>AI Insight</a:t>
+                        <a:t>Interview questions</a:t>
                       </a:r>
-                      <a:endParaRPr lang="en-US" sz="1300" dirty="0">
+                      <a:endParaRPr lang="en-US" sz="1250" dirty="0">
                         <a:latin typeface="Calibri" charset="0"/>
                         <a:ea typeface="Calibri" charset="0"/>
                         <a:cs typeface="Calibri" charset="0"/>
@@ -21927,7 +22507,7 @@
                         <a:buNone/>
                       </a:pPr>
                       <a:r>
-                        <a:rPr lang="en-US" sz="1300" b="1" dirty="0">
+                        <a:rPr lang="en-US" sz="1250" b="1" dirty="0">
                           <a:solidFill>
                             <a:srgbClr val="0B2AE0"/>
                           </a:solidFill>
@@ -21935,9 +22515,9 @@
                           <a:ea typeface="Calibri" pitchFamily="34" charset="-122"/>
                           <a:cs typeface="Calibri" pitchFamily="34" charset="-120"/>
                         </a:rPr>
-                        <a:t>RM1.64</a:t>
+                        <a:t>RM0.40</a:t>
                       </a:r>
-                      <a:endParaRPr lang="en-US" sz="1300" dirty="0">
+                      <a:endParaRPr lang="en-US" sz="1250" dirty="0">
                         <a:latin typeface="Calibri" charset="0"/>
                         <a:ea typeface="Calibri" charset="0"/>
                         <a:cs typeface="Calibri" charset="0"/>
@@ -21986,8 +22566,76 @@
                     </a:solidFill>
                   </a:tcPr>
                 </a:tc>
+                <a:tc>
+                  <a:txBody>
+                    <a:bodyPr/>
+                    <a:lstStyle/>
+                    <a:p>
+                      <a:pPr algn="ctr" indent="0" marL="0">
+                        <a:buNone/>
+                      </a:pPr>
+                      <a:r>
+                        <a:rPr lang="en-US" sz="1250" dirty="0">
+                          <a:solidFill>
+                            <a:srgbClr val="12132A"/>
+                          </a:solidFill>
+                          <a:latin typeface="Calibri" pitchFamily="34" charset="0"/>
+                          <a:ea typeface="Calibri" pitchFamily="34" charset="-122"/>
+                          <a:cs typeface="Calibri" pitchFamily="34" charset="-120"/>
+                        </a:rPr>
+                        <a:t>50</a:t>
+                      </a:r>
+                      <a:endParaRPr lang="en-US" sz="1250" dirty="0">
+                        <a:latin typeface="Calibri" charset="0"/>
+                        <a:ea typeface="Calibri" charset="0"/>
+                        <a:cs typeface="Calibri" charset="0"/>
+                      </a:endParaRPr>
+                    </a:p>
+                  </a:txBody>
+                  <a:tcPr marL="101600" marR="101600" marT="25400" marB="25400" anchor="ctr">
+                    <a:lnL w="6350" cap="flat" cmpd="sng" algn="ctr">
+                      <a:solidFill>
+                        <a:srgbClr val="E6E8F0"/>
+                      </a:solidFill>
+                      <a:prstDash val="solid"/>
+                      <a:round/>
+                      <a:headEnd type="none" w="med" len="med"/>
+                      <a:tailEnd type="none" w="med" len="med"/>
+                    </a:lnL>
+                    <a:lnR w="6350" cap="flat" cmpd="sng" algn="ctr">
+                      <a:solidFill>
+                        <a:srgbClr val="E6E8F0"/>
+                      </a:solidFill>
+                      <a:prstDash val="solid"/>
+                      <a:round/>
+                      <a:headEnd type="none" w="med" len="med"/>
+                      <a:tailEnd type="none" w="med" len="med"/>
+                    </a:lnR>
+                    <a:lnT w="6350" cap="flat" cmpd="sng" algn="ctr">
+                      <a:solidFill>
+                        <a:srgbClr val="E6E8F0"/>
+                      </a:solidFill>
+                      <a:prstDash val="solid"/>
+                      <a:round/>
+                      <a:headEnd type="none" w="med" len="med"/>
+                      <a:tailEnd type="none" w="med" len="med"/>
+                    </a:lnT>
+                    <a:lnB w="6350" cap="flat" cmpd="sng" algn="ctr">
+                      <a:solidFill>
+                        <a:srgbClr val="E6E8F0"/>
+                      </a:solidFill>
+                      <a:prstDash val="solid"/>
+                      <a:round/>
+                      <a:headEnd type="none" w="med" len="med"/>
+                      <a:tailEnd type="none" w="med" len="med"/>
+                    </a:lnB>
+                    <a:solidFill>
+                      <a:srgbClr val="FFFFFF"/>
+                    </a:solidFill>
+                  </a:tcPr>
+                </a:tc>
               </a:tr>
-              <a:tr h="475488">
+              <a:tr h="512064">
                 <a:tc>
                   <a:txBody>
                     <a:bodyPr/>
@@ -21997,7 +22645,7 @@
                         <a:buNone/>
                       </a:pPr>
                       <a:r>
-                        <a:rPr lang="en-US" sz="1300" dirty="0">
+                        <a:rPr lang="en-US" sz="1250" dirty="0">
                           <a:solidFill>
                             <a:srgbClr val="12132A"/>
                           </a:solidFill>
@@ -22005,9 +22653,9 @@
                           <a:ea typeface="Calibri" pitchFamily="34" charset="-122"/>
                           <a:cs typeface="Calibri" pitchFamily="34" charset="-120"/>
                         </a:rPr>
-                        <a:t>Interview questions</a:t>
+                        <a:t>Job draft (Opus)</a:t>
                       </a:r>
-                      <a:endParaRPr lang="en-US" sz="1300" dirty="0">
+                      <a:endParaRPr lang="en-US" sz="1250" dirty="0">
                         <a:latin typeface="Calibri" charset="0"/>
                         <a:ea typeface="Calibri" charset="0"/>
                         <a:cs typeface="Calibri" charset="0"/>
@@ -22065,7 +22713,7 @@
                         <a:buNone/>
                       </a:pPr>
                       <a:r>
-                        <a:rPr lang="en-US" sz="1300" b="1" dirty="0">
+                        <a:rPr lang="en-US" sz="1250" b="1" dirty="0">
                           <a:solidFill>
                             <a:srgbClr val="0B2AE0"/>
                           </a:solidFill>
@@ -22073,9 +22721,9 @@
                           <a:ea typeface="Calibri" pitchFamily="34" charset="-122"/>
                           <a:cs typeface="Calibri" pitchFamily="34" charset="-120"/>
                         </a:rPr>
-                        <a:t>RM1.64</a:t>
+                        <a:t>RM2.25</a:t>
                       </a:r>
-                      <a:endParaRPr lang="en-US" sz="1300" dirty="0">
+                      <a:endParaRPr lang="en-US" sz="1250" dirty="0">
                         <a:latin typeface="Calibri" charset="0"/>
                         <a:ea typeface="Calibri" charset="0"/>
                         <a:cs typeface="Calibri" charset="0"/>
@@ -22124,18 +22772,16 @@
                     </a:solidFill>
                   </a:tcPr>
                 </a:tc>
-              </a:tr>
-              <a:tr h="475488">
                 <a:tc>
                   <a:txBody>
                     <a:bodyPr/>
                     <a:lstStyle/>
                     <a:p>
-                      <a:pPr algn="l" indent="0" marL="0">
+                      <a:pPr algn="ctr" indent="0" marL="0">
                         <a:buNone/>
                       </a:pPr>
                       <a:r>
-                        <a:rPr lang="en-US" sz="1300" dirty="0">
+                        <a:rPr lang="en-US" sz="1250" dirty="0">
                           <a:solidFill>
                             <a:srgbClr val="12132A"/>
                           </a:solidFill>
@@ -22143,9 +22789,9 @@
                           <a:ea typeface="Calibri" pitchFamily="34" charset="-122"/>
                           <a:cs typeface="Calibri" pitchFamily="34" charset="-120"/>
                         </a:rPr>
-                        <a:t>Job draft (Opus)</a:t>
+                        <a:t>10</a:t>
                       </a:r>
-                      <a:endParaRPr lang="en-US" sz="1300" dirty="0">
+                      <a:endParaRPr lang="en-US" sz="1250" dirty="0">
                         <a:latin typeface="Calibri" charset="0"/>
                         <a:ea typeface="Calibri" charset="0"/>
                         <a:cs typeface="Calibri" charset="0"/>
@@ -22190,75 +22836,7 @@
                       <a:tailEnd type="none" w="med" len="med"/>
                     </a:lnB>
                     <a:solidFill>
-                      <a:srgbClr val="FFFFFF"/>
-                    </a:solidFill>
-                  </a:tcPr>
-                </a:tc>
-                <a:tc>
-                  <a:txBody>
-                    <a:bodyPr/>
-                    <a:lstStyle/>
-                    <a:p>
-                      <a:pPr algn="r" indent="0" marL="0">
-                        <a:buNone/>
-                      </a:pPr>
-                      <a:r>
-                        <a:rPr lang="en-US" sz="1300" b="1" dirty="0">
-                          <a:solidFill>
-                            <a:srgbClr val="0B2AE0"/>
-                          </a:solidFill>
-                          <a:latin typeface="Calibri" pitchFamily="34" charset="0"/>
-                          <a:ea typeface="Calibri" pitchFamily="34" charset="-122"/>
-                          <a:cs typeface="Calibri" pitchFamily="34" charset="-120"/>
-                        </a:rPr>
-                        <a:t>RM2.05</a:t>
-                      </a:r>
-                      <a:endParaRPr lang="en-US" sz="1300" dirty="0">
-                        <a:latin typeface="Calibri" charset="0"/>
-                        <a:ea typeface="Calibri" charset="0"/>
-                        <a:cs typeface="Calibri" charset="0"/>
-                      </a:endParaRPr>
-                    </a:p>
-                  </a:txBody>
-                  <a:tcPr marL="101600" marR="101600" marT="25400" marB="25400" anchor="ctr">
-                    <a:lnL w="6350" cap="flat" cmpd="sng" algn="ctr">
-                      <a:solidFill>
-                        <a:srgbClr val="E6E8F0"/>
-                      </a:solidFill>
-                      <a:prstDash val="solid"/>
-                      <a:round/>
-                      <a:headEnd type="none" w="med" len="med"/>
-                      <a:tailEnd type="none" w="med" len="med"/>
-                    </a:lnL>
-                    <a:lnR w="6350" cap="flat" cmpd="sng" algn="ctr">
-                      <a:solidFill>
-                        <a:srgbClr val="E6E8F0"/>
-                      </a:solidFill>
-                      <a:prstDash val="solid"/>
-                      <a:round/>
-                      <a:headEnd type="none" w="med" len="med"/>
-                      <a:tailEnd type="none" w="med" len="med"/>
-                    </a:lnR>
-                    <a:lnT w="6350" cap="flat" cmpd="sng" algn="ctr">
-                      <a:solidFill>
-                        <a:srgbClr val="E6E8F0"/>
-                      </a:solidFill>
-                      <a:prstDash val="solid"/>
-                      <a:round/>
-                      <a:headEnd type="none" w="med" len="med"/>
-                      <a:tailEnd type="none" w="med" len="med"/>
-                    </a:lnT>
-                    <a:lnB w="6350" cap="flat" cmpd="sng" algn="ctr">
-                      <a:solidFill>
-                        <a:srgbClr val="E6E8F0"/>
-                      </a:solidFill>
-                      <a:prstDash val="solid"/>
-                      <a:round/>
-                      <a:headEnd type="none" w="med" len="med"/>
-                      <a:tailEnd type="none" w="med" len="med"/>
-                    </a:lnB>
-                    <a:solidFill>
-                      <a:srgbClr val="FFFFFF"/>
+                      <a:srgbClr val="F5F7FE"/>
                     </a:solidFill>
                   </a:tcPr>
                 </a:tc>
@@ -22366,7 +22944,7 @@
                 <a:ea typeface="Calibri" pitchFamily="34" charset="-122"/>
                 <a:cs typeface="Calibri" pitchFamily="34" charset="-120"/>
               </a:rPr>
-              <a:t>price  =  base USD  ×  FX rate  ×  (1 − plan discount)</a:t>
+              <a:t>charged  =  list price  ×  (1 − plan discount)</a:t>
             </a:r>
             <a:endParaRPr lang="en-US" sz="1400" dirty="0"/>
           </a:p>
@@ -23019,7 +23597,7 @@
                 <a:ea typeface="Calibri" pitchFamily="34" charset="-122"/>
                 <a:cs typeface="Calibri" pitchFamily="34" charset="-120"/>
               </a:rPr>
-              <a:t>Top-ups are sold in a minimum of 20 credits, billed as one Stripe charge. That processing fee is folded into the credit margins on slide 11.</a:t>
+              <a:t>Minimum top-up per credit is shown above. Each top-up is one Stripe charge; that fee is folded into the credit margins on slide 11.</a:t>
             </a:r>
             <a:endParaRPr lang="en-US" sz="1000" dirty="0"/>
           </a:p>
@@ -23846,7 +24424,7 @@
                           <a:ea typeface="Calibri" pitchFamily="34" charset="-122"/>
                           <a:cs typeface="Calibri" pitchFamily="34" charset="-120"/>
                         </a:rPr>
-                        <a:t>RM4.09</a:t>
+                        <a:t>RM2.85</a:t>
                       </a:r>
                       <a:endParaRPr lang="en-US" sz="1250" dirty="0">
                         <a:latin typeface="Calibri" charset="0"/>
@@ -24050,7 +24628,7 @@
                           <a:ea typeface="Calibri" pitchFamily="34" charset="-122"/>
                           <a:cs typeface="Calibri" pitchFamily="34" charset="-120"/>
                         </a:rPr>
-                        <a:t>86%</a:t>
+                        <a:t>80%</a:t>
                       </a:r>
                       <a:endParaRPr lang="en-US" sz="1250" dirty="0">
                         <a:latin typeface="Calibri" charset="0"/>
@@ -24256,7 +24834,7 @@
                           <a:ea typeface="Calibri" pitchFamily="34" charset="-122"/>
                           <a:cs typeface="Calibri" pitchFamily="34" charset="-120"/>
                         </a:rPr>
-                        <a:t>RM1.64</a:t>
+                        <a:t>RM2.45</a:t>
                       </a:r>
                       <a:endParaRPr lang="en-US" sz="1250" dirty="0">
                         <a:latin typeface="Calibri" charset="0"/>
@@ -24460,7 +25038,7 @@
                           <a:ea typeface="Calibri" pitchFamily="34" charset="-122"/>
                           <a:cs typeface="Calibri" pitchFamily="34" charset="-120"/>
                         </a:rPr>
-                        <a:t>70%</a:t>
+                        <a:t>80%</a:t>
                       </a:r>
                       <a:endParaRPr lang="en-US" sz="1250" dirty="0">
                         <a:latin typeface="Calibri" charset="0"/>
@@ -24530,7 +25108,7 @@
                           <a:ea typeface="Calibri" pitchFamily="34" charset="-122"/>
                           <a:cs typeface="Calibri" pitchFamily="34" charset="-120"/>
                         </a:rPr>
-                        <a:t>AI Insight</a:t>
+                        <a:t>Interview questions</a:t>
                       </a:r>
                       <a:endParaRPr lang="en-US" sz="1250" dirty="0">
                         <a:latin typeface="Calibri" charset="0"/>
@@ -24666,7 +25244,7 @@
                           <a:ea typeface="Calibri" pitchFamily="34" charset="-122"/>
                           <a:cs typeface="Calibri" pitchFamily="34" charset="-120"/>
                         </a:rPr>
-                        <a:t>RM1.64</a:t>
+                        <a:t>RM0.40</a:t>
                       </a:r>
                       <a:endParaRPr lang="en-US" sz="1250" dirty="0">
                         <a:latin typeface="Calibri" charset="0"/>
@@ -24802,7 +25380,7 @@
                           <a:ea typeface="Calibri" pitchFamily="34" charset="-122"/>
                           <a:cs typeface="Calibri" pitchFamily="34" charset="-120"/>
                         </a:rPr>
-                        <a:t>~RM0.05</a:t>
+                        <a:t>~RM0.04</a:t>
                       </a:r>
                       <a:endParaRPr lang="en-US" sz="1250" dirty="0">
                         <a:latin typeface="Calibri" charset="0"/>
@@ -24870,7 +25448,7 @@
                           <a:ea typeface="Calibri" pitchFamily="34" charset="-122"/>
                           <a:cs typeface="Calibri" pitchFamily="34" charset="-120"/>
                         </a:rPr>
-                        <a:t>97%</a:t>
+                        <a:t>90%</a:t>
                       </a:r>
                       <a:endParaRPr lang="en-US" sz="1250" dirty="0">
                         <a:latin typeface="Calibri" charset="0"/>
@@ -24918,416 +25496,6 @@
                     </a:lnB>
                     <a:solidFill>
                       <a:srgbClr val="FFFFFF"/>
-                    </a:solidFill>
-                  </a:tcPr>
-                </a:tc>
-              </a:tr>
-              <a:tr h="457200">
-                <a:tc>
-                  <a:txBody>
-                    <a:bodyPr/>
-                    <a:lstStyle/>
-                    <a:p>
-                      <a:pPr algn="l" indent="0" marL="0">
-                        <a:buNone/>
-                      </a:pPr>
-                      <a:r>
-                        <a:rPr lang="en-US" sz="1250" b="1" dirty="0">
-                          <a:solidFill>
-                            <a:srgbClr val="12132A"/>
-                          </a:solidFill>
-                          <a:latin typeface="Calibri" pitchFamily="34" charset="0"/>
-                          <a:ea typeface="Calibri" pitchFamily="34" charset="-122"/>
-                          <a:cs typeface="Calibri" pitchFamily="34" charset="-120"/>
-                        </a:rPr>
-                        <a:t>Interview questions</a:t>
-                      </a:r>
-                      <a:endParaRPr lang="en-US" sz="1250" dirty="0">
-                        <a:latin typeface="Calibri" charset="0"/>
-                        <a:ea typeface="Calibri" charset="0"/>
-                        <a:cs typeface="Calibri" charset="0"/>
-                      </a:endParaRPr>
-                    </a:p>
-                  </a:txBody>
-                  <a:tcPr marL="76200" marR="76200" marT="25400" marB="25400" anchor="ctr">
-                    <a:lnL w="6350" cap="flat" cmpd="sng" algn="ctr">
-                      <a:solidFill>
-                        <a:srgbClr val="E6E8F0"/>
-                      </a:solidFill>
-                      <a:prstDash val="solid"/>
-                      <a:round/>
-                      <a:headEnd type="none" w="med" len="med"/>
-                      <a:tailEnd type="none" w="med" len="med"/>
-                    </a:lnL>
-                    <a:lnR w="6350" cap="flat" cmpd="sng" algn="ctr">
-                      <a:solidFill>
-                        <a:srgbClr val="E6E8F0"/>
-                      </a:solidFill>
-                      <a:prstDash val="solid"/>
-                      <a:round/>
-                      <a:headEnd type="none" w="med" len="med"/>
-                      <a:tailEnd type="none" w="med" len="med"/>
-                    </a:lnR>
-                    <a:lnT w="6350" cap="flat" cmpd="sng" algn="ctr">
-                      <a:solidFill>
-                        <a:srgbClr val="E6E8F0"/>
-                      </a:solidFill>
-                      <a:prstDash val="solid"/>
-                      <a:round/>
-                      <a:headEnd type="none" w="med" len="med"/>
-                      <a:tailEnd type="none" w="med" len="med"/>
-                    </a:lnT>
-                    <a:lnB w="6350" cap="flat" cmpd="sng" algn="ctr">
-                      <a:solidFill>
-                        <a:srgbClr val="E6E8F0"/>
-                      </a:solidFill>
-                      <a:prstDash val="solid"/>
-                      <a:round/>
-                      <a:headEnd type="none" w="med" len="med"/>
-                      <a:tailEnd type="none" w="med" len="med"/>
-                    </a:lnB>
-                    <a:solidFill>
-                      <a:srgbClr val="F5F7FE"/>
-                    </a:solidFill>
-                  </a:tcPr>
-                </a:tc>
-                <a:tc>
-                  <a:txBody>
-                    <a:bodyPr/>
-                    <a:lstStyle/>
-                    <a:p>
-                      <a:pPr algn="ctr" indent="0" marL="0">
-                        <a:buNone/>
-                      </a:pPr>
-                      <a:r>
-                        <a:rPr lang="en-US" sz="1250" dirty="0">
-                          <a:solidFill>
-                            <a:srgbClr val="4A5568"/>
-                          </a:solidFill>
-                          <a:latin typeface="Calibri" pitchFamily="34" charset="0"/>
-                          <a:ea typeface="Calibri" pitchFamily="34" charset="-122"/>
-                          <a:cs typeface="Calibri" pitchFamily="34" charset="-120"/>
-                        </a:rPr>
-                        <a:t>Haiku 4.5</a:t>
-                      </a:r>
-                      <a:endParaRPr lang="en-US" sz="1250" dirty="0">
-                        <a:latin typeface="Calibri" charset="0"/>
-                        <a:ea typeface="Calibri" charset="0"/>
-                        <a:cs typeface="Calibri" charset="0"/>
-                      </a:endParaRPr>
-                    </a:p>
-                  </a:txBody>
-                  <a:tcPr marL="76200" marR="76200" marT="25400" marB="25400" anchor="ctr">
-                    <a:lnL w="6350" cap="flat" cmpd="sng" algn="ctr">
-                      <a:solidFill>
-                        <a:srgbClr val="E6E8F0"/>
-                      </a:solidFill>
-                      <a:prstDash val="solid"/>
-                      <a:round/>
-                      <a:headEnd type="none" w="med" len="med"/>
-                      <a:tailEnd type="none" w="med" len="med"/>
-                    </a:lnL>
-                    <a:lnR w="6350" cap="flat" cmpd="sng" algn="ctr">
-                      <a:solidFill>
-                        <a:srgbClr val="E6E8F0"/>
-                      </a:solidFill>
-                      <a:prstDash val="solid"/>
-                      <a:round/>
-                      <a:headEnd type="none" w="med" len="med"/>
-                      <a:tailEnd type="none" w="med" len="med"/>
-                    </a:lnR>
-                    <a:lnT w="6350" cap="flat" cmpd="sng" algn="ctr">
-                      <a:solidFill>
-                        <a:srgbClr val="E6E8F0"/>
-                      </a:solidFill>
-                      <a:prstDash val="solid"/>
-                      <a:round/>
-                      <a:headEnd type="none" w="med" len="med"/>
-                      <a:tailEnd type="none" w="med" len="med"/>
-                    </a:lnT>
-                    <a:lnB w="6350" cap="flat" cmpd="sng" algn="ctr">
-                      <a:solidFill>
-                        <a:srgbClr val="E6E8F0"/>
-                      </a:solidFill>
-                      <a:prstDash val="solid"/>
-                      <a:round/>
-                      <a:headEnd type="none" w="med" len="med"/>
-                      <a:tailEnd type="none" w="med" len="med"/>
-                    </a:lnB>
-                    <a:solidFill>
-                      <a:srgbClr val="F5F7FE"/>
-                    </a:solidFill>
-                  </a:tcPr>
-                </a:tc>
-                <a:tc>
-                  <a:txBody>
-                    <a:bodyPr/>
-                    <a:lstStyle/>
-                    <a:p>
-                      <a:pPr algn="r" indent="0" marL="0">
-                        <a:buNone/>
-                      </a:pPr>
-                      <a:r>
-                        <a:rPr lang="en-US" sz="1250" dirty="0">
-                          <a:solidFill>
-                            <a:srgbClr val="4A5568"/>
-                          </a:solidFill>
-                          <a:latin typeface="Calibri" pitchFamily="34" charset="0"/>
-                          <a:ea typeface="Calibri" pitchFamily="34" charset="-122"/>
-                          <a:cs typeface="Calibri" pitchFamily="34" charset="-120"/>
-                        </a:rPr>
-                        <a:t>RM1.64</a:t>
-                      </a:r>
-                      <a:endParaRPr lang="en-US" sz="1250" dirty="0">
-                        <a:latin typeface="Calibri" charset="0"/>
-                        <a:ea typeface="Calibri" charset="0"/>
-                        <a:cs typeface="Calibri" charset="0"/>
-                      </a:endParaRPr>
-                    </a:p>
-                  </a:txBody>
-                  <a:tcPr marL="76200" marR="76200" marT="25400" marB="25400" anchor="ctr">
-                    <a:lnL w="6350" cap="flat" cmpd="sng" algn="ctr">
-                      <a:solidFill>
-                        <a:srgbClr val="E6E8F0"/>
-                      </a:solidFill>
-                      <a:prstDash val="solid"/>
-                      <a:round/>
-                      <a:headEnd type="none" w="med" len="med"/>
-                      <a:tailEnd type="none" w="med" len="med"/>
-                    </a:lnL>
-                    <a:lnR w="6350" cap="flat" cmpd="sng" algn="ctr">
-                      <a:solidFill>
-                        <a:srgbClr val="E6E8F0"/>
-                      </a:solidFill>
-                      <a:prstDash val="solid"/>
-                      <a:round/>
-                      <a:headEnd type="none" w="med" len="med"/>
-                      <a:tailEnd type="none" w="med" len="med"/>
-                    </a:lnR>
-                    <a:lnT w="6350" cap="flat" cmpd="sng" algn="ctr">
-                      <a:solidFill>
-                        <a:srgbClr val="E6E8F0"/>
-                      </a:solidFill>
-                      <a:prstDash val="solid"/>
-                      <a:round/>
-                      <a:headEnd type="none" w="med" len="med"/>
-                      <a:tailEnd type="none" w="med" len="med"/>
-                    </a:lnT>
-                    <a:lnB w="6350" cap="flat" cmpd="sng" algn="ctr">
-                      <a:solidFill>
-                        <a:srgbClr val="E6E8F0"/>
-                      </a:solidFill>
-                      <a:prstDash val="solid"/>
-                      <a:round/>
-                      <a:headEnd type="none" w="med" len="med"/>
-                      <a:tailEnd type="none" w="med" len="med"/>
-                    </a:lnB>
-                    <a:solidFill>
-                      <a:srgbClr val="F5F7FE"/>
-                    </a:solidFill>
-                  </a:tcPr>
-                </a:tc>
-                <a:tc>
-                  <a:txBody>
-                    <a:bodyPr/>
-                    <a:lstStyle/>
-                    <a:p>
-                      <a:pPr algn="r" indent="0" marL="0">
-                        <a:buNone/>
-                      </a:pPr>
-                      <a:r>
-                        <a:rPr lang="en-US" sz="1250" dirty="0">
-                          <a:solidFill>
-                            <a:srgbClr val="4A5568"/>
-                          </a:solidFill>
-                          <a:latin typeface="Calibri" pitchFamily="34" charset="0"/>
-                          <a:ea typeface="Calibri" pitchFamily="34" charset="-122"/>
-                          <a:cs typeface="Calibri" pitchFamily="34" charset="-120"/>
-                        </a:rPr>
-                        <a:t>~RM0.04</a:t>
-                      </a:r>
-                      <a:endParaRPr lang="en-US" sz="1250" dirty="0">
-                        <a:latin typeface="Calibri" charset="0"/>
-                        <a:ea typeface="Calibri" charset="0"/>
-                        <a:cs typeface="Calibri" charset="0"/>
-                      </a:endParaRPr>
-                    </a:p>
-                  </a:txBody>
-                  <a:tcPr marL="76200" marR="76200" marT="25400" marB="25400" anchor="ctr">
-                    <a:lnL w="6350" cap="flat" cmpd="sng" algn="ctr">
-                      <a:solidFill>
-                        <a:srgbClr val="E6E8F0"/>
-                      </a:solidFill>
-                      <a:prstDash val="solid"/>
-                      <a:round/>
-                      <a:headEnd type="none" w="med" len="med"/>
-                      <a:tailEnd type="none" w="med" len="med"/>
-                    </a:lnL>
-                    <a:lnR w="6350" cap="flat" cmpd="sng" algn="ctr">
-                      <a:solidFill>
-                        <a:srgbClr val="E6E8F0"/>
-                      </a:solidFill>
-                      <a:prstDash val="solid"/>
-                      <a:round/>
-                      <a:headEnd type="none" w="med" len="med"/>
-                      <a:tailEnd type="none" w="med" len="med"/>
-                    </a:lnR>
-                    <a:lnT w="6350" cap="flat" cmpd="sng" algn="ctr">
-                      <a:solidFill>
-                        <a:srgbClr val="E6E8F0"/>
-                      </a:solidFill>
-                      <a:prstDash val="solid"/>
-                      <a:round/>
-                      <a:headEnd type="none" w="med" len="med"/>
-                      <a:tailEnd type="none" w="med" len="med"/>
-                    </a:lnT>
-                    <a:lnB w="6350" cap="flat" cmpd="sng" algn="ctr">
-                      <a:solidFill>
-                        <a:srgbClr val="E6E8F0"/>
-                      </a:solidFill>
-                      <a:prstDash val="solid"/>
-                      <a:round/>
-                      <a:headEnd type="none" w="med" len="med"/>
-                      <a:tailEnd type="none" w="med" len="med"/>
-                    </a:lnB>
-                    <a:solidFill>
-                      <a:srgbClr val="F5F7FE"/>
-                    </a:solidFill>
-                  </a:tcPr>
-                </a:tc>
-                <a:tc>
-                  <a:txBody>
-                    <a:bodyPr/>
-                    <a:lstStyle/>
-                    <a:p>
-                      <a:pPr algn="r" indent="0" marL="0">
-                        <a:buNone/>
-                      </a:pPr>
-                      <a:r>
-                        <a:rPr lang="en-US" sz="1250" dirty="0">
-                          <a:solidFill>
-                            <a:srgbClr val="4A5568"/>
-                          </a:solidFill>
-                          <a:latin typeface="Calibri" pitchFamily="34" charset="0"/>
-                          <a:ea typeface="Calibri" pitchFamily="34" charset="-122"/>
-                          <a:cs typeface="Calibri" pitchFamily="34" charset="-120"/>
-                        </a:rPr>
-                        <a:t>~RM0.04</a:t>
-                      </a:r>
-                      <a:endParaRPr lang="en-US" sz="1250" dirty="0">
-                        <a:latin typeface="Calibri" charset="0"/>
-                        <a:ea typeface="Calibri" charset="0"/>
-                        <a:cs typeface="Calibri" charset="0"/>
-                      </a:endParaRPr>
-                    </a:p>
-                  </a:txBody>
-                  <a:tcPr marL="76200" marR="76200" marT="25400" marB="25400" anchor="ctr">
-                    <a:lnL w="6350" cap="flat" cmpd="sng" algn="ctr">
-                      <a:solidFill>
-                        <a:srgbClr val="E6E8F0"/>
-                      </a:solidFill>
-                      <a:prstDash val="solid"/>
-                      <a:round/>
-                      <a:headEnd type="none" w="med" len="med"/>
-                      <a:tailEnd type="none" w="med" len="med"/>
-                    </a:lnL>
-                    <a:lnR w="6350" cap="flat" cmpd="sng" algn="ctr">
-                      <a:solidFill>
-                        <a:srgbClr val="E6E8F0"/>
-                      </a:solidFill>
-                      <a:prstDash val="solid"/>
-                      <a:round/>
-                      <a:headEnd type="none" w="med" len="med"/>
-                      <a:tailEnd type="none" w="med" len="med"/>
-                    </a:lnR>
-                    <a:lnT w="6350" cap="flat" cmpd="sng" algn="ctr">
-                      <a:solidFill>
-                        <a:srgbClr val="E6E8F0"/>
-                      </a:solidFill>
-                      <a:prstDash val="solid"/>
-                      <a:round/>
-                      <a:headEnd type="none" w="med" len="med"/>
-                      <a:tailEnd type="none" w="med" len="med"/>
-                    </a:lnT>
-                    <a:lnB w="6350" cap="flat" cmpd="sng" algn="ctr">
-                      <a:solidFill>
-                        <a:srgbClr val="E6E8F0"/>
-                      </a:solidFill>
-                      <a:prstDash val="solid"/>
-                      <a:round/>
-                      <a:headEnd type="none" w="med" len="med"/>
-                      <a:tailEnd type="none" w="med" len="med"/>
-                    </a:lnB>
-                    <a:solidFill>
-                      <a:srgbClr val="F5F7FE"/>
-                    </a:solidFill>
-                  </a:tcPr>
-                </a:tc>
-                <a:tc>
-                  <a:txBody>
-                    <a:bodyPr/>
-                    <a:lstStyle/>
-                    <a:p>
-                      <a:pPr algn="r" indent="0" marL="0">
-                        <a:buNone/>
-                      </a:pPr>
-                      <a:r>
-                        <a:rPr lang="en-US" sz="1250" b="1" dirty="0">
-                          <a:solidFill>
-                            <a:srgbClr val="16A34A"/>
-                          </a:solidFill>
-                          <a:latin typeface="Calibri" pitchFamily="34" charset="0"/>
-                          <a:ea typeface="Calibri" pitchFamily="34" charset="-122"/>
-                          <a:cs typeface="Calibri" pitchFamily="34" charset="-120"/>
-                        </a:rPr>
-                        <a:t>97%</a:t>
-                      </a:r>
-                      <a:endParaRPr lang="en-US" sz="1250" dirty="0">
-                        <a:latin typeface="Calibri" charset="0"/>
-                        <a:ea typeface="Calibri" charset="0"/>
-                        <a:cs typeface="Calibri" charset="0"/>
-                      </a:endParaRPr>
-                    </a:p>
-                  </a:txBody>
-                  <a:tcPr marL="76200" marR="76200" marT="25400" marB="25400" anchor="ctr">
-                    <a:lnL w="6350" cap="flat" cmpd="sng" algn="ctr">
-                      <a:solidFill>
-                        <a:srgbClr val="E6E8F0"/>
-                      </a:solidFill>
-                      <a:prstDash val="solid"/>
-                      <a:round/>
-                      <a:headEnd type="none" w="med" len="med"/>
-                      <a:tailEnd type="none" w="med" len="med"/>
-                    </a:lnL>
-                    <a:lnR w="6350" cap="flat" cmpd="sng" algn="ctr">
-                      <a:solidFill>
-                        <a:srgbClr val="E6E8F0"/>
-                      </a:solidFill>
-                      <a:prstDash val="solid"/>
-                      <a:round/>
-                      <a:headEnd type="none" w="med" len="med"/>
-                      <a:tailEnd type="none" w="med" len="med"/>
-                    </a:lnR>
-                    <a:lnT w="6350" cap="flat" cmpd="sng" algn="ctr">
-                      <a:solidFill>
-                        <a:srgbClr val="E6E8F0"/>
-                      </a:solidFill>
-                      <a:prstDash val="solid"/>
-                      <a:round/>
-                      <a:headEnd type="none" w="med" len="med"/>
-                      <a:tailEnd type="none" w="med" len="med"/>
-                    </a:lnT>
-                    <a:lnB w="6350" cap="flat" cmpd="sng" algn="ctr">
-                      <a:solidFill>
-                        <a:srgbClr val="E6E8F0"/>
-                      </a:solidFill>
-                      <a:prstDash val="solid"/>
-                      <a:round/>
-                      <a:headEnd type="none" w="med" len="med"/>
-                      <a:tailEnd type="none" w="med" len="med"/>
-                    </a:lnB>
-                    <a:solidFill>
-                      <a:srgbClr val="F5F7FE"/>
                     </a:solidFill>
                   </a:tcPr>
                 </a:tc>
@@ -25397,7 +25565,7 @@
                       <a:tailEnd type="none" w="med" len="med"/>
                     </a:lnB>
                     <a:solidFill>
-                      <a:srgbClr val="FFFFFF"/>
+                      <a:srgbClr val="F5F7FE"/>
                     </a:solidFill>
                   </a:tcPr>
                 </a:tc>
@@ -25465,7 +25633,7 @@
                       <a:tailEnd type="none" w="med" len="med"/>
                     </a:lnB>
                     <a:solidFill>
-                      <a:srgbClr val="FFFFFF"/>
+                      <a:srgbClr val="F5F7FE"/>
                     </a:solidFill>
                   </a:tcPr>
                 </a:tc>
@@ -25486,7 +25654,7 @@
                           <a:ea typeface="Calibri" pitchFamily="34" charset="-122"/>
                           <a:cs typeface="Calibri" pitchFamily="34" charset="-120"/>
                         </a:rPr>
-                        <a:t>RM2.05</a:t>
+                        <a:t>RM2.25</a:t>
                       </a:r>
                       <a:endParaRPr lang="en-US" sz="1250" dirty="0">
                         <a:latin typeface="Calibri" charset="0"/>
@@ -25533,7 +25701,7 @@
                       <a:tailEnd type="none" w="med" len="med"/>
                     </a:lnB>
                     <a:solidFill>
-                      <a:srgbClr val="FFFFFF"/>
+                      <a:srgbClr val="F5F7FE"/>
                     </a:solidFill>
                   </a:tcPr>
                 </a:tc>
@@ -25601,7 +25769,7 @@
                       <a:tailEnd type="none" w="med" len="med"/>
                     </a:lnB>
                     <a:solidFill>
-                      <a:srgbClr val="FFFFFF"/>
+                      <a:srgbClr val="F5F7FE"/>
                     </a:solidFill>
                   </a:tcPr>
                 </a:tc>
@@ -25669,7 +25837,7 @@
                       <a:tailEnd type="none" w="med" len="med"/>
                     </a:lnB>
                     <a:solidFill>
-                      <a:srgbClr val="FFFFFF"/>
+                      <a:srgbClr val="F5F7FE"/>
                     </a:solidFill>
                   </a:tcPr>
                 </a:tc>
@@ -25690,7 +25858,7 @@
                           <a:ea typeface="Calibri" pitchFamily="34" charset="-122"/>
                           <a:cs typeface="Calibri" pitchFamily="34" charset="-120"/>
                         </a:rPr>
-                        <a:t>78%</a:t>
+                        <a:t>80%</a:t>
                       </a:r>
                       <a:endParaRPr lang="en-US" sz="1250" dirty="0">
                         <a:latin typeface="Calibri" charset="0"/>
@@ -25737,7 +25905,7 @@
                       <a:tailEnd type="none" w="med" len="med"/>
                     </a:lnB>
                     <a:solidFill>
-                      <a:srgbClr val="FFFFFF"/>
+                      <a:srgbClr val="F5F7FE"/>
                     </a:solidFill>
                   </a:tcPr>
                 </a:tc>
@@ -26016,7 +26184,7 @@
                 <a:ea typeface="Calibri" pitchFamily="34" charset="-122"/>
                 <a:cs typeface="Calibri" pitchFamily="34" charset="-120"/>
               </a:rPr>
-              <a:t>RM4.09</a:t>
+              <a:t>RM2.85</a:t>
             </a:r>
             <a:pPr algn="l" indent="0" marL="0">
               <a:lnSpc>
@@ -26050,7 +26218,7 @@
                 <a:ea typeface="Calibri" pitchFamily="34" charset="-122"/>
                 <a:cs typeface="Calibri" pitchFamily="34" charset="-120"/>
               </a:rPr>
-              <a:t>86% even in the worst case.</a:t>
+              <a:t>80% even in the worst case.</a:t>
             </a:r>
             <a:endParaRPr lang="en-US" sz="1250" dirty="0"/>
           </a:p>

--- a/docs/aster-pricing.pptx
+++ b/docs/aster-pricing.pptx
@@ -6069,7 +6069,7 @@
                 <a:ea typeface="Calibri" pitchFamily="34" charset="-122"/>
                 <a:cs typeface="Calibri" pitchFamily="34" charset="-120"/>
               </a:rPr>
-              <a:t>Partner share = 10% of every sale. Assumes typical AI usage at the plan allowance and ~5 / 25 / 70 video interviews/mo; monthly card billing (annual lowers the Stripe fee). Platform share amortises toward zero with scale. Realistic usage runs lower, so margins run higher.</a:t>
+              <a:t>Partner share = 10% of each subscription sale (not credit top-ups). Assumes typical AI usage at the plan allowance and ~5 / 25 / 70 video interviews/mo; monthly card billing (annual lowers the Stripe fee). Platform share amortises toward zero with scale. Realistic usage runs lower, so margins run higher.</a:t>
             </a:r>
             <a:endParaRPr lang="en-US" sz="950" dirty="0"/>
           </a:p>
@@ -6271,7 +6271,7 @@
         </p:nvSpPr>
         <p:spPr>
           <a:xfrm>
-            <a:off x="548640" y="1554480"/>
+            <a:off x="548640" y="1508760"/>
             <a:ext cx="11064240" cy="640080"/>
           </a:xfrm>
           <a:prstGeom prst="rect">
@@ -6296,34 +6296,1710 @@
                 <a:ea typeface="Calibri" pitchFamily="34" charset="-122"/>
                 <a:cs typeface="Calibri" pitchFamily="34" charset="-120"/>
               </a:rPr>
-              <a:t>Once an account exhausts its allowance, every extra action sells at the list rate. Cost here includes AI inference, the one-time Stripe fee (on each credit's minimum top-up) and the 10% partner share. Growth accounts that buy top-ups lift blended margin.</a:t>
+              <a:t>Once an account exhausts its allowance, every extra action sells at the list rate against a few sen of AI plus one Stripe fee per top-up. The 10% partner share applies to plan sales only, not top-ups, so credits are the highest-margin revenue.</a:t>
             </a:r>
             <a:endParaRPr lang="en-US" sz="1400" dirty="0"/>
           </a:p>
         </p:txBody>
       </p:sp>
-      <p:sp>
-        <p:nvSpPr>
-          <p:cNvPr id="5" name="Shape 3"/>
+      <p:graphicFrame>
+        <p:nvGraphicFramePr>
+          <p:cNvPr id="12" name="Table 0"/>
+          <p:cNvGraphicFramePr>
+            <a:graphicFrameLocks noGrp="1"/>
+          </p:cNvGraphicFramePr>
+          <p:nvPr>
+            <p:extLst>
+              <p:ext uri="{D42A27DB-BD31-4B8C-83A1-F6EECF244321}">
+                <p14:modId xmlns:p14="http://schemas.microsoft.com/office/powerpoint/2010/main" val="1579011935"/>
+              </p:ext>
+            </p:extLst>
+          </p:nvPr>
+        </p:nvGraphicFramePr>
+        <p:xfrm>
+          <a:off x="548640" y="2286000"/>
+          <a:ext cx="7680960" cy="914400"/>
+        </p:xfrm>
+        <a:graphic>
+          <a:graphicData uri="http://schemas.openxmlformats.org/drawingml/2006/table">
+            <a:tbl>
+              <a:tblPr/>
+              <a:tblGrid>
+                <a:gridCol w="2743200"/>
+                <a:gridCol w="1371600"/>
+                <a:gridCol w="2194560"/>
+                <a:gridCol w="1371600"/>
+              </a:tblGrid>
+              <a:tr h="548640">
+                <a:tc>
+                  <a:txBody>
+                    <a:bodyPr/>
+                    <a:lstStyle/>
+                    <a:p>
+                      <a:pPr algn="l" indent="0" marL="0">
+                        <a:buNone/>
+                      </a:pPr>
+                      <a:r>
+                        <a:rPr lang="en-US" sz="1250" b="1" dirty="0">
+                          <a:solidFill>
+                            <a:srgbClr val="FFFFFF"/>
+                          </a:solidFill>
+                          <a:latin typeface="Calibri" pitchFamily="34" charset="0"/>
+                          <a:ea typeface="Calibri" pitchFamily="34" charset="-122"/>
+                          <a:cs typeface="Calibri" pitchFamily="34" charset="-120"/>
+                        </a:rPr>
+                        <a:t>Credit</a:t>
+                      </a:r>
+                      <a:endParaRPr lang="en-US" sz="1250" dirty="0">
+                        <a:latin typeface="Calibri" charset="0"/>
+                        <a:ea typeface="Calibri" charset="0"/>
+                        <a:cs typeface="Calibri" charset="0"/>
+                      </a:endParaRPr>
+                    </a:p>
+                  </a:txBody>
+                  <a:tcPr marL="101600" marR="101600" marT="25400" marB="25400" anchor="ctr">
+                    <a:lnL w="6350" cap="flat" cmpd="sng" algn="ctr">
+                      <a:solidFill>
+                        <a:srgbClr val="E6E8F0"/>
+                      </a:solidFill>
+                      <a:prstDash val="solid"/>
+                      <a:round/>
+                      <a:headEnd type="none" w="med" len="med"/>
+                      <a:tailEnd type="none" w="med" len="med"/>
+                    </a:lnL>
+                    <a:lnR w="6350" cap="flat" cmpd="sng" algn="ctr">
+                      <a:solidFill>
+                        <a:srgbClr val="E6E8F0"/>
+                      </a:solidFill>
+                      <a:prstDash val="solid"/>
+                      <a:round/>
+                      <a:headEnd type="none" w="med" len="med"/>
+                      <a:tailEnd type="none" w="med" len="med"/>
+                    </a:lnR>
+                    <a:lnT w="6350" cap="flat" cmpd="sng" algn="ctr">
+                      <a:solidFill>
+                        <a:srgbClr val="E6E8F0"/>
+                      </a:solidFill>
+                      <a:prstDash val="solid"/>
+                      <a:round/>
+                      <a:headEnd type="none" w="med" len="med"/>
+                      <a:tailEnd type="none" w="med" len="med"/>
+                    </a:lnT>
+                    <a:lnB w="6350" cap="flat" cmpd="sng" algn="ctr">
+                      <a:solidFill>
+                        <a:srgbClr val="E6E8F0"/>
+                      </a:solidFill>
+                      <a:prstDash val="solid"/>
+                      <a:round/>
+                      <a:headEnd type="none" w="med" len="med"/>
+                      <a:tailEnd type="none" w="med" len="med"/>
+                    </a:lnB>
+                    <a:solidFill>
+                      <a:srgbClr val="0A1FC2"/>
+                    </a:solidFill>
+                  </a:tcPr>
+                </a:tc>
+                <a:tc>
+                  <a:txBody>
+                    <a:bodyPr/>
+                    <a:lstStyle/>
+                    <a:p>
+                      <a:pPr algn="r" indent="0" marL="0">
+                        <a:buNone/>
+                      </a:pPr>
+                      <a:r>
+                        <a:rPr lang="en-US" sz="1250" b="1" dirty="0">
+                          <a:solidFill>
+                            <a:srgbClr val="FFFFFF"/>
+                          </a:solidFill>
+                          <a:latin typeface="Calibri" pitchFamily="34" charset="0"/>
+                          <a:ea typeface="Calibri" pitchFamily="34" charset="-122"/>
+                          <a:cs typeface="Calibri" pitchFamily="34" charset="-120"/>
+                        </a:rPr>
+                        <a:t>Price</a:t>
+                      </a:r>
+                      <a:endParaRPr lang="en-US" sz="1250" dirty="0">
+                        <a:latin typeface="Calibri" charset="0"/>
+                        <a:ea typeface="Calibri" charset="0"/>
+                        <a:cs typeface="Calibri" charset="0"/>
+                      </a:endParaRPr>
+                    </a:p>
+                  </a:txBody>
+                  <a:tcPr marL="101600" marR="101600" marT="25400" marB="25400" anchor="ctr">
+                    <a:lnL w="6350" cap="flat" cmpd="sng" algn="ctr">
+                      <a:solidFill>
+                        <a:srgbClr val="E6E8F0"/>
+                      </a:solidFill>
+                      <a:prstDash val="solid"/>
+                      <a:round/>
+                      <a:headEnd type="none" w="med" len="med"/>
+                      <a:tailEnd type="none" w="med" len="med"/>
+                    </a:lnL>
+                    <a:lnR w="6350" cap="flat" cmpd="sng" algn="ctr">
+                      <a:solidFill>
+                        <a:srgbClr val="E6E8F0"/>
+                      </a:solidFill>
+                      <a:prstDash val="solid"/>
+                      <a:round/>
+                      <a:headEnd type="none" w="med" len="med"/>
+                      <a:tailEnd type="none" w="med" len="med"/>
+                    </a:lnR>
+                    <a:lnT w="6350" cap="flat" cmpd="sng" algn="ctr">
+                      <a:solidFill>
+                        <a:srgbClr val="E6E8F0"/>
+                      </a:solidFill>
+                      <a:prstDash val="solid"/>
+                      <a:round/>
+                      <a:headEnd type="none" w="med" len="med"/>
+                      <a:tailEnd type="none" w="med" len="med"/>
+                    </a:lnT>
+                    <a:lnB w="6350" cap="flat" cmpd="sng" algn="ctr">
+                      <a:solidFill>
+                        <a:srgbClr val="E6E8F0"/>
+                      </a:solidFill>
+                      <a:prstDash val="solid"/>
+                      <a:round/>
+                      <a:headEnd type="none" w="med" len="med"/>
+                      <a:tailEnd type="none" w="med" len="med"/>
+                    </a:lnB>
+                    <a:solidFill>
+                      <a:srgbClr val="0A1FC2"/>
+                    </a:solidFill>
+                  </a:tcPr>
+                </a:tc>
+                <a:tc>
+                  <a:txBody>
+                    <a:bodyPr/>
+                    <a:lstStyle/>
+                    <a:p>
+                      <a:pPr algn="r" indent="0" marL="0">
+                        <a:buNone/>
+                      </a:pPr>
+                      <a:r>
+                        <a:rPr lang="en-US" sz="1250" b="1" dirty="0">
+                          <a:solidFill>
+                            <a:srgbClr val="FFFFFF"/>
+                          </a:solidFill>
+                          <a:latin typeface="Calibri" pitchFamily="34" charset="0"/>
+                          <a:ea typeface="Calibri" pitchFamily="34" charset="-122"/>
+                          <a:cs typeface="Calibri" pitchFamily="34" charset="-120"/>
+                        </a:rPr>
+                        <a:t>Cost (AI + Stripe)</a:t>
+                      </a:r>
+                      <a:endParaRPr lang="en-US" sz="1250" dirty="0">
+                        <a:latin typeface="Calibri" charset="0"/>
+                        <a:ea typeface="Calibri" charset="0"/>
+                        <a:cs typeface="Calibri" charset="0"/>
+                      </a:endParaRPr>
+                    </a:p>
+                  </a:txBody>
+                  <a:tcPr marL="101600" marR="101600" marT="25400" marB="25400" anchor="ctr">
+                    <a:lnL w="6350" cap="flat" cmpd="sng" algn="ctr">
+                      <a:solidFill>
+                        <a:srgbClr val="E6E8F0"/>
+                      </a:solidFill>
+                      <a:prstDash val="solid"/>
+                      <a:round/>
+                      <a:headEnd type="none" w="med" len="med"/>
+                      <a:tailEnd type="none" w="med" len="med"/>
+                    </a:lnL>
+                    <a:lnR w="6350" cap="flat" cmpd="sng" algn="ctr">
+                      <a:solidFill>
+                        <a:srgbClr val="E6E8F0"/>
+                      </a:solidFill>
+                      <a:prstDash val="solid"/>
+                      <a:round/>
+                      <a:headEnd type="none" w="med" len="med"/>
+                      <a:tailEnd type="none" w="med" len="med"/>
+                    </a:lnR>
+                    <a:lnT w="6350" cap="flat" cmpd="sng" algn="ctr">
+                      <a:solidFill>
+                        <a:srgbClr val="E6E8F0"/>
+                      </a:solidFill>
+                      <a:prstDash val="solid"/>
+                      <a:round/>
+                      <a:headEnd type="none" w="med" len="med"/>
+                      <a:tailEnd type="none" w="med" len="med"/>
+                    </a:lnT>
+                    <a:lnB w="6350" cap="flat" cmpd="sng" algn="ctr">
+                      <a:solidFill>
+                        <a:srgbClr val="E6E8F0"/>
+                      </a:solidFill>
+                      <a:prstDash val="solid"/>
+                      <a:round/>
+                      <a:headEnd type="none" w="med" len="med"/>
+                      <a:tailEnd type="none" w="med" len="med"/>
+                    </a:lnB>
+                    <a:solidFill>
+                      <a:srgbClr val="0A1FC2"/>
+                    </a:solidFill>
+                  </a:tcPr>
+                </a:tc>
+                <a:tc>
+                  <a:txBody>
+                    <a:bodyPr/>
+                    <a:lstStyle/>
+                    <a:p>
+                      <a:pPr algn="ctr" indent="0" marL="0">
+                        <a:buNone/>
+                      </a:pPr>
+                      <a:r>
+                        <a:rPr lang="en-US" sz="1250" b="1" dirty="0">
+                          <a:solidFill>
+                            <a:srgbClr val="FFFFFF"/>
+                          </a:solidFill>
+                          <a:latin typeface="Calibri" pitchFamily="34" charset="0"/>
+                          <a:ea typeface="Calibri" pitchFamily="34" charset="-122"/>
+                          <a:cs typeface="Calibri" pitchFamily="34" charset="-120"/>
+                        </a:rPr>
+                        <a:t>Gross margin</a:t>
+                      </a:r>
+                      <a:endParaRPr lang="en-US" sz="1250" dirty="0">
+                        <a:latin typeface="Calibri" charset="0"/>
+                        <a:ea typeface="Calibri" charset="0"/>
+                        <a:cs typeface="Calibri" charset="0"/>
+                      </a:endParaRPr>
+                    </a:p>
+                  </a:txBody>
+                  <a:tcPr marL="101600" marR="101600" marT="25400" marB="25400" anchor="ctr">
+                    <a:lnL w="6350" cap="flat" cmpd="sng" algn="ctr">
+                      <a:solidFill>
+                        <a:srgbClr val="E6E8F0"/>
+                      </a:solidFill>
+                      <a:prstDash val="solid"/>
+                      <a:round/>
+                      <a:headEnd type="none" w="med" len="med"/>
+                      <a:tailEnd type="none" w="med" len="med"/>
+                    </a:lnL>
+                    <a:lnR w="6350" cap="flat" cmpd="sng" algn="ctr">
+                      <a:solidFill>
+                        <a:srgbClr val="E6E8F0"/>
+                      </a:solidFill>
+                      <a:prstDash val="solid"/>
+                      <a:round/>
+                      <a:headEnd type="none" w="med" len="med"/>
+                      <a:tailEnd type="none" w="med" len="med"/>
+                    </a:lnR>
+                    <a:lnT w="6350" cap="flat" cmpd="sng" algn="ctr">
+                      <a:solidFill>
+                        <a:srgbClr val="E6E8F0"/>
+                      </a:solidFill>
+                      <a:prstDash val="solid"/>
+                      <a:round/>
+                      <a:headEnd type="none" w="med" len="med"/>
+                      <a:tailEnd type="none" w="med" len="med"/>
+                    </a:lnT>
+                    <a:lnB w="6350" cap="flat" cmpd="sng" algn="ctr">
+                      <a:solidFill>
+                        <a:srgbClr val="E6E8F0"/>
+                      </a:solidFill>
+                      <a:prstDash val="solid"/>
+                      <a:round/>
+                      <a:headEnd type="none" w="med" len="med"/>
+                      <a:tailEnd type="none" w="med" len="med"/>
+                    </a:lnB>
+                    <a:solidFill>
+                      <a:srgbClr val="0B2AE0"/>
+                    </a:solidFill>
+                  </a:tcPr>
+                </a:tc>
+              </a:tr>
+              <a:tr h="548640">
+                <a:tc>
+                  <a:txBody>
+                    <a:bodyPr/>
+                    <a:lstStyle/>
+                    <a:p>
+                      <a:pPr algn="l" indent="0" marL="0">
+                        <a:buNone/>
+                      </a:pPr>
+                      <a:r>
+                        <a:rPr lang="en-US" sz="1250" b="1" dirty="0">
+                          <a:solidFill>
+                            <a:srgbClr val="12132A"/>
+                          </a:solidFill>
+                          <a:latin typeface="Calibri" pitchFamily="34" charset="0"/>
+                          <a:ea typeface="Calibri" pitchFamily="34" charset="-122"/>
+                          <a:cs typeface="Calibri" pitchFamily="34" charset="-120"/>
+                        </a:rPr>
+                        <a:t>Resume / applicant screening</a:t>
+                      </a:r>
+                      <a:endParaRPr lang="en-US" sz="1250" dirty="0">
+                        <a:latin typeface="Calibri" charset="0"/>
+                        <a:ea typeface="Calibri" charset="0"/>
+                        <a:cs typeface="Calibri" charset="0"/>
+                      </a:endParaRPr>
+                    </a:p>
+                  </a:txBody>
+                  <a:tcPr marL="101600" marR="101600" marT="25400" marB="25400" anchor="ctr">
+                    <a:lnL w="6350" cap="flat" cmpd="sng" algn="ctr">
+                      <a:solidFill>
+                        <a:srgbClr val="E6E8F0"/>
+                      </a:solidFill>
+                      <a:prstDash val="solid"/>
+                      <a:round/>
+                      <a:headEnd type="none" w="med" len="med"/>
+                      <a:tailEnd type="none" w="med" len="med"/>
+                    </a:lnL>
+                    <a:lnR w="6350" cap="flat" cmpd="sng" algn="ctr">
+                      <a:solidFill>
+                        <a:srgbClr val="E6E8F0"/>
+                      </a:solidFill>
+                      <a:prstDash val="solid"/>
+                      <a:round/>
+                      <a:headEnd type="none" w="med" len="med"/>
+                      <a:tailEnd type="none" w="med" len="med"/>
+                    </a:lnR>
+                    <a:lnT w="6350" cap="flat" cmpd="sng" algn="ctr">
+                      <a:solidFill>
+                        <a:srgbClr val="E6E8F0"/>
+                      </a:solidFill>
+                      <a:prstDash val="solid"/>
+                      <a:round/>
+                      <a:headEnd type="none" w="med" len="med"/>
+                      <a:tailEnd type="none" w="med" len="med"/>
+                    </a:lnT>
+                    <a:lnB w="6350" cap="flat" cmpd="sng" algn="ctr">
+                      <a:solidFill>
+                        <a:srgbClr val="E6E8F0"/>
+                      </a:solidFill>
+                      <a:prstDash val="solid"/>
+                      <a:round/>
+                      <a:headEnd type="none" w="med" len="med"/>
+                      <a:tailEnd type="none" w="med" len="med"/>
+                    </a:lnB>
+                    <a:solidFill>
+                      <a:srgbClr val="FFFFFF"/>
+                    </a:solidFill>
+                  </a:tcPr>
+                </a:tc>
+                <a:tc>
+                  <a:txBody>
+                    <a:bodyPr/>
+                    <a:lstStyle/>
+                    <a:p>
+                      <a:pPr algn="r" indent="0" marL="0">
+                        <a:buNone/>
+                      </a:pPr>
+                      <a:r>
+                        <a:rPr lang="en-US" sz="1250" dirty="0">
+                          <a:solidFill>
+                            <a:srgbClr val="4A5568"/>
+                          </a:solidFill>
+                          <a:latin typeface="Calibri" pitchFamily="34" charset="0"/>
+                          <a:ea typeface="Calibri" pitchFamily="34" charset="-122"/>
+                          <a:cs typeface="Calibri" pitchFamily="34" charset="-120"/>
+                        </a:rPr>
+                        <a:t>RM2.82</a:t>
+                      </a:r>
+                      <a:endParaRPr lang="en-US" sz="1250" dirty="0">
+                        <a:latin typeface="Calibri" charset="0"/>
+                        <a:ea typeface="Calibri" charset="0"/>
+                        <a:cs typeface="Calibri" charset="0"/>
+                      </a:endParaRPr>
+                    </a:p>
+                  </a:txBody>
+                  <a:tcPr marL="101600" marR="101600" marT="25400" marB="25400" anchor="ctr">
+                    <a:lnL w="6350" cap="flat" cmpd="sng" algn="ctr">
+                      <a:solidFill>
+                        <a:srgbClr val="E6E8F0"/>
+                      </a:solidFill>
+                      <a:prstDash val="solid"/>
+                      <a:round/>
+                      <a:headEnd type="none" w="med" len="med"/>
+                      <a:tailEnd type="none" w="med" len="med"/>
+                    </a:lnL>
+                    <a:lnR w="6350" cap="flat" cmpd="sng" algn="ctr">
+                      <a:solidFill>
+                        <a:srgbClr val="E6E8F0"/>
+                      </a:solidFill>
+                      <a:prstDash val="solid"/>
+                      <a:round/>
+                      <a:headEnd type="none" w="med" len="med"/>
+                      <a:tailEnd type="none" w="med" len="med"/>
+                    </a:lnR>
+                    <a:lnT w="6350" cap="flat" cmpd="sng" algn="ctr">
+                      <a:solidFill>
+                        <a:srgbClr val="E6E8F0"/>
+                      </a:solidFill>
+                      <a:prstDash val="solid"/>
+                      <a:round/>
+                      <a:headEnd type="none" w="med" len="med"/>
+                      <a:tailEnd type="none" w="med" len="med"/>
+                    </a:lnT>
+                    <a:lnB w="6350" cap="flat" cmpd="sng" algn="ctr">
+                      <a:solidFill>
+                        <a:srgbClr val="E6E8F0"/>
+                      </a:solidFill>
+                      <a:prstDash val="solid"/>
+                      <a:round/>
+                      <a:headEnd type="none" w="med" len="med"/>
+                      <a:tailEnd type="none" w="med" len="med"/>
+                    </a:lnB>
+                    <a:solidFill>
+                      <a:srgbClr val="FFFFFF"/>
+                    </a:solidFill>
+                  </a:tcPr>
+                </a:tc>
+                <a:tc>
+                  <a:txBody>
+                    <a:bodyPr/>
+                    <a:lstStyle/>
+                    <a:p>
+                      <a:pPr algn="r" indent="0" marL="0">
+                        <a:buNone/>
+                      </a:pPr>
+                      <a:r>
+                        <a:rPr lang="en-US" sz="1250" dirty="0">
+                          <a:solidFill>
+                            <a:srgbClr val="4A5568"/>
+                          </a:solidFill>
+                          <a:latin typeface="Calibri" pitchFamily="34" charset="0"/>
+                          <a:ea typeface="Calibri" pitchFamily="34" charset="-122"/>
+                          <a:cs typeface="Calibri" pitchFamily="34" charset="-120"/>
+                        </a:rPr>
+                        <a:t>RM0.34</a:t>
+                      </a:r>
+                      <a:endParaRPr lang="en-US" sz="1250" dirty="0">
+                        <a:latin typeface="Calibri" charset="0"/>
+                        <a:ea typeface="Calibri" charset="0"/>
+                        <a:cs typeface="Calibri" charset="0"/>
+                      </a:endParaRPr>
+                    </a:p>
+                  </a:txBody>
+                  <a:tcPr marL="101600" marR="101600" marT="25400" marB="25400" anchor="ctr">
+                    <a:lnL w="6350" cap="flat" cmpd="sng" algn="ctr">
+                      <a:solidFill>
+                        <a:srgbClr val="E6E8F0"/>
+                      </a:solidFill>
+                      <a:prstDash val="solid"/>
+                      <a:round/>
+                      <a:headEnd type="none" w="med" len="med"/>
+                      <a:tailEnd type="none" w="med" len="med"/>
+                    </a:lnL>
+                    <a:lnR w="6350" cap="flat" cmpd="sng" algn="ctr">
+                      <a:solidFill>
+                        <a:srgbClr val="E6E8F0"/>
+                      </a:solidFill>
+                      <a:prstDash val="solid"/>
+                      <a:round/>
+                      <a:headEnd type="none" w="med" len="med"/>
+                      <a:tailEnd type="none" w="med" len="med"/>
+                    </a:lnR>
+                    <a:lnT w="6350" cap="flat" cmpd="sng" algn="ctr">
+                      <a:solidFill>
+                        <a:srgbClr val="E6E8F0"/>
+                      </a:solidFill>
+                      <a:prstDash val="solid"/>
+                      <a:round/>
+                      <a:headEnd type="none" w="med" len="med"/>
+                      <a:tailEnd type="none" w="med" len="med"/>
+                    </a:lnT>
+                    <a:lnB w="6350" cap="flat" cmpd="sng" algn="ctr">
+                      <a:solidFill>
+                        <a:srgbClr val="E6E8F0"/>
+                      </a:solidFill>
+                      <a:prstDash val="solid"/>
+                      <a:round/>
+                      <a:headEnd type="none" w="med" len="med"/>
+                      <a:tailEnd type="none" w="med" len="med"/>
+                    </a:lnB>
+                    <a:solidFill>
+                      <a:srgbClr val="FFFFFF"/>
+                    </a:solidFill>
+                  </a:tcPr>
+                </a:tc>
+                <a:tc>
+                  <a:txBody>
+                    <a:bodyPr/>
+                    <a:lstStyle/>
+                    <a:p>
+                      <a:pPr algn="ctr" indent="0" marL="0">
+                        <a:buNone/>
+                      </a:pPr>
+                      <a:r>
+                        <a:rPr lang="en-US" sz="1250" b="1" dirty="0">
+                          <a:solidFill>
+                            <a:srgbClr val="16A34A"/>
+                          </a:solidFill>
+                          <a:latin typeface="Calibri" pitchFamily="34" charset="0"/>
+                          <a:ea typeface="Calibri" pitchFamily="34" charset="-122"/>
+                          <a:cs typeface="Calibri" pitchFamily="34" charset="-120"/>
+                        </a:rPr>
+                        <a:t>88%</a:t>
+                      </a:r>
+                      <a:endParaRPr lang="en-US" sz="1250" dirty="0">
+                        <a:latin typeface="Calibri" charset="0"/>
+                        <a:ea typeface="Calibri" charset="0"/>
+                        <a:cs typeface="Calibri" charset="0"/>
+                      </a:endParaRPr>
+                    </a:p>
+                  </a:txBody>
+                  <a:tcPr marL="101600" marR="101600" marT="25400" marB="25400" anchor="ctr">
+                    <a:lnL w="6350" cap="flat" cmpd="sng" algn="ctr">
+                      <a:solidFill>
+                        <a:srgbClr val="E6E8F0"/>
+                      </a:solidFill>
+                      <a:prstDash val="solid"/>
+                      <a:round/>
+                      <a:headEnd type="none" w="med" len="med"/>
+                      <a:tailEnd type="none" w="med" len="med"/>
+                    </a:lnL>
+                    <a:lnR w="6350" cap="flat" cmpd="sng" algn="ctr">
+                      <a:solidFill>
+                        <a:srgbClr val="E6E8F0"/>
+                      </a:solidFill>
+                      <a:prstDash val="solid"/>
+                      <a:round/>
+                      <a:headEnd type="none" w="med" len="med"/>
+                      <a:tailEnd type="none" w="med" len="med"/>
+                    </a:lnR>
+                    <a:lnT w="6350" cap="flat" cmpd="sng" algn="ctr">
+                      <a:solidFill>
+                        <a:srgbClr val="E6E8F0"/>
+                      </a:solidFill>
+                      <a:prstDash val="solid"/>
+                      <a:round/>
+                      <a:headEnd type="none" w="med" len="med"/>
+                      <a:tailEnd type="none" w="med" len="med"/>
+                    </a:lnT>
+                    <a:lnB w="6350" cap="flat" cmpd="sng" algn="ctr">
+                      <a:solidFill>
+                        <a:srgbClr val="E6E8F0"/>
+                      </a:solidFill>
+                      <a:prstDash val="solid"/>
+                      <a:round/>
+                      <a:headEnd type="none" w="med" len="med"/>
+                      <a:tailEnd type="none" w="med" len="med"/>
+                    </a:lnB>
+                    <a:solidFill>
+                      <a:srgbClr val="FFFFFF"/>
+                    </a:solidFill>
+                  </a:tcPr>
+                </a:tc>
+              </a:tr>
+              <a:tr h="548640">
+                <a:tc>
+                  <a:txBody>
+                    <a:bodyPr/>
+                    <a:lstStyle/>
+                    <a:p>
+                      <a:pPr algn="l" indent="0" marL="0">
+                        <a:buNone/>
+                      </a:pPr>
+                      <a:r>
+                        <a:rPr lang="en-US" sz="1250" b="1" dirty="0">
+                          <a:solidFill>
+                            <a:srgbClr val="12132A"/>
+                          </a:solidFill>
+                          <a:latin typeface="Calibri" pitchFamily="34" charset="0"/>
+                          <a:ea typeface="Calibri" pitchFamily="34" charset="-122"/>
+                          <a:cs typeface="Calibri" pitchFamily="34" charset="-120"/>
+                        </a:rPr>
+                        <a:t>AI Rank</a:t>
+                      </a:r>
+                      <a:endParaRPr lang="en-US" sz="1250" dirty="0">
+                        <a:latin typeface="Calibri" charset="0"/>
+                        <a:ea typeface="Calibri" charset="0"/>
+                        <a:cs typeface="Calibri" charset="0"/>
+                      </a:endParaRPr>
+                    </a:p>
+                  </a:txBody>
+                  <a:tcPr marL="101600" marR="101600" marT="25400" marB="25400" anchor="ctr">
+                    <a:lnL w="6350" cap="flat" cmpd="sng" algn="ctr">
+                      <a:solidFill>
+                        <a:srgbClr val="E6E8F0"/>
+                      </a:solidFill>
+                      <a:prstDash val="solid"/>
+                      <a:round/>
+                      <a:headEnd type="none" w="med" len="med"/>
+                      <a:tailEnd type="none" w="med" len="med"/>
+                    </a:lnL>
+                    <a:lnR w="6350" cap="flat" cmpd="sng" algn="ctr">
+                      <a:solidFill>
+                        <a:srgbClr val="E6E8F0"/>
+                      </a:solidFill>
+                      <a:prstDash val="solid"/>
+                      <a:round/>
+                      <a:headEnd type="none" w="med" len="med"/>
+                      <a:tailEnd type="none" w="med" len="med"/>
+                    </a:lnR>
+                    <a:lnT w="6350" cap="flat" cmpd="sng" algn="ctr">
+                      <a:solidFill>
+                        <a:srgbClr val="E6E8F0"/>
+                      </a:solidFill>
+                      <a:prstDash val="solid"/>
+                      <a:round/>
+                      <a:headEnd type="none" w="med" len="med"/>
+                      <a:tailEnd type="none" w="med" len="med"/>
+                    </a:lnT>
+                    <a:lnB w="6350" cap="flat" cmpd="sng" algn="ctr">
+                      <a:solidFill>
+                        <a:srgbClr val="E6E8F0"/>
+                      </a:solidFill>
+                      <a:prstDash val="solid"/>
+                      <a:round/>
+                      <a:headEnd type="none" w="med" len="med"/>
+                      <a:tailEnd type="none" w="med" len="med"/>
+                    </a:lnB>
+                    <a:solidFill>
+                      <a:srgbClr val="F5F7FE"/>
+                    </a:solidFill>
+                  </a:tcPr>
+                </a:tc>
+                <a:tc>
+                  <a:txBody>
+                    <a:bodyPr/>
+                    <a:lstStyle/>
+                    <a:p>
+                      <a:pPr algn="r" indent="0" marL="0">
+                        <a:buNone/>
+                      </a:pPr>
+                      <a:r>
+                        <a:rPr lang="en-US" sz="1250" dirty="0">
+                          <a:solidFill>
+                            <a:srgbClr val="4A5568"/>
+                          </a:solidFill>
+                          <a:latin typeface="Calibri" pitchFamily="34" charset="0"/>
+                          <a:ea typeface="Calibri" pitchFamily="34" charset="-122"/>
+                          <a:cs typeface="Calibri" pitchFamily="34" charset="-120"/>
+                        </a:rPr>
+                        <a:t>RM2.45</a:t>
+                      </a:r>
+                      <a:endParaRPr lang="en-US" sz="1250" dirty="0">
+                        <a:latin typeface="Calibri" charset="0"/>
+                        <a:ea typeface="Calibri" charset="0"/>
+                        <a:cs typeface="Calibri" charset="0"/>
+                      </a:endParaRPr>
+                    </a:p>
+                  </a:txBody>
+                  <a:tcPr marL="101600" marR="101600" marT="25400" marB="25400" anchor="ctr">
+                    <a:lnL w="6350" cap="flat" cmpd="sng" algn="ctr">
+                      <a:solidFill>
+                        <a:srgbClr val="E6E8F0"/>
+                      </a:solidFill>
+                      <a:prstDash val="solid"/>
+                      <a:round/>
+                      <a:headEnd type="none" w="med" len="med"/>
+                      <a:tailEnd type="none" w="med" len="med"/>
+                    </a:lnL>
+                    <a:lnR w="6350" cap="flat" cmpd="sng" algn="ctr">
+                      <a:solidFill>
+                        <a:srgbClr val="E6E8F0"/>
+                      </a:solidFill>
+                      <a:prstDash val="solid"/>
+                      <a:round/>
+                      <a:headEnd type="none" w="med" len="med"/>
+                      <a:tailEnd type="none" w="med" len="med"/>
+                    </a:lnR>
+                    <a:lnT w="6350" cap="flat" cmpd="sng" algn="ctr">
+                      <a:solidFill>
+                        <a:srgbClr val="E6E8F0"/>
+                      </a:solidFill>
+                      <a:prstDash val="solid"/>
+                      <a:round/>
+                      <a:headEnd type="none" w="med" len="med"/>
+                      <a:tailEnd type="none" w="med" len="med"/>
+                    </a:lnT>
+                    <a:lnB w="6350" cap="flat" cmpd="sng" algn="ctr">
+                      <a:solidFill>
+                        <a:srgbClr val="E6E8F0"/>
+                      </a:solidFill>
+                      <a:prstDash val="solid"/>
+                      <a:round/>
+                      <a:headEnd type="none" w="med" len="med"/>
+                      <a:tailEnd type="none" w="med" len="med"/>
+                    </a:lnB>
+                    <a:solidFill>
+                      <a:srgbClr val="F5F7FE"/>
+                    </a:solidFill>
+                  </a:tcPr>
+                </a:tc>
+                <a:tc>
+                  <a:txBody>
+                    <a:bodyPr/>
+                    <a:lstStyle/>
+                    <a:p>
+                      <a:pPr algn="r" indent="0" marL="0">
+                        <a:buNone/>
+                      </a:pPr>
+                      <a:r>
+                        <a:rPr lang="en-US" sz="1250" dirty="0">
+                          <a:solidFill>
+                            <a:srgbClr val="4A5568"/>
+                          </a:solidFill>
+                          <a:latin typeface="Calibri" pitchFamily="34" charset="0"/>
+                          <a:ea typeface="Calibri" pitchFamily="34" charset="-122"/>
+                          <a:cs typeface="Calibri" pitchFamily="34" charset="-120"/>
+                        </a:rPr>
+                        <a:t>RM0.37</a:t>
+                      </a:r>
+                      <a:endParaRPr lang="en-US" sz="1250" dirty="0">
+                        <a:latin typeface="Calibri" charset="0"/>
+                        <a:ea typeface="Calibri" charset="0"/>
+                        <a:cs typeface="Calibri" charset="0"/>
+                      </a:endParaRPr>
+                    </a:p>
+                  </a:txBody>
+                  <a:tcPr marL="101600" marR="101600" marT="25400" marB="25400" anchor="ctr">
+                    <a:lnL w="6350" cap="flat" cmpd="sng" algn="ctr">
+                      <a:solidFill>
+                        <a:srgbClr val="E6E8F0"/>
+                      </a:solidFill>
+                      <a:prstDash val="solid"/>
+                      <a:round/>
+                      <a:headEnd type="none" w="med" len="med"/>
+                      <a:tailEnd type="none" w="med" len="med"/>
+                    </a:lnL>
+                    <a:lnR w="6350" cap="flat" cmpd="sng" algn="ctr">
+                      <a:solidFill>
+                        <a:srgbClr val="E6E8F0"/>
+                      </a:solidFill>
+                      <a:prstDash val="solid"/>
+                      <a:round/>
+                      <a:headEnd type="none" w="med" len="med"/>
+                      <a:tailEnd type="none" w="med" len="med"/>
+                    </a:lnR>
+                    <a:lnT w="6350" cap="flat" cmpd="sng" algn="ctr">
+                      <a:solidFill>
+                        <a:srgbClr val="E6E8F0"/>
+                      </a:solidFill>
+                      <a:prstDash val="solid"/>
+                      <a:round/>
+                      <a:headEnd type="none" w="med" len="med"/>
+                      <a:tailEnd type="none" w="med" len="med"/>
+                    </a:lnT>
+                    <a:lnB w="6350" cap="flat" cmpd="sng" algn="ctr">
+                      <a:solidFill>
+                        <a:srgbClr val="E6E8F0"/>
+                      </a:solidFill>
+                      <a:prstDash val="solid"/>
+                      <a:round/>
+                      <a:headEnd type="none" w="med" len="med"/>
+                      <a:tailEnd type="none" w="med" len="med"/>
+                    </a:lnB>
+                    <a:solidFill>
+                      <a:srgbClr val="F5F7FE"/>
+                    </a:solidFill>
+                  </a:tcPr>
+                </a:tc>
+                <a:tc>
+                  <a:txBody>
+                    <a:bodyPr/>
+                    <a:lstStyle/>
+                    <a:p>
+                      <a:pPr algn="ctr" indent="0" marL="0">
+                        <a:buNone/>
+                      </a:pPr>
+                      <a:r>
+                        <a:rPr lang="en-US" sz="1250" b="1" dirty="0">
+                          <a:solidFill>
+                            <a:srgbClr val="16A34A"/>
+                          </a:solidFill>
+                          <a:latin typeface="Calibri" pitchFamily="34" charset="0"/>
+                          <a:ea typeface="Calibri" pitchFamily="34" charset="-122"/>
+                          <a:cs typeface="Calibri" pitchFamily="34" charset="-120"/>
+                        </a:rPr>
+                        <a:t>85%</a:t>
+                      </a:r>
+                      <a:endParaRPr lang="en-US" sz="1250" dirty="0">
+                        <a:latin typeface="Calibri" charset="0"/>
+                        <a:ea typeface="Calibri" charset="0"/>
+                        <a:cs typeface="Calibri" charset="0"/>
+                      </a:endParaRPr>
+                    </a:p>
+                  </a:txBody>
+                  <a:tcPr marL="101600" marR="101600" marT="25400" marB="25400" anchor="ctr">
+                    <a:lnL w="6350" cap="flat" cmpd="sng" algn="ctr">
+                      <a:solidFill>
+                        <a:srgbClr val="E6E8F0"/>
+                      </a:solidFill>
+                      <a:prstDash val="solid"/>
+                      <a:round/>
+                      <a:headEnd type="none" w="med" len="med"/>
+                      <a:tailEnd type="none" w="med" len="med"/>
+                    </a:lnL>
+                    <a:lnR w="6350" cap="flat" cmpd="sng" algn="ctr">
+                      <a:solidFill>
+                        <a:srgbClr val="E6E8F0"/>
+                      </a:solidFill>
+                      <a:prstDash val="solid"/>
+                      <a:round/>
+                      <a:headEnd type="none" w="med" len="med"/>
+                      <a:tailEnd type="none" w="med" len="med"/>
+                    </a:lnR>
+                    <a:lnT w="6350" cap="flat" cmpd="sng" algn="ctr">
+                      <a:solidFill>
+                        <a:srgbClr val="E6E8F0"/>
+                      </a:solidFill>
+                      <a:prstDash val="solid"/>
+                      <a:round/>
+                      <a:headEnd type="none" w="med" len="med"/>
+                      <a:tailEnd type="none" w="med" len="med"/>
+                    </a:lnT>
+                    <a:lnB w="6350" cap="flat" cmpd="sng" algn="ctr">
+                      <a:solidFill>
+                        <a:srgbClr val="E6E8F0"/>
+                      </a:solidFill>
+                      <a:prstDash val="solid"/>
+                      <a:round/>
+                      <a:headEnd type="none" w="med" len="med"/>
+                      <a:tailEnd type="none" w="med" len="med"/>
+                    </a:lnB>
+                    <a:solidFill>
+                      <a:srgbClr val="F5F7FE"/>
+                    </a:solidFill>
+                  </a:tcPr>
+                </a:tc>
+              </a:tr>
+              <a:tr h="548640">
+                <a:tc>
+                  <a:txBody>
+                    <a:bodyPr/>
+                    <a:lstStyle/>
+                    <a:p>
+                      <a:pPr algn="l" indent="0" marL="0">
+                        <a:buNone/>
+                      </a:pPr>
+                      <a:r>
+                        <a:rPr lang="en-US" sz="1250" b="1" dirty="0">
+                          <a:solidFill>
+                            <a:srgbClr val="12132A"/>
+                          </a:solidFill>
+                          <a:latin typeface="Calibri" pitchFamily="34" charset="0"/>
+                          <a:ea typeface="Calibri" pitchFamily="34" charset="-122"/>
+                          <a:cs typeface="Calibri" pitchFamily="34" charset="-120"/>
+                        </a:rPr>
+                        <a:t>AI Insight</a:t>
+                      </a:r>
+                      <a:endParaRPr lang="en-US" sz="1250" dirty="0">
+                        <a:latin typeface="Calibri" charset="0"/>
+                        <a:ea typeface="Calibri" charset="0"/>
+                        <a:cs typeface="Calibri" charset="0"/>
+                      </a:endParaRPr>
+                    </a:p>
+                  </a:txBody>
+                  <a:tcPr marL="101600" marR="101600" marT="25400" marB="25400" anchor="ctr">
+                    <a:lnL w="6350" cap="flat" cmpd="sng" algn="ctr">
+                      <a:solidFill>
+                        <a:srgbClr val="E6E8F0"/>
+                      </a:solidFill>
+                      <a:prstDash val="solid"/>
+                      <a:round/>
+                      <a:headEnd type="none" w="med" len="med"/>
+                      <a:tailEnd type="none" w="med" len="med"/>
+                    </a:lnL>
+                    <a:lnR w="6350" cap="flat" cmpd="sng" algn="ctr">
+                      <a:solidFill>
+                        <a:srgbClr val="E6E8F0"/>
+                      </a:solidFill>
+                      <a:prstDash val="solid"/>
+                      <a:round/>
+                      <a:headEnd type="none" w="med" len="med"/>
+                      <a:tailEnd type="none" w="med" len="med"/>
+                    </a:lnR>
+                    <a:lnT w="6350" cap="flat" cmpd="sng" algn="ctr">
+                      <a:solidFill>
+                        <a:srgbClr val="E6E8F0"/>
+                      </a:solidFill>
+                      <a:prstDash val="solid"/>
+                      <a:round/>
+                      <a:headEnd type="none" w="med" len="med"/>
+                      <a:tailEnd type="none" w="med" len="med"/>
+                    </a:lnT>
+                    <a:lnB w="6350" cap="flat" cmpd="sng" algn="ctr">
+                      <a:solidFill>
+                        <a:srgbClr val="E6E8F0"/>
+                      </a:solidFill>
+                      <a:prstDash val="solid"/>
+                      <a:round/>
+                      <a:headEnd type="none" w="med" len="med"/>
+                      <a:tailEnd type="none" w="med" len="med"/>
+                    </a:lnB>
+                    <a:solidFill>
+                      <a:srgbClr val="FFFFFF"/>
+                    </a:solidFill>
+                  </a:tcPr>
+                </a:tc>
+                <a:tc>
+                  <a:txBody>
+                    <a:bodyPr/>
+                    <a:lstStyle/>
+                    <a:p>
+                      <a:pPr algn="r" indent="0" marL="0">
+                        <a:buNone/>
+                      </a:pPr>
+                      <a:r>
+                        <a:rPr lang="en-US" sz="1250" dirty="0">
+                          <a:solidFill>
+                            <a:srgbClr val="4A5568"/>
+                          </a:solidFill>
+                          <a:latin typeface="Calibri" pitchFamily="34" charset="0"/>
+                          <a:ea typeface="Calibri" pitchFamily="34" charset="-122"/>
+                          <a:cs typeface="Calibri" pitchFamily="34" charset="-120"/>
+                        </a:rPr>
+                        <a:t>RM2.45</a:t>
+                      </a:r>
+                      <a:endParaRPr lang="en-US" sz="1250" dirty="0">
+                        <a:latin typeface="Calibri" charset="0"/>
+                        <a:ea typeface="Calibri" charset="0"/>
+                        <a:cs typeface="Calibri" charset="0"/>
+                      </a:endParaRPr>
+                    </a:p>
+                  </a:txBody>
+                  <a:tcPr marL="101600" marR="101600" marT="25400" marB="25400" anchor="ctr">
+                    <a:lnL w="6350" cap="flat" cmpd="sng" algn="ctr">
+                      <a:solidFill>
+                        <a:srgbClr val="E6E8F0"/>
+                      </a:solidFill>
+                      <a:prstDash val="solid"/>
+                      <a:round/>
+                      <a:headEnd type="none" w="med" len="med"/>
+                      <a:tailEnd type="none" w="med" len="med"/>
+                    </a:lnL>
+                    <a:lnR w="6350" cap="flat" cmpd="sng" algn="ctr">
+                      <a:solidFill>
+                        <a:srgbClr val="E6E8F0"/>
+                      </a:solidFill>
+                      <a:prstDash val="solid"/>
+                      <a:round/>
+                      <a:headEnd type="none" w="med" len="med"/>
+                      <a:tailEnd type="none" w="med" len="med"/>
+                    </a:lnR>
+                    <a:lnT w="6350" cap="flat" cmpd="sng" algn="ctr">
+                      <a:solidFill>
+                        <a:srgbClr val="E6E8F0"/>
+                      </a:solidFill>
+                      <a:prstDash val="solid"/>
+                      <a:round/>
+                      <a:headEnd type="none" w="med" len="med"/>
+                      <a:tailEnd type="none" w="med" len="med"/>
+                    </a:lnT>
+                    <a:lnB w="6350" cap="flat" cmpd="sng" algn="ctr">
+                      <a:solidFill>
+                        <a:srgbClr val="E6E8F0"/>
+                      </a:solidFill>
+                      <a:prstDash val="solid"/>
+                      <a:round/>
+                      <a:headEnd type="none" w="med" len="med"/>
+                      <a:tailEnd type="none" w="med" len="med"/>
+                    </a:lnB>
+                    <a:solidFill>
+                      <a:srgbClr val="FFFFFF"/>
+                    </a:solidFill>
+                  </a:tcPr>
+                </a:tc>
+                <a:tc>
+                  <a:txBody>
+                    <a:bodyPr/>
+                    <a:lstStyle/>
+                    <a:p>
+                      <a:pPr algn="r" indent="0" marL="0">
+                        <a:buNone/>
+                      </a:pPr>
+                      <a:r>
+                        <a:rPr lang="en-US" sz="1250" dirty="0">
+                          <a:solidFill>
+                            <a:srgbClr val="4A5568"/>
+                          </a:solidFill>
+                          <a:latin typeface="Calibri" pitchFamily="34" charset="0"/>
+                          <a:ea typeface="Calibri" pitchFamily="34" charset="-122"/>
+                          <a:cs typeface="Calibri" pitchFamily="34" charset="-120"/>
+                        </a:rPr>
+                        <a:t>RM0.21</a:t>
+                      </a:r>
+                      <a:endParaRPr lang="en-US" sz="1250" dirty="0">
+                        <a:latin typeface="Calibri" charset="0"/>
+                        <a:ea typeface="Calibri" charset="0"/>
+                        <a:cs typeface="Calibri" charset="0"/>
+                      </a:endParaRPr>
+                    </a:p>
+                  </a:txBody>
+                  <a:tcPr marL="101600" marR="101600" marT="25400" marB="25400" anchor="ctr">
+                    <a:lnL w="6350" cap="flat" cmpd="sng" algn="ctr">
+                      <a:solidFill>
+                        <a:srgbClr val="E6E8F0"/>
+                      </a:solidFill>
+                      <a:prstDash val="solid"/>
+                      <a:round/>
+                      <a:headEnd type="none" w="med" len="med"/>
+                      <a:tailEnd type="none" w="med" len="med"/>
+                    </a:lnL>
+                    <a:lnR w="6350" cap="flat" cmpd="sng" algn="ctr">
+                      <a:solidFill>
+                        <a:srgbClr val="E6E8F0"/>
+                      </a:solidFill>
+                      <a:prstDash val="solid"/>
+                      <a:round/>
+                      <a:headEnd type="none" w="med" len="med"/>
+                      <a:tailEnd type="none" w="med" len="med"/>
+                    </a:lnR>
+                    <a:lnT w="6350" cap="flat" cmpd="sng" algn="ctr">
+                      <a:solidFill>
+                        <a:srgbClr val="E6E8F0"/>
+                      </a:solidFill>
+                      <a:prstDash val="solid"/>
+                      <a:round/>
+                      <a:headEnd type="none" w="med" len="med"/>
+                      <a:tailEnd type="none" w="med" len="med"/>
+                    </a:lnT>
+                    <a:lnB w="6350" cap="flat" cmpd="sng" algn="ctr">
+                      <a:solidFill>
+                        <a:srgbClr val="E6E8F0"/>
+                      </a:solidFill>
+                      <a:prstDash val="solid"/>
+                      <a:round/>
+                      <a:headEnd type="none" w="med" len="med"/>
+                      <a:tailEnd type="none" w="med" len="med"/>
+                    </a:lnB>
+                    <a:solidFill>
+                      <a:srgbClr val="FFFFFF"/>
+                    </a:solidFill>
+                  </a:tcPr>
+                </a:tc>
+                <a:tc>
+                  <a:txBody>
+                    <a:bodyPr/>
+                    <a:lstStyle/>
+                    <a:p>
+                      <a:pPr algn="ctr" indent="0" marL="0">
+                        <a:buNone/>
+                      </a:pPr>
+                      <a:r>
+                        <a:rPr lang="en-US" sz="1250" b="1" dirty="0">
+                          <a:solidFill>
+                            <a:srgbClr val="16A34A"/>
+                          </a:solidFill>
+                          <a:latin typeface="Calibri" pitchFamily="34" charset="0"/>
+                          <a:ea typeface="Calibri" pitchFamily="34" charset="-122"/>
+                          <a:cs typeface="Calibri" pitchFamily="34" charset="-120"/>
+                        </a:rPr>
+                        <a:t>91%</a:t>
+                      </a:r>
+                      <a:endParaRPr lang="en-US" sz="1250" dirty="0">
+                        <a:latin typeface="Calibri" charset="0"/>
+                        <a:ea typeface="Calibri" charset="0"/>
+                        <a:cs typeface="Calibri" charset="0"/>
+                      </a:endParaRPr>
+                    </a:p>
+                  </a:txBody>
+                  <a:tcPr marL="101600" marR="101600" marT="25400" marB="25400" anchor="ctr">
+                    <a:lnL w="6350" cap="flat" cmpd="sng" algn="ctr">
+                      <a:solidFill>
+                        <a:srgbClr val="E6E8F0"/>
+                      </a:solidFill>
+                      <a:prstDash val="solid"/>
+                      <a:round/>
+                      <a:headEnd type="none" w="med" len="med"/>
+                      <a:tailEnd type="none" w="med" len="med"/>
+                    </a:lnL>
+                    <a:lnR w="6350" cap="flat" cmpd="sng" algn="ctr">
+                      <a:solidFill>
+                        <a:srgbClr val="E6E8F0"/>
+                      </a:solidFill>
+                      <a:prstDash val="solid"/>
+                      <a:round/>
+                      <a:headEnd type="none" w="med" len="med"/>
+                      <a:tailEnd type="none" w="med" len="med"/>
+                    </a:lnR>
+                    <a:lnT w="6350" cap="flat" cmpd="sng" algn="ctr">
+                      <a:solidFill>
+                        <a:srgbClr val="E6E8F0"/>
+                      </a:solidFill>
+                      <a:prstDash val="solid"/>
+                      <a:round/>
+                      <a:headEnd type="none" w="med" len="med"/>
+                      <a:tailEnd type="none" w="med" len="med"/>
+                    </a:lnT>
+                    <a:lnB w="6350" cap="flat" cmpd="sng" algn="ctr">
+                      <a:solidFill>
+                        <a:srgbClr val="E6E8F0"/>
+                      </a:solidFill>
+                      <a:prstDash val="solid"/>
+                      <a:round/>
+                      <a:headEnd type="none" w="med" len="med"/>
+                      <a:tailEnd type="none" w="med" len="med"/>
+                    </a:lnB>
+                    <a:solidFill>
+                      <a:srgbClr val="FFFFFF"/>
+                    </a:solidFill>
+                  </a:tcPr>
+                </a:tc>
+              </a:tr>
+              <a:tr h="548640">
+                <a:tc>
+                  <a:txBody>
+                    <a:bodyPr/>
+                    <a:lstStyle/>
+                    <a:p>
+                      <a:pPr algn="l" indent="0" marL="0">
+                        <a:buNone/>
+                      </a:pPr>
+                      <a:r>
+                        <a:rPr lang="en-US" sz="1250" b="1" dirty="0">
+                          <a:solidFill>
+                            <a:srgbClr val="12132A"/>
+                          </a:solidFill>
+                          <a:latin typeface="Calibri" pitchFamily="34" charset="0"/>
+                          <a:ea typeface="Calibri" pitchFamily="34" charset="-122"/>
+                          <a:cs typeface="Calibri" pitchFamily="34" charset="-120"/>
+                        </a:rPr>
+                        <a:t>Interview questions</a:t>
+                      </a:r>
+                      <a:endParaRPr lang="en-US" sz="1250" dirty="0">
+                        <a:latin typeface="Calibri" charset="0"/>
+                        <a:ea typeface="Calibri" charset="0"/>
+                        <a:cs typeface="Calibri" charset="0"/>
+                      </a:endParaRPr>
+                    </a:p>
+                  </a:txBody>
+                  <a:tcPr marL="101600" marR="101600" marT="25400" marB="25400" anchor="ctr">
+                    <a:lnL w="6350" cap="flat" cmpd="sng" algn="ctr">
+                      <a:solidFill>
+                        <a:srgbClr val="E6E8F0"/>
+                      </a:solidFill>
+                      <a:prstDash val="solid"/>
+                      <a:round/>
+                      <a:headEnd type="none" w="med" len="med"/>
+                      <a:tailEnd type="none" w="med" len="med"/>
+                    </a:lnL>
+                    <a:lnR w="6350" cap="flat" cmpd="sng" algn="ctr">
+                      <a:solidFill>
+                        <a:srgbClr val="E6E8F0"/>
+                      </a:solidFill>
+                      <a:prstDash val="solid"/>
+                      <a:round/>
+                      <a:headEnd type="none" w="med" len="med"/>
+                      <a:tailEnd type="none" w="med" len="med"/>
+                    </a:lnR>
+                    <a:lnT w="6350" cap="flat" cmpd="sng" algn="ctr">
+                      <a:solidFill>
+                        <a:srgbClr val="E6E8F0"/>
+                      </a:solidFill>
+                      <a:prstDash val="solid"/>
+                      <a:round/>
+                      <a:headEnd type="none" w="med" len="med"/>
+                      <a:tailEnd type="none" w="med" len="med"/>
+                    </a:lnT>
+                    <a:lnB w="6350" cap="flat" cmpd="sng" algn="ctr">
+                      <a:solidFill>
+                        <a:srgbClr val="E6E8F0"/>
+                      </a:solidFill>
+                      <a:prstDash val="solid"/>
+                      <a:round/>
+                      <a:headEnd type="none" w="med" len="med"/>
+                      <a:tailEnd type="none" w="med" len="med"/>
+                    </a:lnB>
+                    <a:solidFill>
+                      <a:srgbClr val="F5F7FE"/>
+                    </a:solidFill>
+                  </a:tcPr>
+                </a:tc>
+                <a:tc>
+                  <a:txBody>
+                    <a:bodyPr/>
+                    <a:lstStyle/>
+                    <a:p>
+                      <a:pPr algn="r" indent="0" marL="0">
+                        <a:buNone/>
+                      </a:pPr>
+                      <a:r>
+                        <a:rPr lang="en-US" sz="1250" dirty="0">
+                          <a:solidFill>
+                            <a:srgbClr val="4A5568"/>
+                          </a:solidFill>
+                          <a:latin typeface="Calibri" pitchFamily="34" charset="0"/>
+                          <a:ea typeface="Calibri" pitchFamily="34" charset="-122"/>
+                          <a:cs typeface="Calibri" pitchFamily="34" charset="-120"/>
+                        </a:rPr>
+                        <a:t>RM0.37</a:t>
+                      </a:r>
+                      <a:endParaRPr lang="en-US" sz="1250" dirty="0">
+                        <a:latin typeface="Calibri" charset="0"/>
+                        <a:ea typeface="Calibri" charset="0"/>
+                        <a:cs typeface="Calibri" charset="0"/>
+                      </a:endParaRPr>
+                    </a:p>
+                  </a:txBody>
+                  <a:tcPr marL="101600" marR="101600" marT="25400" marB="25400" anchor="ctr">
+                    <a:lnL w="6350" cap="flat" cmpd="sng" algn="ctr">
+                      <a:solidFill>
+                        <a:srgbClr val="E6E8F0"/>
+                      </a:solidFill>
+                      <a:prstDash val="solid"/>
+                      <a:round/>
+                      <a:headEnd type="none" w="med" len="med"/>
+                      <a:tailEnd type="none" w="med" len="med"/>
+                    </a:lnL>
+                    <a:lnR w="6350" cap="flat" cmpd="sng" algn="ctr">
+                      <a:solidFill>
+                        <a:srgbClr val="E6E8F0"/>
+                      </a:solidFill>
+                      <a:prstDash val="solid"/>
+                      <a:round/>
+                      <a:headEnd type="none" w="med" len="med"/>
+                      <a:tailEnd type="none" w="med" len="med"/>
+                    </a:lnR>
+                    <a:lnT w="6350" cap="flat" cmpd="sng" algn="ctr">
+                      <a:solidFill>
+                        <a:srgbClr val="E6E8F0"/>
+                      </a:solidFill>
+                      <a:prstDash val="solid"/>
+                      <a:round/>
+                      <a:headEnd type="none" w="med" len="med"/>
+                      <a:tailEnd type="none" w="med" len="med"/>
+                    </a:lnT>
+                    <a:lnB w="6350" cap="flat" cmpd="sng" algn="ctr">
+                      <a:solidFill>
+                        <a:srgbClr val="E6E8F0"/>
+                      </a:solidFill>
+                      <a:prstDash val="solid"/>
+                      <a:round/>
+                      <a:headEnd type="none" w="med" len="med"/>
+                      <a:tailEnd type="none" w="med" len="med"/>
+                    </a:lnB>
+                    <a:solidFill>
+                      <a:srgbClr val="F5F7FE"/>
+                    </a:solidFill>
+                  </a:tcPr>
+                </a:tc>
+                <a:tc>
+                  <a:txBody>
+                    <a:bodyPr/>
+                    <a:lstStyle/>
+                    <a:p>
+                      <a:pPr algn="r" indent="0" marL="0">
+                        <a:buNone/>
+                      </a:pPr>
+                      <a:r>
+                        <a:rPr lang="en-US" sz="1250" dirty="0">
+                          <a:solidFill>
+                            <a:srgbClr val="4A5568"/>
+                          </a:solidFill>
+                          <a:latin typeface="Calibri" pitchFamily="34" charset="0"/>
+                          <a:ea typeface="Calibri" pitchFamily="34" charset="-122"/>
+                          <a:cs typeface="Calibri" pitchFamily="34" charset="-120"/>
+                        </a:rPr>
+                        <a:t>RM0.07</a:t>
+                      </a:r>
+                      <a:endParaRPr lang="en-US" sz="1250" dirty="0">
+                        <a:latin typeface="Calibri" charset="0"/>
+                        <a:ea typeface="Calibri" charset="0"/>
+                        <a:cs typeface="Calibri" charset="0"/>
+                      </a:endParaRPr>
+                    </a:p>
+                  </a:txBody>
+                  <a:tcPr marL="101600" marR="101600" marT="25400" marB="25400" anchor="ctr">
+                    <a:lnL w="6350" cap="flat" cmpd="sng" algn="ctr">
+                      <a:solidFill>
+                        <a:srgbClr val="E6E8F0"/>
+                      </a:solidFill>
+                      <a:prstDash val="solid"/>
+                      <a:round/>
+                      <a:headEnd type="none" w="med" len="med"/>
+                      <a:tailEnd type="none" w="med" len="med"/>
+                    </a:lnL>
+                    <a:lnR w="6350" cap="flat" cmpd="sng" algn="ctr">
+                      <a:solidFill>
+                        <a:srgbClr val="E6E8F0"/>
+                      </a:solidFill>
+                      <a:prstDash val="solid"/>
+                      <a:round/>
+                      <a:headEnd type="none" w="med" len="med"/>
+                      <a:tailEnd type="none" w="med" len="med"/>
+                    </a:lnR>
+                    <a:lnT w="6350" cap="flat" cmpd="sng" algn="ctr">
+                      <a:solidFill>
+                        <a:srgbClr val="E6E8F0"/>
+                      </a:solidFill>
+                      <a:prstDash val="solid"/>
+                      <a:round/>
+                      <a:headEnd type="none" w="med" len="med"/>
+                      <a:tailEnd type="none" w="med" len="med"/>
+                    </a:lnT>
+                    <a:lnB w="6350" cap="flat" cmpd="sng" algn="ctr">
+                      <a:solidFill>
+                        <a:srgbClr val="E6E8F0"/>
+                      </a:solidFill>
+                      <a:prstDash val="solid"/>
+                      <a:round/>
+                      <a:headEnd type="none" w="med" len="med"/>
+                      <a:tailEnd type="none" w="med" len="med"/>
+                    </a:lnB>
+                    <a:solidFill>
+                      <a:srgbClr val="F5F7FE"/>
+                    </a:solidFill>
+                  </a:tcPr>
+                </a:tc>
+                <a:tc>
+                  <a:txBody>
+                    <a:bodyPr/>
+                    <a:lstStyle/>
+                    <a:p>
+                      <a:pPr algn="ctr" indent="0" marL="0">
+                        <a:buNone/>
+                      </a:pPr>
+                      <a:r>
+                        <a:rPr lang="en-US" sz="1250" b="1" dirty="0">
+                          <a:solidFill>
+                            <a:srgbClr val="16A34A"/>
+                          </a:solidFill>
+                          <a:latin typeface="Calibri" pitchFamily="34" charset="0"/>
+                          <a:ea typeface="Calibri" pitchFamily="34" charset="-122"/>
+                          <a:cs typeface="Calibri" pitchFamily="34" charset="-120"/>
+                        </a:rPr>
+                        <a:t>81%</a:t>
+                      </a:r>
+                      <a:endParaRPr lang="en-US" sz="1250" dirty="0">
+                        <a:latin typeface="Calibri" charset="0"/>
+                        <a:ea typeface="Calibri" charset="0"/>
+                        <a:cs typeface="Calibri" charset="0"/>
+                      </a:endParaRPr>
+                    </a:p>
+                  </a:txBody>
+                  <a:tcPr marL="101600" marR="101600" marT="25400" marB="25400" anchor="ctr">
+                    <a:lnL w="6350" cap="flat" cmpd="sng" algn="ctr">
+                      <a:solidFill>
+                        <a:srgbClr val="E6E8F0"/>
+                      </a:solidFill>
+                      <a:prstDash val="solid"/>
+                      <a:round/>
+                      <a:headEnd type="none" w="med" len="med"/>
+                      <a:tailEnd type="none" w="med" len="med"/>
+                    </a:lnL>
+                    <a:lnR w="6350" cap="flat" cmpd="sng" algn="ctr">
+                      <a:solidFill>
+                        <a:srgbClr val="E6E8F0"/>
+                      </a:solidFill>
+                      <a:prstDash val="solid"/>
+                      <a:round/>
+                      <a:headEnd type="none" w="med" len="med"/>
+                      <a:tailEnd type="none" w="med" len="med"/>
+                    </a:lnR>
+                    <a:lnT w="6350" cap="flat" cmpd="sng" algn="ctr">
+                      <a:solidFill>
+                        <a:srgbClr val="E6E8F0"/>
+                      </a:solidFill>
+                      <a:prstDash val="solid"/>
+                      <a:round/>
+                      <a:headEnd type="none" w="med" len="med"/>
+                      <a:tailEnd type="none" w="med" len="med"/>
+                    </a:lnT>
+                    <a:lnB w="6350" cap="flat" cmpd="sng" algn="ctr">
+                      <a:solidFill>
+                        <a:srgbClr val="E6E8F0"/>
+                      </a:solidFill>
+                      <a:prstDash val="solid"/>
+                      <a:round/>
+                      <a:headEnd type="none" w="med" len="med"/>
+                      <a:tailEnd type="none" w="med" len="med"/>
+                    </a:lnB>
+                    <a:solidFill>
+                      <a:srgbClr val="F5F7FE"/>
+                    </a:solidFill>
+                  </a:tcPr>
+                </a:tc>
+              </a:tr>
+              <a:tr h="548640">
+                <a:tc>
+                  <a:txBody>
+                    <a:bodyPr/>
+                    <a:lstStyle/>
+                    <a:p>
+                      <a:pPr algn="l" indent="0" marL="0">
+                        <a:buNone/>
+                      </a:pPr>
+                      <a:r>
+                        <a:rPr lang="en-US" sz="1250" b="1" dirty="0">
+                          <a:solidFill>
+                            <a:srgbClr val="12132A"/>
+                          </a:solidFill>
+                          <a:latin typeface="Calibri" pitchFamily="34" charset="0"/>
+                          <a:ea typeface="Calibri" pitchFamily="34" charset="-122"/>
+                          <a:cs typeface="Calibri" pitchFamily="34" charset="-120"/>
+                        </a:rPr>
+                        <a:t>Job draft</a:t>
+                      </a:r>
+                      <a:endParaRPr lang="en-US" sz="1250" dirty="0">
+                        <a:latin typeface="Calibri" charset="0"/>
+                        <a:ea typeface="Calibri" charset="0"/>
+                        <a:cs typeface="Calibri" charset="0"/>
+                      </a:endParaRPr>
+                    </a:p>
+                  </a:txBody>
+                  <a:tcPr marL="101600" marR="101600" marT="25400" marB="25400" anchor="ctr">
+                    <a:lnL w="6350" cap="flat" cmpd="sng" algn="ctr">
+                      <a:solidFill>
+                        <a:srgbClr val="E6E8F0"/>
+                      </a:solidFill>
+                      <a:prstDash val="solid"/>
+                      <a:round/>
+                      <a:headEnd type="none" w="med" len="med"/>
+                      <a:tailEnd type="none" w="med" len="med"/>
+                    </a:lnL>
+                    <a:lnR w="6350" cap="flat" cmpd="sng" algn="ctr">
+                      <a:solidFill>
+                        <a:srgbClr val="E6E8F0"/>
+                      </a:solidFill>
+                      <a:prstDash val="solid"/>
+                      <a:round/>
+                      <a:headEnd type="none" w="med" len="med"/>
+                      <a:tailEnd type="none" w="med" len="med"/>
+                    </a:lnR>
+                    <a:lnT w="6350" cap="flat" cmpd="sng" algn="ctr">
+                      <a:solidFill>
+                        <a:srgbClr val="E6E8F0"/>
+                      </a:solidFill>
+                      <a:prstDash val="solid"/>
+                      <a:round/>
+                      <a:headEnd type="none" w="med" len="med"/>
+                      <a:tailEnd type="none" w="med" len="med"/>
+                    </a:lnT>
+                    <a:lnB w="6350" cap="flat" cmpd="sng" algn="ctr">
+                      <a:solidFill>
+                        <a:srgbClr val="E6E8F0"/>
+                      </a:solidFill>
+                      <a:prstDash val="solid"/>
+                      <a:round/>
+                      <a:headEnd type="none" w="med" len="med"/>
+                      <a:tailEnd type="none" w="med" len="med"/>
+                    </a:lnB>
+                    <a:solidFill>
+                      <a:srgbClr val="FFFFFF"/>
+                    </a:solidFill>
+                  </a:tcPr>
+                </a:tc>
+                <a:tc>
+                  <a:txBody>
+                    <a:bodyPr/>
+                    <a:lstStyle/>
+                    <a:p>
+                      <a:pPr algn="r" indent="0" marL="0">
+                        <a:buNone/>
+                      </a:pPr>
+                      <a:r>
+                        <a:rPr lang="en-US" sz="1250" dirty="0">
+                          <a:solidFill>
+                            <a:srgbClr val="4A5568"/>
+                          </a:solidFill>
+                          <a:latin typeface="Calibri" pitchFamily="34" charset="0"/>
+                          <a:ea typeface="Calibri" pitchFamily="34" charset="-122"/>
+                          <a:cs typeface="Calibri" pitchFamily="34" charset="-120"/>
+                        </a:rPr>
+                        <a:t>RM2.25</a:t>
+                      </a:r>
+                      <a:endParaRPr lang="en-US" sz="1250" dirty="0">
+                        <a:latin typeface="Calibri" charset="0"/>
+                        <a:ea typeface="Calibri" charset="0"/>
+                        <a:cs typeface="Calibri" charset="0"/>
+                      </a:endParaRPr>
+                    </a:p>
+                  </a:txBody>
+                  <a:tcPr marL="101600" marR="101600" marT="25400" marB="25400" anchor="ctr">
+                    <a:lnL w="6350" cap="flat" cmpd="sng" algn="ctr">
+                      <a:solidFill>
+                        <a:srgbClr val="E6E8F0"/>
+                      </a:solidFill>
+                      <a:prstDash val="solid"/>
+                      <a:round/>
+                      <a:headEnd type="none" w="med" len="med"/>
+                      <a:tailEnd type="none" w="med" len="med"/>
+                    </a:lnL>
+                    <a:lnR w="6350" cap="flat" cmpd="sng" algn="ctr">
+                      <a:solidFill>
+                        <a:srgbClr val="E6E8F0"/>
+                      </a:solidFill>
+                      <a:prstDash val="solid"/>
+                      <a:round/>
+                      <a:headEnd type="none" w="med" len="med"/>
+                      <a:tailEnd type="none" w="med" len="med"/>
+                    </a:lnR>
+                    <a:lnT w="6350" cap="flat" cmpd="sng" algn="ctr">
+                      <a:solidFill>
+                        <a:srgbClr val="E6E8F0"/>
+                      </a:solidFill>
+                      <a:prstDash val="solid"/>
+                      <a:round/>
+                      <a:headEnd type="none" w="med" len="med"/>
+                      <a:tailEnd type="none" w="med" len="med"/>
+                    </a:lnT>
+                    <a:lnB w="6350" cap="flat" cmpd="sng" algn="ctr">
+                      <a:solidFill>
+                        <a:srgbClr val="E6E8F0"/>
+                      </a:solidFill>
+                      <a:prstDash val="solid"/>
+                      <a:round/>
+                      <a:headEnd type="none" w="med" len="med"/>
+                      <a:tailEnd type="none" w="med" len="med"/>
+                    </a:lnB>
+                    <a:solidFill>
+                      <a:srgbClr val="FFFFFF"/>
+                    </a:solidFill>
+                  </a:tcPr>
+                </a:tc>
+                <a:tc>
+                  <a:txBody>
+                    <a:bodyPr/>
+                    <a:lstStyle/>
+                    <a:p>
+                      <a:pPr algn="r" indent="0" marL="0">
+                        <a:buNone/>
+                      </a:pPr>
+                      <a:r>
+                        <a:rPr lang="en-US" sz="1250" dirty="0">
+                          <a:solidFill>
+                            <a:srgbClr val="4A5568"/>
+                          </a:solidFill>
+                          <a:latin typeface="Calibri" pitchFamily="34" charset="0"/>
+                          <a:ea typeface="Calibri" pitchFamily="34" charset="-122"/>
+                          <a:cs typeface="Calibri" pitchFamily="34" charset="-120"/>
+                        </a:rPr>
+                        <a:t>RM0.46</a:t>
+                      </a:r>
+                      <a:endParaRPr lang="en-US" sz="1250" dirty="0">
+                        <a:latin typeface="Calibri" charset="0"/>
+                        <a:ea typeface="Calibri" charset="0"/>
+                        <a:cs typeface="Calibri" charset="0"/>
+                      </a:endParaRPr>
+                    </a:p>
+                  </a:txBody>
+                  <a:tcPr marL="101600" marR="101600" marT="25400" marB="25400" anchor="ctr">
+                    <a:lnL w="6350" cap="flat" cmpd="sng" algn="ctr">
+                      <a:solidFill>
+                        <a:srgbClr val="E6E8F0"/>
+                      </a:solidFill>
+                      <a:prstDash val="solid"/>
+                      <a:round/>
+                      <a:headEnd type="none" w="med" len="med"/>
+                      <a:tailEnd type="none" w="med" len="med"/>
+                    </a:lnL>
+                    <a:lnR w="6350" cap="flat" cmpd="sng" algn="ctr">
+                      <a:solidFill>
+                        <a:srgbClr val="E6E8F0"/>
+                      </a:solidFill>
+                      <a:prstDash val="solid"/>
+                      <a:round/>
+                      <a:headEnd type="none" w="med" len="med"/>
+                      <a:tailEnd type="none" w="med" len="med"/>
+                    </a:lnR>
+                    <a:lnT w="6350" cap="flat" cmpd="sng" algn="ctr">
+                      <a:solidFill>
+                        <a:srgbClr val="E6E8F0"/>
+                      </a:solidFill>
+                      <a:prstDash val="solid"/>
+                      <a:round/>
+                      <a:headEnd type="none" w="med" len="med"/>
+                      <a:tailEnd type="none" w="med" len="med"/>
+                    </a:lnT>
+                    <a:lnB w="6350" cap="flat" cmpd="sng" algn="ctr">
+                      <a:solidFill>
+                        <a:srgbClr val="E6E8F0"/>
+                      </a:solidFill>
+                      <a:prstDash val="solid"/>
+                      <a:round/>
+                      <a:headEnd type="none" w="med" len="med"/>
+                      <a:tailEnd type="none" w="med" len="med"/>
+                    </a:lnB>
+                    <a:solidFill>
+                      <a:srgbClr val="FFFFFF"/>
+                    </a:solidFill>
+                  </a:tcPr>
+                </a:tc>
+                <a:tc>
+                  <a:txBody>
+                    <a:bodyPr/>
+                    <a:lstStyle/>
+                    <a:p>
+                      <a:pPr algn="ctr" indent="0" marL="0">
+                        <a:buNone/>
+                      </a:pPr>
+                      <a:r>
+                        <a:rPr lang="en-US" sz="1250" b="1" dirty="0">
+                          <a:solidFill>
+                            <a:srgbClr val="16A34A"/>
+                          </a:solidFill>
+                          <a:latin typeface="Calibri" pitchFamily="34" charset="0"/>
+                          <a:ea typeface="Calibri" pitchFamily="34" charset="-122"/>
+                          <a:cs typeface="Calibri" pitchFamily="34" charset="-120"/>
+                        </a:rPr>
+                        <a:t>80%</a:t>
+                      </a:r>
+                      <a:endParaRPr lang="en-US" sz="1250" dirty="0">
+                        <a:latin typeface="Calibri" charset="0"/>
+                        <a:ea typeface="Calibri" charset="0"/>
+                        <a:cs typeface="Calibri" charset="0"/>
+                      </a:endParaRPr>
+                    </a:p>
+                  </a:txBody>
+                  <a:tcPr marL="101600" marR="101600" marT="25400" marB="25400" anchor="ctr">
+                    <a:lnL w="6350" cap="flat" cmpd="sng" algn="ctr">
+                      <a:solidFill>
+                        <a:srgbClr val="E6E8F0"/>
+                      </a:solidFill>
+                      <a:prstDash val="solid"/>
+                      <a:round/>
+                      <a:headEnd type="none" w="med" len="med"/>
+                      <a:tailEnd type="none" w="med" len="med"/>
+                    </a:lnL>
+                    <a:lnR w="6350" cap="flat" cmpd="sng" algn="ctr">
+                      <a:solidFill>
+                        <a:srgbClr val="E6E8F0"/>
+                      </a:solidFill>
+                      <a:prstDash val="solid"/>
+                      <a:round/>
+                      <a:headEnd type="none" w="med" len="med"/>
+                      <a:tailEnd type="none" w="med" len="med"/>
+                    </a:lnR>
+                    <a:lnT w="6350" cap="flat" cmpd="sng" algn="ctr">
+                      <a:solidFill>
+                        <a:srgbClr val="E6E8F0"/>
+                      </a:solidFill>
+                      <a:prstDash val="solid"/>
+                      <a:round/>
+                      <a:headEnd type="none" w="med" len="med"/>
+                      <a:tailEnd type="none" w="med" len="med"/>
+                    </a:lnT>
+                    <a:lnB w="6350" cap="flat" cmpd="sng" algn="ctr">
+                      <a:solidFill>
+                        <a:srgbClr val="E6E8F0"/>
+                      </a:solidFill>
+                      <a:prstDash val="solid"/>
+                      <a:round/>
+                      <a:headEnd type="none" w="med" len="med"/>
+                      <a:tailEnd type="none" w="med" len="med"/>
+                    </a:lnB>
+                    <a:solidFill>
+                      <a:srgbClr val="FFFFFF"/>
+                    </a:solidFill>
+                  </a:tcPr>
+                </a:tc>
+              </a:tr>
+            </a:tbl>
+          </a:graphicData>
+        </a:graphic>
+      </p:graphicFrame>
+      <p:sp>
+        <p:nvSpPr>
+          <p:cNvPr id="6" name="Shape 3"/>
           <p:cNvSpPr/>
           <p:nvPr/>
         </p:nvSpPr>
         <p:spPr>
           <a:xfrm>
-            <a:off x="548640" y="2468880"/>
-            <a:ext cx="2651760" cy="2788920"/>
+            <a:off x="8412480" y="2286000"/>
+            <a:ext cx="3227832" cy="3291840"/>
           </a:xfrm>
           <a:prstGeom prst="roundRect">
             <a:avLst>
-              <a:gd name="adj" fmla="val 4138"/>
+              <a:gd name="adj" fmla="val 3399"/>
             </a:avLst>
           </a:prstGeom>
           <a:solidFill>
-            <a:srgbClr val="FFFFFF"/>
+            <a:srgbClr val="0B2AE0"/>
           </a:solidFill>
           <a:ln w="12700">
             <a:solidFill>
-              <a:srgbClr val="DEDEE3"/>
+              <a:srgbClr val="0B2AE0"/>
             </a:solidFill>
             <a:prstDash val="solid"/>
           </a:ln>
@@ -6338,14 +8014,14 @@
       </p:sp>
       <p:sp>
         <p:nvSpPr>
-          <p:cNvPr id="6" name="Text 4"/>
+          <p:cNvPr id="7" name="Text 4"/>
           <p:cNvSpPr/>
           <p:nvPr/>
         </p:nvSpPr>
         <p:spPr>
           <a:xfrm>
-            <a:off x="768096" y="2697480"/>
-            <a:ext cx="2249424" cy="457200"/>
+            <a:off x="8641080" y="2487168"/>
+            <a:ext cx="2743200" cy="274320"/>
           </a:xfrm>
           <a:prstGeom prst="rect">
             <a:avLst/>
@@ -6361,30 +8037,30 @@
               <a:buNone/>
             </a:pPr>
             <a:r>
-              <a:rPr lang="en-US" sz="1500" b="1" dirty="0">
+              <a:rPr lang="en-US" sz="1100" b="1" spc="150" kern="0" dirty="0">
                 <a:solidFill>
-                  <a:srgbClr val="12132A"/>
+                  <a:srgbClr val="CADCFC"/>
                 </a:solidFill>
                 <a:latin typeface="Calibri" pitchFamily="34" charset="0"/>
                 <a:ea typeface="Calibri" pitchFamily="34" charset="-122"/>
                 <a:cs typeface="Calibri" pitchFamily="34" charset="-120"/>
               </a:rPr>
-              <a:t>Screening</a:t>
+              <a:t>EVERY TOP-UP</a:t>
             </a:r>
-            <a:endParaRPr lang="en-US" sz="1500" dirty="0"/>
+            <a:endParaRPr lang="en-US" sz="1100" dirty="0"/>
           </a:p>
         </p:txBody>
       </p:sp>
       <p:sp>
         <p:nvSpPr>
-          <p:cNvPr id="7" name="Text 5"/>
+          <p:cNvPr id="8" name="Text 5"/>
           <p:cNvSpPr/>
           <p:nvPr/>
         </p:nvSpPr>
         <p:spPr>
           <a:xfrm>
-            <a:off x="768096" y="3218688"/>
-            <a:ext cx="2212848" cy="731520"/>
+            <a:off x="8641080" y="2788920"/>
+            <a:ext cx="2743200" cy="731520"/>
           </a:xfrm>
           <a:prstGeom prst="rect">
             <a:avLst/>
@@ -6402,13 +8078,13 @@
             <a:r>
               <a:rPr lang="en-US" sz="4000" b="1" dirty="0">
                 <a:solidFill>
-                  <a:srgbClr val="16A34A"/>
+                  <a:srgbClr val="FFFFFF"/>
                 </a:solidFill>
                 <a:latin typeface="Calibri" pitchFamily="34" charset="0"/>
                 <a:ea typeface="Calibri" pitchFamily="34" charset="-122"/>
                 <a:cs typeface="Calibri" pitchFamily="34" charset="-120"/>
               </a:rPr>
-              <a:t>78%</a:t>
+              <a:t>80–91%</a:t>
             </a:r>
             <a:endParaRPr lang="en-US" sz="4000" dirty="0"/>
           </a:p>
@@ -6416,14 +8092,14 @@
       </p:sp>
       <p:sp>
         <p:nvSpPr>
-          <p:cNvPr id="8" name="Text 6"/>
+          <p:cNvPr id="9" name="Text 6"/>
           <p:cNvSpPr/>
           <p:nvPr/>
         </p:nvSpPr>
         <p:spPr>
           <a:xfrm>
-            <a:off x="768096" y="3986784"/>
-            <a:ext cx="2212848" cy="274320"/>
+            <a:off x="8641080" y="3566160"/>
+            <a:ext cx="2743200" cy="274320"/>
           </a:xfrm>
           <a:prstGeom prst="rect">
             <a:avLst/>
@@ -6439,30 +8115,30 @@
               <a:buNone/>
             </a:pPr>
             <a:r>
-              <a:rPr lang="en-US" sz="1050" dirty="0">
+              <a:rPr lang="en-US" sz="1300" dirty="0">
                 <a:solidFill>
-                  <a:srgbClr val="6B7280"/>
+                  <a:srgbClr val="CADCFC"/>
                 </a:solidFill>
                 <a:latin typeface="Calibri" pitchFamily="34" charset="0"/>
                 <a:ea typeface="Calibri" pitchFamily="34" charset="-122"/>
                 <a:cs typeface="Calibri" pitchFamily="34" charset="-120"/>
               </a:rPr>
-              <a:t>gross margin at list</a:t>
+              <a:t>gross margin</a:t>
             </a:r>
-            <a:endParaRPr lang="en-US" sz="1050" dirty="0"/>
+            <a:endParaRPr lang="en-US" sz="1300" dirty="0"/>
           </a:p>
         </p:txBody>
       </p:sp>
       <p:sp>
         <p:nvSpPr>
-          <p:cNvPr id="9" name="Shape 7"/>
+          <p:cNvPr id="10" name="Shape 7"/>
           <p:cNvSpPr/>
           <p:nvPr/>
         </p:nvSpPr>
         <p:spPr>
           <a:xfrm>
-            <a:off x="768096" y="4352544"/>
-            <a:ext cx="2212848" cy="0"/>
+            <a:off x="8641080" y="4005072"/>
+            <a:ext cx="2788920" cy="0"/>
           </a:xfrm>
           <a:prstGeom prst="line">
             <a:avLst/>
@@ -6470,7 +8146,7 @@
           <a:noFill/>
           <a:ln w="12700">
             <a:solidFill>
-              <a:srgbClr val="DEDEE3"/>
+              <a:srgbClr val="3550EE"/>
             </a:solidFill>
             <a:prstDash val="solid"/>
           </a:ln>
@@ -6478,14 +8154,14 @@
       </p:sp>
       <p:sp>
         <p:nvSpPr>
-          <p:cNvPr id="10" name="Text 8"/>
+          <p:cNvPr id="11" name="Text 8"/>
           <p:cNvSpPr/>
           <p:nvPr/>
         </p:nvSpPr>
         <p:spPr>
           <a:xfrm>
-            <a:off x="768096" y="4462272"/>
-            <a:ext cx="2249424" cy="640080"/>
+            <a:off x="8641080" y="4160520"/>
+            <a:ext cx="2788920" cy="1280160"/>
           </a:xfrm>
           <a:prstGeom prst="rect">
             <a:avLst/>
@@ -6498,90 +8174,18 @@
           <a:lstStyle/>
           <a:p>
             <a:pPr algn="l" indent="0" marL="0">
-              <a:lnSpc>
-                <a:spcPct val="110000"/>
-              </a:lnSpc>
               <a:buNone/>
             </a:pPr>
             <a:r>
               <a:rPr lang="en-US" sz="1250" dirty="0">
                 <a:solidFill>
-                  <a:srgbClr val="4A5568"/>
+                  <a:srgbClr val="CADCFC"/>
                 </a:solidFill>
                 <a:latin typeface="Calibri" pitchFamily="34" charset="0"/>
                 <a:ea typeface="Calibri" pitchFamily="34" charset="-122"/>
                 <a:cs typeface="Calibri" pitchFamily="34" charset="-120"/>
               </a:rPr>
-              <a:t>Price </a:t>
-            </a:r>
-            <a:pPr algn="l" indent="0" marL="0">
-              <a:lnSpc>
-                <a:spcPct val="110000"/>
-              </a:lnSpc>
-              <a:buNone/>
-            </a:pPr>
-            <a:r>
-              <a:rPr lang="en-US" sz="1250" b="1" dirty="0">
-                <a:solidFill>
-                  <a:srgbClr val="12132A"/>
-                </a:solidFill>
-                <a:latin typeface="Calibri" pitchFamily="34" charset="0"/>
-                <a:ea typeface="Calibri" pitchFamily="34" charset="-122"/>
-                <a:cs typeface="Calibri" pitchFamily="34" charset="-120"/>
-              </a:rPr>
-              <a:t>RM2.85</a:t>
-            </a:r>
-            <a:pPr algn="l" indent="0" marL="0">
-              <a:lnSpc>
-                <a:spcPct val="110000"/>
-              </a:lnSpc>
-              <a:buNone/>
-            </a:pPr>
-            <a:r>
-              <a:rPr lang="en-US" sz="1250" dirty="0">
-                <a:solidFill>
-                  <a:srgbClr val="000000"/>
-                </a:solidFill>
-                <a:latin typeface="Calibri" pitchFamily="34" charset="0"/>
-                <a:ea typeface="Calibri" pitchFamily="34" charset="-122"/>
-                <a:cs typeface="Calibri" pitchFamily="34" charset="-120"/>
-              </a:rPr>
-              <a:t>
-</a:t>
-            </a:r>
-            <a:pPr algn="l" indent="0" marL="0">
-              <a:lnSpc>
-                <a:spcPct val="110000"/>
-              </a:lnSpc>
-              <a:buNone/>
-            </a:pPr>
-            <a:r>
-              <a:rPr lang="en-US" sz="1250" dirty="0">
-                <a:solidFill>
-                  <a:srgbClr val="4A5568"/>
-                </a:solidFill>
-                <a:latin typeface="Calibri" pitchFamily="34" charset="0"/>
-                <a:ea typeface="Calibri" pitchFamily="34" charset="-122"/>
-                <a:cs typeface="Calibri" pitchFamily="34" charset="-120"/>
-              </a:rPr>
-              <a:t>Cost </a:t>
-            </a:r>
-            <a:pPr algn="l" indent="0" marL="0">
-              <a:lnSpc>
-                <a:spcPct val="110000"/>
-              </a:lnSpc>
-              <a:buNone/>
-            </a:pPr>
-            <a:r>
-              <a:rPr lang="en-US" sz="1250" b="1" dirty="0">
-                <a:solidFill>
-                  <a:srgbClr val="12132A"/>
-                </a:solidFill>
-                <a:latin typeface="Calibri" pitchFamily="34" charset="0"/>
-                <a:ea typeface="Calibri" pitchFamily="34" charset="-122"/>
-                <a:cs typeface="Calibri" pitchFamily="34" charset="-120"/>
-              </a:rPr>
-              <a:t>RM0.64</a:t>
+              <a:t>The 10% partner share is not charged on top-ups, so credit sales carry the fattest margin of any revenue line.</a:t>
             </a:r>
             <a:endParaRPr lang="en-US" sz="1250" dirty="0"/>
           </a:p>
@@ -6589,868 +8193,13 @@
       </p:sp>
       <p:sp>
         <p:nvSpPr>
-          <p:cNvPr id="11" name="Shape 9"/>
+          <p:cNvPr id="12" name="Text 9"/>
           <p:cNvSpPr/>
           <p:nvPr/>
         </p:nvSpPr>
         <p:spPr>
           <a:xfrm>
-            <a:off x="3392424" y="2468880"/>
-            <a:ext cx="2651760" cy="2788920"/>
-          </a:xfrm>
-          <a:prstGeom prst="roundRect">
-            <a:avLst>
-              <a:gd name="adj" fmla="val 4138"/>
-            </a:avLst>
-          </a:prstGeom>
-          <a:solidFill>
-            <a:srgbClr val="FFFFFF"/>
-          </a:solidFill>
-          <a:ln w="12700">
-            <a:solidFill>
-              <a:srgbClr val="DEDEE3"/>
-            </a:solidFill>
-            <a:prstDash val="solid"/>
-          </a:ln>
-          <a:effectLst>
-            <a:outerShdw sx="100000" sy="100000" kx="0" ky="0" algn="bl" rotWithShape="0" blurRad="101600" dist="25400" dir="5400000">
-              <a:srgbClr val="9AA0B5">
-                <a:alpha val="18000"/>
-              </a:srgbClr>
-            </a:outerShdw>
-          </a:effectLst>
-        </p:spPr>
-      </p:sp>
-      <p:sp>
-        <p:nvSpPr>
-          <p:cNvPr id="12" name="Text 10"/>
-          <p:cNvSpPr/>
-          <p:nvPr/>
-        </p:nvSpPr>
-        <p:spPr>
-          <a:xfrm>
-            <a:off x="3611880" y="2697480"/>
-            <a:ext cx="2249424" cy="457200"/>
-          </a:xfrm>
-          <a:prstGeom prst="rect">
-            <a:avLst/>
-          </a:prstGeom>
-          <a:noFill/>
-          <a:ln/>
-        </p:spPr>
-        <p:txBody>
-          <a:bodyPr wrap="square" lIns="0" tIns="0" rIns="0" bIns="0" rtlCol="0" anchor="ctr"/>
-          <a:lstStyle/>
-          <a:p>
-            <a:pPr algn="l" indent="0" marL="0">
-              <a:buNone/>
-            </a:pPr>
-            <a:r>
-              <a:rPr lang="en-US" sz="1500" b="1" dirty="0">
-                <a:solidFill>
-                  <a:srgbClr val="12132A"/>
-                </a:solidFill>
-                <a:latin typeface="Calibri" pitchFamily="34" charset="0"/>
-                <a:ea typeface="Calibri" pitchFamily="34" charset="-122"/>
-                <a:cs typeface="Calibri" pitchFamily="34" charset="-120"/>
-              </a:rPr>
-              <a:t>AI Rank</a:t>
-            </a:r>
-            <a:endParaRPr lang="en-US" sz="1500" dirty="0"/>
-          </a:p>
-        </p:txBody>
-      </p:sp>
-      <p:sp>
-        <p:nvSpPr>
-          <p:cNvPr id="13" name="Text 11"/>
-          <p:cNvSpPr/>
-          <p:nvPr/>
-        </p:nvSpPr>
-        <p:spPr>
-          <a:xfrm>
-            <a:off x="3611880" y="3218688"/>
-            <a:ext cx="2212848" cy="731520"/>
-          </a:xfrm>
-          <a:prstGeom prst="rect">
-            <a:avLst/>
-          </a:prstGeom>
-          <a:noFill/>
-          <a:ln/>
-        </p:spPr>
-        <p:txBody>
-          <a:bodyPr wrap="square" lIns="0" tIns="0" rIns="0" bIns="0" rtlCol="0" anchor="ctr"/>
-          <a:lstStyle/>
-          <a:p>
-            <a:pPr algn="l" indent="0" marL="0">
-              <a:buNone/>
-            </a:pPr>
-            <a:r>
-              <a:rPr lang="en-US" sz="4000" b="1" dirty="0">
-                <a:solidFill>
-                  <a:srgbClr val="16A34A"/>
-                </a:solidFill>
-                <a:latin typeface="Calibri" pitchFamily="34" charset="0"/>
-                <a:ea typeface="Calibri" pitchFamily="34" charset="-122"/>
-                <a:cs typeface="Calibri" pitchFamily="34" charset="-120"/>
-              </a:rPr>
-              <a:t>75%</a:t>
-            </a:r>
-            <a:endParaRPr lang="en-US" sz="4000" dirty="0"/>
-          </a:p>
-        </p:txBody>
-      </p:sp>
-      <p:sp>
-        <p:nvSpPr>
-          <p:cNvPr id="14" name="Text 12"/>
-          <p:cNvSpPr/>
-          <p:nvPr/>
-        </p:nvSpPr>
-        <p:spPr>
-          <a:xfrm>
-            <a:off x="3611880" y="3986784"/>
-            <a:ext cx="2212848" cy="274320"/>
-          </a:xfrm>
-          <a:prstGeom prst="rect">
-            <a:avLst/>
-          </a:prstGeom>
-          <a:noFill/>
-          <a:ln/>
-        </p:spPr>
-        <p:txBody>
-          <a:bodyPr wrap="square" lIns="0" tIns="0" rIns="0" bIns="0" rtlCol="0" anchor="ctr"/>
-          <a:lstStyle/>
-          <a:p>
-            <a:pPr algn="l" indent="0" marL="0">
-              <a:buNone/>
-            </a:pPr>
-            <a:r>
-              <a:rPr lang="en-US" sz="1050" dirty="0">
-                <a:solidFill>
-                  <a:srgbClr val="6B7280"/>
-                </a:solidFill>
-                <a:latin typeface="Calibri" pitchFamily="34" charset="0"/>
-                <a:ea typeface="Calibri" pitchFamily="34" charset="-122"/>
-                <a:cs typeface="Calibri" pitchFamily="34" charset="-120"/>
-              </a:rPr>
-              <a:t>gross margin at list</a:t>
-            </a:r>
-            <a:endParaRPr lang="en-US" sz="1050" dirty="0"/>
-          </a:p>
-        </p:txBody>
-      </p:sp>
-      <p:sp>
-        <p:nvSpPr>
-          <p:cNvPr id="15" name="Shape 13"/>
-          <p:cNvSpPr/>
-          <p:nvPr/>
-        </p:nvSpPr>
-        <p:spPr>
-          <a:xfrm>
-            <a:off x="3611880" y="4352544"/>
-            <a:ext cx="2212848" cy="0"/>
-          </a:xfrm>
-          <a:prstGeom prst="line">
-            <a:avLst/>
-          </a:prstGeom>
-          <a:noFill/>
-          <a:ln w="12700">
-            <a:solidFill>
-              <a:srgbClr val="DEDEE3"/>
-            </a:solidFill>
-            <a:prstDash val="solid"/>
-          </a:ln>
-        </p:spPr>
-      </p:sp>
-      <p:sp>
-        <p:nvSpPr>
-          <p:cNvPr id="16" name="Text 14"/>
-          <p:cNvSpPr/>
-          <p:nvPr/>
-        </p:nvSpPr>
-        <p:spPr>
-          <a:xfrm>
-            <a:off x="3611880" y="4462272"/>
-            <a:ext cx="2249424" cy="640080"/>
-          </a:xfrm>
-          <a:prstGeom prst="rect">
-            <a:avLst/>
-          </a:prstGeom>
-          <a:noFill/>
-          <a:ln/>
-        </p:spPr>
-        <p:txBody>
-          <a:bodyPr wrap="square" lIns="0" tIns="0" rIns="0" bIns="0" rtlCol="0" anchor="t"/>
-          <a:lstStyle/>
-          <a:p>
-            <a:pPr algn="l" indent="0" marL="0">
-              <a:lnSpc>
-                <a:spcPct val="110000"/>
-              </a:lnSpc>
-              <a:buNone/>
-            </a:pPr>
-            <a:r>
-              <a:rPr lang="en-US" sz="1250" dirty="0">
-                <a:solidFill>
-                  <a:srgbClr val="4A5568"/>
-                </a:solidFill>
-                <a:latin typeface="Calibri" pitchFamily="34" charset="0"/>
-                <a:ea typeface="Calibri" pitchFamily="34" charset="-122"/>
-                <a:cs typeface="Calibri" pitchFamily="34" charset="-120"/>
-              </a:rPr>
-              <a:t>Price </a:t>
-            </a:r>
-            <a:pPr algn="l" indent="0" marL="0">
-              <a:lnSpc>
-                <a:spcPct val="110000"/>
-              </a:lnSpc>
-              <a:buNone/>
-            </a:pPr>
-            <a:r>
-              <a:rPr lang="en-US" sz="1250" b="1" dirty="0">
-                <a:solidFill>
-                  <a:srgbClr val="12132A"/>
-                </a:solidFill>
-                <a:latin typeface="Calibri" pitchFamily="34" charset="0"/>
-                <a:ea typeface="Calibri" pitchFamily="34" charset="-122"/>
-                <a:cs typeface="Calibri" pitchFamily="34" charset="-120"/>
-              </a:rPr>
-              <a:t>RM2.45</a:t>
-            </a:r>
-            <a:pPr algn="l" indent="0" marL="0">
-              <a:lnSpc>
-                <a:spcPct val="110000"/>
-              </a:lnSpc>
-              <a:buNone/>
-            </a:pPr>
-            <a:r>
-              <a:rPr lang="en-US" sz="1250" dirty="0">
-                <a:solidFill>
-                  <a:srgbClr val="000000"/>
-                </a:solidFill>
-                <a:latin typeface="Calibri" pitchFamily="34" charset="0"/>
-                <a:ea typeface="Calibri" pitchFamily="34" charset="-122"/>
-                <a:cs typeface="Calibri" pitchFamily="34" charset="-120"/>
-              </a:rPr>
-              <a:t>
-</a:t>
-            </a:r>
-            <a:pPr algn="l" indent="0" marL="0">
-              <a:lnSpc>
-                <a:spcPct val="110000"/>
-              </a:lnSpc>
-              <a:buNone/>
-            </a:pPr>
-            <a:r>
-              <a:rPr lang="en-US" sz="1250" dirty="0">
-                <a:solidFill>
-                  <a:srgbClr val="4A5568"/>
-                </a:solidFill>
-                <a:latin typeface="Calibri" pitchFamily="34" charset="0"/>
-                <a:ea typeface="Calibri" pitchFamily="34" charset="-122"/>
-                <a:cs typeface="Calibri" pitchFamily="34" charset="-120"/>
-              </a:rPr>
-              <a:t>Cost </a:t>
-            </a:r>
-            <a:pPr algn="l" indent="0" marL="0">
-              <a:lnSpc>
-                <a:spcPct val="110000"/>
-              </a:lnSpc>
-              <a:buNone/>
-            </a:pPr>
-            <a:r>
-              <a:rPr lang="en-US" sz="1250" b="1" dirty="0">
-                <a:solidFill>
-                  <a:srgbClr val="12132A"/>
-                </a:solidFill>
-                <a:latin typeface="Calibri" pitchFamily="34" charset="0"/>
-                <a:ea typeface="Calibri" pitchFamily="34" charset="-122"/>
-                <a:cs typeface="Calibri" pitchFamily="34" charset="-120"/>
-              </a:rPr>
-              <a:t>RM0.62</a:t>
-            </a:r>
-            <a:endParaRPr lang="en-US" sz="1250" dirty="0"/>
-          </a:p>
-        </p:txBody>
-      </p:sp>
-      <p:sp>
-        <p:nvSpPr>
-          <p:cNvPr id="17" name="Shape 15"/>
-          <p:cNvSpPr/>
-          <p:nvPr/>
-        </p:nvSpPr>
-        <p:spPr>
-          <a:xfrm>
-            <a:off x="6236208" y="2468880"/>
-            <a:ext cx="2651760" cy="2788920"/>
-          </a:xfrm>
-          <a:prstGeom prst="roundRect">
-            <a:avLst>
-              <a:gd name="adj" fmla="val 4138"/>
-            </a:avLst>
-          </a:prstGeom>
-          <a:solidFill>
-            <a:srgbClr val="FFFFFF"/>
-          </a:solidFill>
-          <a:ln w="12700">
-            <a:solidFill>
-              <a:srgbClr val="DEDEE3"/>
-            </a:solidFill>
-            <a:prstDash val="solid"/>
-          </a:ln>
-          <a:effectLst>
-            <a:outerShdw sx="100000" sy="100000" kx="0" ky="0" algn="bl" rotWithShape="0" blurRad="101600" dist="25400" dir="5400000">
-              <a:srgbClr val="9AA0B5">
-                <a:alpha val="18000"/>
-              </a:srgbClr>
-            </a:outerShdw>
-          </a:effectLst>
-        </p:spPr>
-      </p:sp>
-      <p:sp>
-        <p:nvSpPr>
-          <p:cNvPr id="18" name="Text 16"/>
-          <p:cNvSpPr/>
-          <p:nvPr/>
-        </p:nvSpPr>
-        <p:spPr>
-          <a:xfrm>
-            <a:off x="6455664" y="2697480"/>
-            <a:ext cx="2249424" cy="457200"/>
-          </a:xfrm>
-          <a:prstGeom prst="rect">
-            <a:avLst/>
-          </a:prstGeom>
-          <a:noFill/>
-          <a:ln/>
-        </p:spPr>
-        <p:txBody>
-          <a:bodyPr wrap="square" lIns="0" tIns="0" rIns="0" bIns="0" rtlCol="0" anchor="ctr"/>
-          <a:lstStyle/>
-          <a:p>
-            <a:pPr algn="l" indent="0" marL="0">
-              <a:buNone/>
-            </a:pPr>
-            <a:r>
-              <a:rPr lang="en-US" sz="1500" b="1" dirty="0">
-                <a:solidFill>
-                  <a:srgbClr val="12132A"/>
-                </a:solidFill>
-                <a:latin typeface="Calibri" pitchFamily="34" charset="0"/>
-                <a:ea typeface="Calibri" pitchFamily="34" charset="-122"/>
-                <a:cs typeface="Calibri" pitchFamily="34" charset="-120"/>
-              </a:rPr>
-              <a:t>Interview Q</a:t>
-            </a:r>
-            <a:endParaRPr lang="en-US" sz="1500" dirty="0"/>
-          </a:p>
-        </p:txBody>
-      </p:sp>
-      <p:sp>
-        <p:nvSpPr>
-          <p:cNvPr id="19" name="Text 17"/>
-          <p:cNvSpPr/>
-          <p:nvPr/>
-        </p:nvSpPr>
-        <p:spPr>
-          <a:xfrm>
-            <a:off x="6455664" y="3218688"/>
-            <a:ext cx="2212848" cy="731520"/>
-          </a:xfrm>
-          <a:prstGeom prst="rect">
-            <a:avLst/>
-          </a:prstGeom>
-          <a:noFill/>
-          <a:ln/>
-        </p:spPr>
-        <p:txBody>
-          <a:bodyPr wrap="square" lIns="0" tIns="0" rIns="0" bIns="0" rtlCol="0" anchor="ctr"/>
-          <a:lstStyle/>
-          <a:p>
-            <a:pPr algn="l" indent="0" marL="0">
-              <a:buNone/>
-            </a:pPr>
-            <a:r>
-              <a:rPr lang="en-US" sz="4000" b="1" dirty="0">
-                <a:solidFill>
-                  <a:srgbClr val="16A34A"/>
-                </a:solidFill>
-                <a:latin typeface="Calibri" pitchFamily="34" charset="0"/>
-                <a:ea typeface="Calibri" pitchFamily="34" charset="-122"/>
-                <a:cs typeface="Calibri" pitchFamily="34" charset="-120"/>
-              </a:rPr>
-              <a:t>73%</a:t>
-            </a:r>
-            <a:endParaRPr lang="en-US" sz="4000" dirty="0"/>
-          </a:p>
-        </p:txBody>
-      </p:sp>
-      <p:sp>
-        <p:nvSpPr>
-          <p:cNvPr id="20" name="Text 18"/>
-          <p:cNvSpPr/>
-          <p:nvPr/>
-        </p:nvSpPr>
-        <p:spPr>
-          <a:xfrm>
-            <a:off x="6455664" y="3986784"/>
-            <a:ext cx="2212848" cy="274320"/>
-          </a:xfrm>
-          <a:prstGeom prst="rect">
-            <a:avLst/>
-          </a:prstGeom>
-          <a:noFill/>
-          <a:ln/>
-        </p:spPr>
-        <p:txBody>
-          <a:bodyPr wrap="square" lIns="0" tIns="0" rIns="0" bIns="0" rtlCol="0" anchor="ctr"/>
-          <a:lstStyle/>
-          <a:p>
-            <a:pPr algn="l" indent="0" marL="0">
-              <a:buNone/>
-            </a:pPr>
-            <a:r>
-              <a:rPr lang="en-US" sz="1050" dirty="0">
-                <a:solidFill>
-                  <a:srgbClr val="6B7280"/>
-                </a:solidFill>
-                <a:latin typeface="Calibri" pitchFamily="34" charset="0"/>
-                <a:ea typeface="Calibri" pitchFamily="34" charset="-122"/>
-                <a:cs typeface="Calibri" pitchFamily="34" charset="-120"/>
-              </a:rPr>
-              <a:t>gross margin at list</a:t>
-            </a:r>
-            <a:endParaRPr lang="en-US" sz="1050" dirty="0"/>
-          </a:p>
-        </p:txBody>
-      </p:sp>
-      <p:sp>
-        <p:nvSpPr>
-          <p:cNvPr id="21" name="Shape 19"/>
-          <p:cNvSpPr/>
-          <p:nvPr/>
-        </p:nvSpPr>
-        <p:spPr>
-          <a:xfrm>
-            <a:off x="6455664" y="4352544"/>
-            <a:ext cx="2212848" cy="0"/>
-          </a:xfrm>
-          <a:prstGeom prst="line">
-            <a:avLst/>
-          </a:prstGeom>
-          <a:noFill/>
-          <a:ln w="12700">
-            <a:solidFill>
-              <a:srgbClr val="DEDEE3"/>
-            </a:solidFill>
-            <a:prstDash val="solid"/>
-          </a:ln>
-        </p:spPr>
-      </p:sp>
-      <p:sp>
-        <p:nvSpPr>
-          <p:cNvPr id="22" name="Text 20"/>
-          <p:cNvSpPr/>
-          <p:nvPr/>
-        </p:nvSpPr>
-        <p:spPr>
-          <a:xfrm>
-            <a:off x="6455664" y="4462272"/>
-            <a:ext cx="2249424" cy="640080"/>
-          </a:xfrm>
-          <a:prstGeom prst="rect">
-            <a:avLst/>
-          </a:prstGeom>
-          <a:noFill/>
-          <a:ln/>
-        </p:spPr>
-        <p:txBody>
-          <a:bodyPr wrap="square" lIns="0" tIns="0" rIns="0" bIns="0" rtlCol="0" anchor="t"/>
-          <a:lstStyle/>
-          <a:p>
-            <a:pPr algn="l" indent="0" marL="0">
-              <a:lnSpc>
-                <a:spcPct val="110000"/>
-              </a:lnSpc>
-              <a:buNone/>
-            </a:pPr>
-            <a:r>
-              <a:rPr lang="en-US" sz="1250" dirty="0">
-                <a:solidFill>
-                  <a:srgbClr val="4A5568"/>
-                </a:solidFill>
-                <a:latin typeface="Calibri" pitchFamily="34" charset="0"/>
-                <a:ea typeface="Calibri" pitchFamily="34" charset="-122"/>
-                <a:cs typeface="Calibri" pitchFamily="34" charset="-120"/>
-              </a:rPr>
-              <a:t>Price </a:t>
-            </a:r>
-            <a:pPr algn="l" indent="0" marL="0">
-              <a:lnSpc>
-                <a:spcPct val="110000"/>
-              </a:lnSpc>
-              <a:buNone/>
-            </a:pPr>
-            <a:r>
-              <a:rPr lang="en-US" sz="1250" b="1" dirty="0">
-                <a:solidFill>
-                  <a:srgbClr val="12132A"/>
-                </a:solidFill>
-                <a:latin typeface="Calibri" pitchFamily="34" charset="0"/>
-                <a:ea typeface="Calibri" pitchFamily="34" charset="-122"/>
-                <a:cs typeface="Calibri" pitchFamily="34" charset="-120"/>
-              </a:rPr>
-              <a:t>RM0.40</a:t>
-            </a:r>
-            <a:pPr algn="l" indent="0" marL="0">
-              <a:lnSpc>
-                <a:spcPct val="110000"/>
-              </a:lnSpc>
-              <a:buNone/>
-            </a:pPr>
-            <a:r>
-              <a:rPr lang="en-US" sz="1250" dirty="0">
-                <a:solidFill>
-                  <a:srgbClr val="000000"/>
-                </a:solidFill>
-                <a:latin typeface="Calibri" pitchFamily="34" charset="0"/>
-                <a:ea typeface="Calibri" pitchFamily="34" charset="-122"/>
-                <a:cs typeface="Calibri" pitchFamily="34" charset="-120"/>
-              </a:rPr>
-              <a:t>
-</a:t>
-            </a:r>
-            <a:pPr algn="l" indent="0" marL="0">
-              <a:lnSpc>
-                <a:spcPct val="110000"/>
-              </a:lnSpc>
-              <a:buNone/>
-            </a:pPr>
-            <a:r>
-              <a:rPr lang="en-US" sz="1250" dirty="0">
-                <a:solidFill>
-                  <a:srgbClr val="4A5568"/>
-                </a:solidFill>
-                <a:latin typeface="Calibri" pitchFamily="34" charset="0"/>
-                <a:ea typeface="Calibri" pitchFamily="34" charset="-122"/>
-                <a:cs typeface="Calibri" pitchFamily="34" charset="-120"/>
-              </a:rPr>
-              <a:t>Cost </a:t>
-            </a:r>
-            <a:pPr algn="l" indent="0" marL="0">
-              <a:lnSpc>
-                <a:spcPct val="110000"/>
-              </a:lnSpc>
-              <a:buNone/>
-            </a:pPr>
-            <a:r>
-              <a:rPr lang="en-US" sz="1250" b="1" dirty="0">
-                <a:solidFill>
-                  <a:srgbClr val="12132A"/>
-                </a:solidFill>
-                <a:latin typeface="Calibri" pitchFamily="34" charset="0"/>
-                <a:ea typeface="Calibri" pitchFamily="34" charset="-122"/>
-                <a:cs typeface="Calibri" pitchFamily="34" charset="-120"/>
-              </a:rPr>
-              <a:t>RM0.11</a:t>
-            </a:r>
-            <a:endParaRPr lang="en-US" sz="1250" dirty="0"/>
-          </a:p>
-        </p:txBody>
-      </p:sp>
-      <p:sp>
-        <p:nvSpPr>
-          <p:cNvPr id="23" name="Shape 21"/>
-          <p:cNvSpPr/>
-          <p:nvPr/>
-        </p:nvSpPr>
-        <p:spPr>
-          <a:xfrm>
-            <a:off x="9079992" y="2468880"/>
-            <a:ext cx="2651760" cy="2788920"/>
-          </a:xfrm>
-          <a:prstGeom prst="roundRect">
-            <a:avLst>
-              <a:gd name="adj" fmla="val 4138"/>
-            </a:avLst>
-          </a:prstGeom>
-          <a:solidFill>
-            <a:srgbClr val="FFFFFF"/>
-          </a:solidFill>
-          <a:ln w="12700">
-            <a:solidFill>
-              <a:srgbClr val="DEDEE3"/>
-            </a:solidFill>
-            <a:prstDash val="solid"/>
-          </a:ln>
-          <a:effectLst>
-            <a:outerShdw sx="100000" sy="100000" kx="0" ky="0" algn="bl" rotWithShape="0" blurRad="101600" dist="25400" dir="5400000">
-              <a:srgbClr val="9AA0B5">
-                <a:alpha val="18000"/>
-              </a:srgbClr>
-            </a:outerShdw>
-          </a:effectLst>
-        </p:spPr>
-      </p:sp>
-      <p:sp>
-        <p:nvSpPr>
-          <p:cNvPr id="24" name="Text 22"/>
-          <p:cNvSpPr/>
-          <p:nvPr/>
-        </p:nvSpPr>
-        <p:spPr>
-          <a:xfrm>
-            <a:off x="9299448" y="2697480"/>
-            <a:ext cx="2249424" cy="457200"/>
-          </a:xfrm>
-          <a:prstGeom prst="rect">
-            <a:avLst/>
-          </a:prstGeom>
-          <a:noFill/>
-          <a:ln/>
-        </p:spPr>
-        <p:txBody>
-          <a:bodyPr wrap="square" lIns="0" tIns="0" rIns="0" bIns="0" rtlCol="0" anchor="ctr"/>
-          <a:lstStyle/>
-          <a:p>
-            <a:pPr algn="l" indent="0" marL="0">
-              <a:buNone/>
-            </a:pPr>
-            <a:r>
-              <a:rPr lang="en-US" sz="1500" b="1" dirty="0">
-                <a:solidFill>
-                  <a:srgbClr val="12132A"/>
-                </a:solidFill>
-                <a:latin typeface="Calibri" pitchFamily="34" charset="0"/>
-                <a:ea typeface="Calibri" pitchFamily="34" charset="-122"/>
-                <a:cs typeface="Calibri" pitchFamily="34" charset="-120"/>
-              </a:rPr>
-              <a:t>Job draft</a:t>
-            </a:r>
-            <a:endParaRPr lang="en-US" sz="1500" dirty="0"/>
-          </a:p>
-        </p:txBody>
-      </p:sp>
-      <p:sp>
-        <p:nvSpPr>
-          <p:cNvPr id="25" name="Text 23"/>
-          <p:cNvSpPr/>
-          <p:nvPr/>
-        </p:nvSpPr>
-        <p:spPr>
-          <a:xfrm>
-            <a:off x="9299448" y="3218688"/>
-            <a:ext cx="2212848" cy="731520"/>
-          </a:xfrm>
-          <a:prstGeom prst="rect">
-            <a:avLst/>
-          </a:prstGeom>
-          <a:noFill/>
-          <a:ln/>
-        </p:spPr>
-        <p:txBody>
-          <a:bodyPr wrap="square" lIns="0" tIns="0" rIns="0" bIns="0" rtlCol="0" anchor="ctr"/>
-          <a:lstStyle/>
-          <a:p>
-            <a:pPr algn="l" indent="0" marL="0">
-              <a:buNone/>
-            </a:pPr>
-            <a:r>
-              <a:rPr lang="en-US" sz="4000" b="1" dirty="0">
-                <a:solidFill>
-                  <a:srgbClr val="16A34A"/>
-                </a:solidFill>
-                <a:latin typeface="Calibri" pitchFamily="34" charset="0"/>
-                <a:ea typeface="Calibri" pitchFamily="34" charset="-122"/>
-                <a:cs typeface="Calibri" pitchFamily="34" charset="-120"/>
-              </a:rPr>
-              <a:t>69%</a:t>
-            </a:r>
-            <a:endParaRPr lang="en-US" sz="4000" dirty="0"/>
-          </a:p>
-        </p:txBody>
-      </p:sp>
-      <p:sp>
-        <p:nvSpPr>
-          <p:cNvPr id="26" name="Text 24"/>
-          <p:cNvSpPr/>
-          <p:nvPr/>
-        </p:nvSpPr>
-        <p:spPr>
-          <a:xfrm>
-            <a:off x="9299448" y="3986784"/>
-            <a:ext cx="2212848" cy="274320"/>
-          </a:xfrm>
-          <a:prstGeom prst="rect">
-            <a:avLst/>
-          </a:prstGeom>
-          <a:noFill/>
-          <a:ln/>
-        </p:spPr>
-        <p:txBody>
-          <a:bodyPr wrap="square" lIns="0" tIns="0" rIns="0" bIns="0" rtlCol="0" anchor="ctr"/>
-          <a:lstStyle/>
-          <a:p>
-            <a:pPr algn="l" indent="0" marL="0">
-              <a:buNone/>
-            </a:pPr>
-            <a:r>
-              <a:rPr lang="en-US" sz="1050" dirty="0">
-                <a:solidFill>
-                  <a:srgbClr val="6B7280"/>
-                </a:solidFill>
-                <a:latin typeface="Calibri" pitchFamily="34" charset="0"/>
-                <a:ea typeface="Calibri" pitchFamily="34" charset="-122"/>
-                <a:cs typeface="Calibri" pitchFamily="34" charset="-120"/>
-              </a:rPr>
-              <a:t>gross margin at list</a:t>
-            </a:r>
-            <a:endParaRPr lang="en-US" sz="1050" dirty="0"/>
-          </a:p>
-        </p:txBody>
-      </p:sp>
-      <p:sp>
-        <p:nvSpPr>
-          <p:cNvPr id="27" name="Shape 25"/>
-          <p:cNvSpPr/>
-          <p:nvPr/>
-        </p:nvSpPr>
-        <p:spPr>
-          <a:xfrm>
-            <a:off x="9299448" y="4352544"/>
-            <a:ext cx="2212848" cy="0"/>
-          </a:xfrm>
-          <a:prstGeom prst="line">
-            <a:avLst/>
-          </a:prstGeom>
-          <a:noFill/>
-          <a:ln w="12700">
-            <a:solidFill>
-              <a:srgbClr val="DEDEE3"/>
-            </a:solidFill>
-            <a:prstDash val="solid"/>
-          </a:ln>
-        </p:spPr>
-      </p:sp>
-      <p:sp>
-        <p:nvSpPr>
-          <p:cNvPr id="28" name="Text 26"/>
-          <p:cNvSpPr/>
-          <p:nvPr/>
-        </p:nvSpPr>
-        <p:spPr>
-          <a:xfrm>
-            <a:off x="9299448" y="4462272"/>
-            <a:ext cx="2249424" cy="640080"/>
-          </a:xfrm>
-          <a:prstGeom prst="rect">
-            <a:avLst/>
-          </a:prstGeom>
-          <a:noFill/>
-          <a:ln/>
-        </p:spPr>
-        <p:txBody>
-          <a:bodyPr wrap="square" lIns="0" tIns="0" rIns="0" bIns="0" rtlCol="0" anchor="t"/>
-          <a:lstStyle/>
-          <a:p>
-            <a:pPr algn="l" indent="0" marL="0">
-              <a:lnSpc>
-                <a:spcPct val="110000"/>
-              </a:lnSpc>
-              <a:buNone/>
-            </a:pPr>
-            <a:r>
-              <a:rPr lang="en-US" sz="1250" dirty="0">
-                <a:solidFill>
-                  <a:srgbClr val="4A5568"/>
-                </a:solidFill>
-                <a:latin typeface="Calibri" pitchFamily="34" charset="0"/>
-                <a:ea typeface="Calibri" pitchFamily="34" charset="-122"/>
-                <a:cs typeface="Calibri" pitchFamily="34" charset="-120"/>
-              </a:rPr>
-              <a:t>Price </a:t>
-            </a:r>
-            <a:pPr algn="l" indent="0" marL="0">
-              <a:lnSpc>
-                <a:spcPct val="110000"/>
-              </a:lnSpc>
-              <a:buNone/>
-            </a:pPr>
-            <a:r>
-              <a:rPr lang="en-US" sz="1250" b="1" dirty="0">
-                <a:solidFill>
-                  <a:srgbClr val="12132A"/>
-                </a:solidFill>
-                <a:latin typeface="Calibri" pitchFamily="34" charset="0"/>
-                <a:ea typeface="Calibri" pitchFamily="34" charset="-122"/>
-                <a:cs typeface="Calibri" pitchFamily="34" charset="-120"/>
-              </a:rPr>
-              <a:t>RM2.25</a:t>
-            </a:r>
-            <a:pPr algn="l" indent="0" marL="0">
-              <a:lnSpc>
-                <a:spcPct val="110000"/>
-              </a:lnSpc>
-              <a:buNone/>
-            </a:pPr>
-            <a:r>
-              <a:rPr lang="en-US" sz="1250" dirty="0">
-                <a:solidFill>
-                  <a:srgbClr val="000000"/>
-                </a:solidFill>
-                <a:latin typeface="Calibri" pitchFamily="34" charset="0"/>
-                <a:ea typeface="Calibri" pitchFamily="34" charset="-122"/>
-                <a:cs typeface="Calibri" pitchFamily="34" charset="-120"/>
-              </a:rPr>
-              <a:t>
-</a:t>
-            </a:r>
-            <a:pPr algn="l" indent="0" marL="0">
-              <a:lnSpc>
-                <a:spcPct val="110000"/>
-              </a:lnSpc>
-              <a:buNone/>
-            </a:pPr>
-            <a:r>
-              <a:rPr lang="en-US" sz="1250" dirty="0">
-                <a:solidFill>
-                  <a:srgbClr val="4A5568"/>
-                </a:solidFill>
-                <a:latin typeface="Calibri" pitchFamily="34" charset="0"/>
-                <a:ea typeface="Calibri" pitchFamily="34" charset="-122"/>
-                <a:cs typeface="Calibri" pitchFamily="34" charset="-120"/>
-              </a:rPr>
-              <a:t>Cost </a:t>
-            </a:r>
-            <a:pPr algn="l" indent="0" marL="0">
-              <a:lnSpc>
-                <a:spcPct val="110000"/>
-              </a:lnSpc>
-              <a:buNone/>
-            </a:pPr>
-            <a:r>
-              <a:rPr lang="en-US" sz="1250" b="1" dirty="0">
-                <a:solidFill>
-                  <a:srgbClr val="12132A"/>
-                </a:solidFill>
-                <a:latin typeface="Calibri" pitchFamily="34" charset="0"/>
-                <a:ea typeface="Calibri" pitchFamily="34" charset="-122"/>
-                <a:cs typeface="Calibri" pitchFamily="34" charset="-120"/>
-              </a:rPr>
-              <a:t>RM0.69</a:t>
-            </a:r>
-            <a:endParaRPr lang="en-US" sz="1250" dirty="0"/>
-          </a:p>
-        </p:txBody>
-      </p:sp>
-      <p:sp>
-        <p:nvSpPr>
-          <p:cNvPr id="29" name="Text 27"/>
-          <p:cNvSpPr/>
-          <p:nvPr/>
-        </p:nvSpPr>
-        <p:spPr>
-          <a:xfrm>
-            <a:off x="548640" y="5577840"/>
+            <a:off x="548640" y="5852160"/>
             <a:ext cx="10972800" cy="274320"/>
           </a:xfrm>
           <a:prstGeom prst="rect">
@@ -7467,7 +8216,7 @@
               <a:buNone/>
             </a:pPr>
             <a:r>
-              <a:rPr lang="en-US" sz="1100" i="1" dirty="0">
+              <a:rPr lang="en-US" sz="1000" i="1" dirty="0">
                 <a:solidFill>
                   <a:srgbClr val="6B7280"/>
                 </a:solidFill>
@@ -7475,15 +8224,15 @@
                 <a:ea typeface="Calibri" pitchFamily="34" charset="-122"/>
                 <a:cs typeface="Calibri" pitchFamily="34" charset="-120"/>
               </a:rPr>
-              <a:t>Cost = AI inference + Stripe (3% + RM1 per top-up) + 10% partner share, on each credit's minimum top-up. Even after all three, top-ups clear ~70% margin.</a:t>
+              <a:t>Cost = AI inference + Stripe (3% + RM1 on each credit's minimum top-up: 10 / 10 / 10 / 50 / 10). Prices stored as USD cents, shown in MYR.</a:t>
             </a:r>
-            <a:endParaRPr lang="en-US" sz="1100" dirty="0"/>
+            <a:endParaRPr lang="en-US" sz="1000" dirty="0"/>
           </a:p>
         </p:txBody>
       </p:sp>
       <p:sp>
         <p:nvSpPr>
-          <p:cNvPr id="30" name="Text 28"/>
+          <p:cNvPr id="13" name="Text 10"/>
           <p:cNvSpPr/>
           <p:nvPr/>
         </p:nvSpPr>
@@ -7522,7 +8271,7 @@
       </p:sp>
       <p:sp>
         <p:nvSpPr>
-          <p:cNvPr id="31" name="Text 29"/>
+          <p:cNvPr id="14" name="Text 11"/>
           <p:cNvSpPr/>
           <p:nvPr/>
         </p:nvSpPr>
@@ -10469,7 +11218,7 @@
                 <a:ea typeface="Calibri" pitchFamily="34" charset="-122"/>
                 <a:cs typeface="Calibri" pitchFamily="34" charset="-120"/>
               </a:rPr>
-              <a:t>~62% </a:t>
+              <a:t>~64% </a:t>
             </a:r>
             <a:pPr algn="l" indent="0" marL="0">
               <a:buNone/>
@@ -12346,7 +13095,7 @@
                 <a:ea typeface="Calibri" pitchFamily="34" charset="-122"/>
                 <a:cs typeface="Calibri" pitchFamily="34" charset="-120"/>
               </a:rPr>
-              <a:t>80–90%</a:t>
+              <a:t>80–98%</a:t>
             </a:r>
             <a:endParaRPr lang="en-US" sz="3000" dirty="0"/>
           </a:p>
@@ -12522,7 +13271,7 @@
                 <a:ea typeface="Calibri" pitchFamily="34" charset="-122"/>
                 <a:cs typeface="Calibri" pitchFamily="34" charset="-120"/>
               </a:rPr>
-              <a:t>Each tier bundles enough screening and AI credits to run its open roles. The bundle is worth 2–3× the plan price at list credit rates, which anchors upgrades.</a:t>
+              <a:t>Each tier bundles enough screening and AI credits to run its open roles. The bundle is worth ~3× the plan price at list credit rates, which anchors upgrades.</a:t>
             </a:r>
             <a:endParaRPr lang="en-US" sz="1250" dirty="0"/>
           </a:p>
@@ -12659,7 +13408,7 @@
                 <a:ea typeface="Calibri" pitchFamily="34" charset="-122"/>
                 <a:cs typeface="Calibri" pitchFamily="34" charset="-120"/>
               </a:rPr>
-              <a:t>Overage sells at RM0.40–RM2.85 per action against a few sen of AI cost. This is where blended margin expands as accounts grow.</a:t>
+              <a:t>Overage sells at RM0.37–RM2.82 per action against a few sen of AI cost. This is where blended margin expands as accounts grow.</a:t>
             </a:r>
             <a:endParaRPr lang="en-US" sz="1250" dirty="0"/>
           </a:p>
@@ -20522,7 +21271,7 @@
                 <a:ea typeface="Calibri" pitchFamily="34" charset="-122"/>
                 <a:cs typeface="Calibri" pitchFamily="34" charset="-120"/>
               </a:rPr>
-              <a:t>The included AI is worth 2–3× the plan price</a:t>
+              <a:t>The included AI is worth ~3× the plan price</a:t>
             </a:r>
             <a:endParaRPr lang="en-US" sz="3400" dirty="0"/>
           </a:p>
@@ -20673,7 +21422,7 @@
                 <a:ea typeface="Calibri" pitchFamily="34" charset="-122"/>
                 <a:cs typeface="Calibri" pitchFamily="34" charset="-120"/>
               </a:rPr>
-              <a:t>3.3×</a:t>
+              <a:t>3.4×</a:t>
             </a:r>
             <a:endParaRPr lang="en-US" sz="2400" dirty="0"/>
           </a:p>
@@ -20790,7 +21539,7 @@
                 <a:ea typeface="Calibri" pitchFamily="34" charset="-122"/>
                 <a:cs typeface="Calibri" pitchFamily="34" charset="-120"/>
               </a:rPr>
-              <a:t>RM328</a:t>
+              <a:t>RM337</a:t>
             </a:r>
             <a:endParaRPr lang="en-US" sz="2800" dirty="0"/>
           </a:p>
@@ -21003,7 +21752,7 @@
                 <a:ea typeface="Calibri" pitchFamily="34" charset="-122"/>
                 <a:cs typeface="Calibri" pitchFamily="34" charset="-120"/>
               </a:rPr>
-              <a:t>2.8×</a:t>
+              <a:t>3.1×</a:t>
             </a:r>
             <a:endParaRPr lang="en-US" sz="2400" dirty="0"/>
           </a:p>
@@ -21120,7 +21869,7 @@
                 <a:ea typeface="Calibri" pitchFamily="34" charset="-122"/>
                 <a:cs typeface="Calibri" pitchFamily="34" charset="-120"/>
               </a:rPr>
-              <a:t>RM1,653</a:t>
+              <a:t>RM1,881</a:t>
             </a:r>
             <a:endParaRPr lang="en-US" sz="2800" dirty="0"/>
           </a:p>
@@ -21333,7 +22082,7 @@
                 <a:ea typeface="Calibri" pitchFamily="34" charset="-122"/>
                 <a:cs typeface="Calibri" pitchFamily="34" charset="-120"/>
               </a:rPr>
-              <a:t>2.4×</a:t>
+              <a:t>2.9×</a:t>
             </a:r>
             <a:endParaRPr lang="en-US" sz="2400" dirty="0"/>
           </a:p>
@@ -21450,7 +22199,7 @@
                 <a:ea typeface="Calibri" pitchFamily="34" charset="-122"/>
                 <a:cs typeface="Calibri" pitchFamily="34" charset="-120"/>
               </a:rPr>
-              <a:t>RM3,420</a:t>
+              <a:t>RM4,119</a:t>
             </a:r>
             <a:endParaRPr lang="en-US" sz="2800" dirty="0"/>
           </a:p>
@@ -21590,7 +22339,7 @@
                 <a:ea typeface="Calibri" pitchFamily="34" charset="-122"/>
                 <a:cs typeface="Calibri" pitchFamily="34" charset="-120"/>
               </a:rPr>
-              <a:t>Included value = monthly allowance priced at list credit rates (RM2.85 screening · RM2.45 AI Rank · RM0.40 questions). AI Insight allowance not valued here.</a:t>
+              <a:t>Included value = monthly allowance priced at list credit rates (RM2.82 screening · RM2.45 AI Rank / Insight · RM0.37 questions).</a:t>
             </a:r>
             <a:endParaRPr lang="en-US" sz="1050" dirty="0"/>
           </a:p>
@@ -22103,7 +22852,7 @@
                           <a:ea typeface="Calibri" pitchFamily="34" charset="-122"/>
                           <a:cs typeface="Calibri" pitchFamily="34" charset="-120"/>
                         </a:rPr>
-                        <a:t>RM2.85</a:t>
+                        <a:t>RM2.82</a:t>
                       </a:r>
                       <a:endParaRPr lang="en-US" sz="1250" dirty="0">
                         <a:latin typeface="Calibri" charset="0"/>
@@ -22447,7 +23196,7 @@
                           <a:ea typeface="Calibri" pitchFamily="34" charset="-122"/>
                           <a:cs typeface="Calibri" pitchFamily="34" charset="-120"/>
                         </a:rPr>
-                        <a:t>Interview questions</a:t>
+                        <a:t>AI Insight</a:t>
                       </a:r>
                       <a:endParaRPr lang="en-US" sz="1250" dirty="0">
                         <a:latin typeface="Calibri" charset="0"/>
@@ -22515,7 +23264,7 @@
                           <a:ea typeface="Calibri" pitchFamily="34" charset="-122"/>
                           <a:cs typeface="Calibri" pitchFamily="34" charset="-120"/>
                         </a:rPr>
-                        <a:t>RM0.40</a:t>
+                        <a:t>RM2.45</a:t>
                       </a:r>
                       <a:endParaRPr lang="en-US" sz="1250" dirty="0">
                         <a:latin typeface="Calibri" charset="0"/>
@@ -22563,6 +23312,212 @@
                     </a:lnB>
                     <a:solidFill>
                       <a:srgbClr val="FFFFFF"/>
+                    </a:solidFill>
+                  </a:tcPr>
+                </a:tc>
+                <a:tc>
+                  <a:txBody>
+                    <a:bodyPr/>
+                    <a:lstStyle/>
+                    <a:p>
+                      <a:pPr algn="ctr" indent="0" marL="0">
+                        <a:buNone/>
+                      </a:pPr>
+                      <a:r>
+                        <a:rPr lang="en-US" sz="1250" dirty="0">
+                          <a:solidFill>
+                            <a:srgbClr val="12132A"/>
+                          </a:solidFill>
+                          <a:latin typeface="Calibri" pitchFamily="34" charset="0"/>
+                          <a:ea typeface="Calibri" pitchFamily="34" charset="-122"/>
+                          <a:cs typeface="Calibri" pitchFamily="34" charset="-120"/>
+                        </a:rPr>
+                        <a:t>10</a:t>
+                      </a:r>
+                      <a:endParaRPr lang="en-US" sz="1250" dirty="0">
+                        <a:latin typeface="Calibri" charset="0"/>
+                        <a:ea typeface="Calibri" charset="0"/>
+                        <a:cs typeface="Calibri" charset="0"/>
+                      </a:endParaRPr>
+                    </a:p>
+                  </a:txBody>
+                  <a:tcPr marL="101600" marR="101600" marT="25400" marB="25400" anchor="ctr">
+                    <a:lnL w="6350" cap="flat" cmpd="sng" algn="ctr">
+                      <a:solidFill>
+                        <a:srgbClr val="E6E8F0"/>
+                      </a:solidFill>
+                      <a:prstDash val="solid"/>
+                      <a:round/>
+                      <a:headEnd type="none" w="med" len="med"/>
+                      <a:tailEnd type="none" w="med" len="med"/>
+                    </a:lnL>
+                    <a:lnR w="6350" cap="flat" cmpd="sng" algn="ctr">
+                      <a:solidFill>
+                        <a:srgbClr val="E6E8F0"/>
+                      </a:solidFill>
+                      <a:prstDash val="solid"/>
+                      <a:round/>
+                      <a:headEnd type="none" w="med" len="med"/>
+                      <a:tailEnd type="none" w="med" len="med"/>
+                    </a:lnR>
+                    <a:lnT w="6350" cap="flat" cmpd="sng" algn="ctr">
+                      <a:solidFill>
+                        <a:srgbClr val="E6E8F0"/>
+                      </a:solidFill>
+                      <a:prstDash val="solid"/>
+                      <a:round/>
+                      <a:headEnd type="none" w="med" len="med"/>
+                      <a:tailEnd type="none" w="med" len="med"/>
+                    </a:lnT>
+                    <a:lnB w="6350" cap="flat" cmpd="sng" algn="ctr">
+                      <a:solidFill>
+                        <a:srgbClr val="E6E8F0"/>
+                      </a:solidFill>
+                      <a:prstDash val="solid"/>
+                      <a:round/>
+                      <a:headEnd type="none" w="med" len="med"/>
+                      <a:tailEnd type="none" w="med" len="med"/>
+                    </a:lnB>
+                    <a:solidFill>
+                      <a:srgbClr val="FFFFFF"/>
+                    </a:solidFill>
+                  </a:tcPr>
+                </a:tc>
+              </a:tr>
+              <a:tr h="512064">
+                <a:tc>
+                  <a:txBody>
+                    <a:bodyPr/>
+                    <a:lstStyle/>
+                    <a:p>
+                      <a:pPr algn="l" indent="0" marL="0">
+                        <a:buNone/>
+                      </a:pPr>
+                      <a:r>
+                        <a:rPr lang="en-US" sz="1250" dirty="0">
+                          <a:solidFill>
+                            <a:srgbClr val="12132A"/>
+                          </a:solidFill>
+                          <a:latin typeface="Calibri" pitchFamily="34" charset="0"/>
+                          <a:ea typeface="Calibri" pitchFamily="34" charset="-122"/>
+                          <a:cs typeface="Calibri" pitchFamily="34" charset="-120"/>
+                        </a:rPr>
+                        <a:t>Interview questions</a:t>
+                      </a:r>
+                      <a:endParaRPr lang="en-US" sz="1250" dirty="0">
+                        <a:latin typeface="Calibri" charset="0"/>
+                        <a:ea typeface="Calibri" charset="0"/>
+                        <a:cs typeface="Calibri" charset="0"/>
+                      </a:endParaRPr>
+                    </a:p>
+                  </a:txBody>
+                  <a:tcPr marL="101600" marR="101600" marT="25400" marB="25400" anchor="ctr">
+                    <a:lnL w="6350" cap="flat" cmpd="sng" algn="ctr">
+                      <a:solidFill>
+                        <a:srgbClr val="E6E8F0"/>
+                      </a:solidFill>
+                      <a:prstDash val="solid"/>
+                      <a:round/>
+                      <a:headEnd type="none" w="med" len="med"/>
+                      <a:tailEnd type="none" w="med" len="med"/>
+                    </a:lnL>
+                    <a:lnR w="6350" cap="flat" cmpd="sng" algn="ctr">
+                      <a:solidFill>
+                        <a:srgbClr val="E6E8F0"/>
+                      </a:solidFill>
+                      <a:prstDash val="solid"/>
+                      <a:round/>
+                      <a:headEnd type="none" w="med" len="med"/>
+                      <a:tailEnd type="none" w="med" len="med"/>
+                    </a:lnR>
+                    <a:lnT w="6350" cap="flat" cmpd="sng" algn="ctr">
+                      <a:solidFill>
+                        <a:srgbClr val="E6E8F0"/>
+                      </a:solidFill>
+                      <a:prstDash val="solid"/>
+                      <a:round/>
+                      <a:headEnd type="none" w="med" len="med"/>
+                      <a:tailEnd type="none" w="med" len="med"/>
+                    </a:lnT>
+                    <a:lnB w="6350" cap="flat" cmpd="sng" algn="ctr">
+                      <a:solidFill>
+                        <a:srgbClr val="E6E8F0"/>
+                      </a:solidFill>
+                      <a:prstDash val="solid"/>
+                      <a:round/>
+                      <a:headEnd type="none" w="med" len="med"/>
+                      <a:tailEnd type="none" w="med" len="med"/>
+                    </a:lnB>
+                    <a:solidFill>
+                      <a:srgbClr val="F5F7FE"/>
+                    </a:solidFill>
+                  </a:tcPr>
+                </a:tc>
+                <a:tc>
+                  <a:txBody>
+                    <a:bodyPr/>
+                    <a:lstStyle/>
+                    <a:p>
+                      <a:pPr algn="r" indent="0" marL="0">
+                        <a:buNone/>
+                      </a:pPr>
+                      <a:r>
+                        <a:rPr lang="en-US" sz="1250" b="1" dirty="0">
+                          <a:solidFill>
+                            <a:srgbClr val="0B2AE0"/>
+                          </a:solidFill>
+                          <a:latin typeface="Calibri" pitchFamily="34" charset="0"/>
+                          <a:ea typeface="Calibri" pitchFamily="34" charset="-122"/>
+                          <a:cs typeface="Calibri" pitchFamily="34" charset="-120"/>
+                        </a:rPr>
+                        <a:t>RM0.37</a:t>
+                      </a:r>
+                      <a:endParaRPr lang="en-US" sz="1250" dirty="0">
+                        <a:latin typeface="Calibri" charset="0"/>
+                        <a:ea typeface="Calibri" charset="0"/>
+                        <a:cs typeface="Calibri" charset="0"/>
+                      </a:endParaRPr>
+                    </a:p>
+                  </a:txBody>
+                  <a:tcPr marL="101600" marR="101600" marT="25400" marB="25400" anchor="ctr">
+                    <a:lnL w="6350" cap="flat" cmpd="sng" algn="ctr">
+                      <a:solidFill>
+                        <a:srgbClr val="E6E8F0"/>
+                      </a:solidFill>
+                      <a:prstDash val="solid"/>
+                      <a:round/>
+                      <a:headEnd type="none" w="med" len="med"/>
+                      <a:tailEnd type="none" w="med" len="med"/>
+                    </a:lnL>
+                    <a:lnR w="6350" cap="flat" cmpd="sng" algn="ctr">
+                      <a:solidFill>
+                        <a:srgbClr val="E6E8F0"/>
+                      </a:solidFill>
+                      <a:prstDash val="solid"/>
+                      <a:round/>
+                      <a:headEnd type="none" w="med" len="med"/>
+                      <a:tailEnd type="none" w="med" len="med"/>
+                    </a:lnR>
+                    <a:lnT w="6350" cap="flat" cmpd="sng" algn="ctr">
+                      <a:solidFill>
+                        <a:srgbClr val="E6E8F0"/>
+                      </a:solidFill>
+                      <a:prstDash val="solid"/>
+                      <a:round/>
+                      <a:headEnd type="none" w="med" len="med"/>
+                      <a:tailEnd type="none" w="med" len="med"/>
+                    </a:lnT>
+                    <a:lnB w="6350" cap="flat" cmpd="sng" algn="ctr">
+                      <a:solidFill>
+                        <a:srgbClr val="E6E8F0"/>
+                      </a:solidFill>
+                      <a:prstDash val="solid"/>
+                      <a:round/>
+                      <a:headEnd type="none" w="med" len="med"/>
+                      <a:tailEnd type="none" w="med" len="med"/>
+                    </a:lnB>
+                    <a:solidFill>
+                      <a:srgbClr val="F5F7FE"/>
                     </a:solidFill>
                   </a:tcPr>
                 </a:tc>
@@ -22630,7 +23585,7 @@
                       <a:tailEnd type="none" w="med" len="med"/>
                     </a:lnB>
                     <a:solidFill>
-                      <a:srgbClr val="FFFFFF"/>
+                      <a:srgbClr val="F5F7FE"/>
                     </a:solidFill>
                   </a:tcPr>
                 </a:tc>
@@ -22700,7 +23655,7 @@
                       <a:tailEnd type="none" w="med" len="med"/>
                     </a:lnB>
                     <a:solidFill>
-                      <a:srgbClr val="F5F7FE"/>
+                      <a:srgbClr val="FFFFFF"/>
                     </a:solidFill>
                   </a:tcPr>
                 </a:tc>
@@ -22768,7 +23723,7 @@
                       <a:tailEnd type="none" w="med" len="med"/>
                     </a:lnB>
                     <a:solidFill>
-                      <a:srgbClr val="F5F7FE"/>
+                      <a:srgbClr val="FFFFFF"/>
                     </a:solidFill>
                   </a:tcPr>
                 </a:tc>
@@ -22836,7 +23791,7 @@
                       <a:tailEnd type="none" w="med" len="med"/>
                     </a:lnB>
                     <a:solidFill>
-                      <a:srgbClr val="F5F7FE"/>
+                      <a:srgbClr val="FFFFFF"/>
                     </a:solidFill>
                   </a:tcPr>
                 </a:tc>
@@ -23597,7 +24552,7 @@
                 <a:ea typeface="Calibri" pitchFamily="34" charset="-122"/>
                 <a:cs typeface="Calibri" pitchFamily="34" charset="-120"/>
               </a:rPr>
-              <a:t>Minimum top-up per credit is shown above. Each top-up is one Stripe charge; that fee is folded into the credit margins on slide 11.</a:t>
+              <a:t>Prices are stored once as USD cents and shown here in MYR. Minimum top-up per credit is above; each top-up is one Stripe charge, folded into the credit margins on slide 11.</a:t>
             </a:r>
             <a:endParaRPr lang="en-US" sz="1000" dirty="0"/>
           </a:p>
@@ -24424,7 +25379,7 @@
                           <a:ea typeface="Calibri" pitchFamily="34" charset="-122"/>
                           <a:cs typeface="Calibri" pitchFamily="34" charset="-120"/>
                         </a:rPr>
-                        <a:t>RM2.85</a:t>
+                        <a:t>RM2.82</a:t>
                       </a:r>
                       <a:endParaRPr lang="en-US" sz="1250" dirty="0">
                         <a:latin typeface="Calibri" charset="0"/>
@@ -25108,7 +26063,7 @@
                           <a:ea typeface="Calibri" pitchFamily="34" charset="-122"/>
                           <a:cs typeface="Calibri" pitchFamily="34" charset="-120"/>
                         </a:rPr>
-                        <a:t>Interview questions</a:t>
+                        <a:t>AI Insight</a:t>
                       </a:r>
                       <a:endParaRPr lang="en-US" sz="1250" dirty="0">
                         <a:latin typeface="Calibri" charset="0"/>
@@ -25244,7 +26199,7 @@
                           <a:ea typeface="Calibri" pitchFamily="34" charset="-122"/>
                           <a:cs typeface="Calibri" pitchFamily="34" charset="-120"/>
                         </a:rPr>
-                        <a:t>RM0.40</a:t>
+                        <a:t>RM2.45</a:t>
                       </a:r>
                       <a:endParaRPr lang="en-US" sz="1250" dirty="0">
                         <a:latin typeface="Calibri" charset="0"/>
@@ -25380,7 +26335,7 @@
                           <a:ea typeface="Calibri" pitchFamily="34" charset="-122"/>
                           <a:cs typeface="Calibri" pitchFamily="34" charset="-120"/>
                         </a:rPr>
-                        <a:t>~RM0.04</a:t>
+                        <a:t>~RM0.05</a:t>
                       </a:r>
                       <a:endParaRPr lang="en-US" sz="1250" dirty="0">
                         <a:latin typeface="Calibri" charset="0"/>
@@ -25448,7 +26403,7 @@
                           <a:ea typeface="Calibri" pitchFamily="34" charset="-122"/>
                           <a:cs typeface="Calibri" pitchFamily="34" charset="-120"/>
                         </a:rPr>
-                        <a:t>90%</a:t>
+                        <a:t>98%</a:t>
                       </a:r>
                       <a:endParaRPr lang="en-US" sz="1250" dirty="0">
                         <a:latin typeface="Calibri" charset="0"/>
@@ -25496,6 +26451,416 @@
                     </a:lnB>
                     <a:solidFill>
                       <a:srgbClr val="FFFFFF"/>
+                    </a:solidFill>
+                  </a:tcPr>
+                </a:tc>
+              </a:tr>
+              <a:tr h="457200">
+                <a:tc>
+                  <a:txBody>
+                    <a:bodyPr/>
+                    <a:lstStyle/>
+                    <a:p>
+                      <a:pPr algn="l" indent="0" marL="0">
+                        <a:buNone/>
+                      </a:pPr>
+                      <a:r>
+                        <a:rPr lang="en-US" sz="1250" b="1" dirty="0">
+                          <a:solidFill>
+                            <a:srgbClr val="12132A"/>
+                          </a:solidFill>
+                          <a:latin typeface="Calibri" pitchFamily="34" charset="0"/>
+                          <a:ea typeface="Calibri" pitchFamily="34" charset="-122"/>
+                          <a:cs typeface="Calibri" pitchFamily="34" charset="-120"/>
+                        </a:rPr>
+                        <a:t>Interview questions</a:t>
+                      </a:r>
+                      <a:endParaRPr lang="en-US" sz="1250" dirty="0">
+                        <a:latin typeface="Calibri" charset="0"/>
+                        <a:ea typeface="Calibri" charset="0"/>
+                        <a:cs typeface="Calibri" charset="0"/>
+                      </a:endParaRPr>
+                    </a:p>
+                  </a:txBody>
+                  <a:tcPr marL="76200" marR="76200" marT="25400" marB="25400" anchor="ctr">
+                    <a:lnL w="6350" cap="flat" cmpd="sng" algn="ctr">
+                      <a:solidFill>
+                        <a:srgbClr val="E6E8F0"/>
+                      </a:solidFill>
+                      <a:prstDash val="solid"/>
+                      <a:round/>
+                      <a:headEnd type="none" w="med" len="med"/>
+                      <a:tailEnd type="none" w="med" len="med"/>
+                    </a:lnL>
+                    <a:lnR w="6350" cap="flat" cmpd="sng" algn="ctr">
+                      <a:solidFill>
+                        <a:srgbClr val="E6E8F0"/>
+                      </a:solidFill>
+                      <a:prstDash val="solid"/>
+                      <a:round/>
+                      <a:headEnd type="none" w="med" len="med"/>
+                      <a:tailEnd type="none" w="med" len="med"/>
+                    </a:lnR>
+                    <a:lnT w="6350" cap="flat" cmpd="sng" algn="ctr">
+                      <a:solidFill>
+                        <a:srgbClr val="E6E8F0"/>
+                      </a:solidFill>
+                      <a:prstDash val="solid"/>
+                      <a:round/>
+                      <a:headEnd type="none" w="med" len="med"/>
+                      <a:tailEnd type="none" w="med" len="med"/>
+                    </a:lnT>
+                    <a:lnB w="6350" cap="flat" cmpd="sng" algn="ctr">
+                      <a:solidFill>
+                        <a:srgbClr val="E6E8F0"/>
+                      </a:solidFill>
+                      <a:prstDash val="solid"/>
+                      <a:round/>
+                      <a:headEnd type="none" w="med" len="med"/>
+                      <a:tailEnd type="none" w="med" len="med"/>
+                    </a:lnB>
+                    <a:solidFill>
+                      <a:srgbClr val="F5F7FE"/>
+                    </a:solidFill>
+                  </a:tcPr>
+                </a:tc>
+                <a:tc>
+                  <a:txBody>
+                    <a:bodyPr/>
+                    <a:lstStyle/>
+                    <a:p>
+                      <a:pPr algn="ctr" indent="0" marL="0">
+                        <a:buNone/>
+                      </a:pPr>
+                      <a:r>
+                        <a:rPr lang="en-US" sz="1250" dirty="0">
+                          <a:solidFill>
+                            <a:srgbClr val="4A5568"/>
+                          </a:solidFill>
+                          <a:latin typeface="Calibri" pitchFamily="34" charset="0"/>
+                          <a:ea typeface="Calibri" pitchFamily="34" charset="-122"/>
+                          <a:cs typeface="Calibri" pitchFamily="34" charset="-120"/>
+                        </a:rPr>
+                        <a:t>Haiku 4.5</a:t>
+                      </a:r>
+                      <a:endParaRPr lang="en-US" sz="1250" dirty="0">
+                        <a:latin typeface="Calibri" charset="0"/>
+                        <a:ea typeface="Calibri" charset="0"/>
+                        <a:cs typeface="Calibri" charset="0"/>
+                      </a:endParaRPr>
+                    </a:p>
+                  </a:txBody>
+                  <a:tcPr marL="76200" marR="76200" marT="25400" marB="25400" anchor="ctr">
+                    <a:lnL w="6350" cap="flat" cmpd="sng" algn="ctr">
+                      <a:solidFill>
+                        <a:srgbClr val="E6E8F0"/>
+                      </a:solidFill>
+                      <a:prstDash val="solid"/>
+                      <a:round/>
+                      <a:headEnd type="none" w="med" len="med"/>
+                      <a:tailEnd type="none" w="med" len="med"/>
+                    </a:lnL>
+                    <a:lnR w="6350" cap="flat" cmpd="sng" algn="ctr">
+                      <a:solidFill>
+                        <a:srgbClr val="E6E8F0"/>
+                      </a:solidFill>
+                      <a:prstDash val="solid"/>
+                      <a:round/>
+                      <a:headEnd type="none" w="med" len="med"/>
+                      <a:tailEnd type="none" w="med" len="med"/>
+                    </a:lnR>
+                    <a:lnT w="6350" cap="flat" cmpd="sng" algn="ctr">
+                      <a:solidFill>
+                        <a:srgbClr val="E6E8F0"/>
+                      </a:solidFill>
+                      <a:prstDash val="solid"/>
+                      <a:round/>
+                      <a:headEnd type="none" w="med" len="med"/>
+                      <a:tailEnd type="none" w="med" len="med"/>
+                    </a:lnT>
+                    <a:lnB w="6350" cap="flat" cmpd="sng" algn="ctr">
+                      <a:solidFill>
+                        <a:srgbClr val="E6E8F0"/>
+                      </a:solidFill>
+                      <a:prstDash val="solid"/>
+                      <a:round/>
+                      <a:headEnd type="none" w="med" len="med"/>
+                      <a:tailEnd type="none" w="med" len="med"/>
+                    </a:lnB>
+                    <a:solidFill>
+                      <a:srgbClr val="F5F7FE"/>
+                    </a:solidFill>
+                  </a:tcPr>
+                </a:tc>
+                <a:tc>
+                  <a:txBody>
+                    <a:bodyPr/>
+                    <a:lstStyle/>
+                    <a:p>
+                      <a:pPr algn="r" indent="0" marL="0">
+                        <a:buNone/>
+                      </a:pPr>
+                      <a:r>
+                        <a:rPr lang="en-US" sz="1250" dirty="0">
+                          <a:solidFill>
+                            <a:srgbClr val="4A5568"/>
+                          </a:solidFill>
+                          <a:latin typeface="Calibri" pitchFamily="34" charset="0"/>
+                          <a:ea typeface="Calibri" pitchFamily="34" charset="-122"/>
+                          <a:cs typeface="Calibri" pitchFamily="34" charset="-120"/>
+                        </a:rPr>
+                        <a:t>RM0.37</a:t>
+                      </a:r>
+                      <a:endParaRPr lang="en-US" sz="1250" dirty="0">
+                        <a:latin typeface="Calibri" charset="0"/>
+                        <a:ea typeface="Calibri" charset="0"/>
+                        <a:cs typeface="Calibri" charset="0"/>
+                      </a:endParaRPr>
+                    </a:p>
+                  </a:txBody>
+                  <a:tcPr marL="76200" marR="76200" marT="25400" marB="25400" anchor="ctr">
+                    <a:lnL w="6350" cap="flat" cmpd="sng" algn="ctr">
+                      <a:solidFill>
+                        <a:srgbClr val="E6E8F0"/>
+                      </a:solidFill>
+                      <a:prstDash val="solid"/>
+                      <a:round/>
+                      <a:headEnd type="none" w="med" len="med"/>
+                      <a:tailEnd type="none" w="med" len="med"/>
+                    </a:lnL>
+                    <a:lnR w="6350" cap="flat" cmpd="sng" algn="ctr">
+                      <a:solidFill>
+                        <a:srgbClr val="E6E8F0"/>
+                      </a:solidFill>
+                      <a:prstDash val="solid"/>
+                      <a:round/>
+                      <a:headEnd type="none" w="med" len="med"/>
+                      <a:tailEnd type="none" w="med" len="med"/>
+                    </a:lnR>
+                    <a:lnT w="6350" cap="flat" cmpd="sng" algn="ctr">
+                      <a:solidFill>
+                        <a:srgbClr val="E6E8F0"/>
+                      </a:solidFill>
+                      <a:prstDash val="solid"/>
+                      <a:round/>
+                      <a:headEnd type="none" w="med" len="med"/>
+                      <a:tailEnd type="none" w="med" len="med"/>
+                    </a:lnT>
+                    <a:lnB w="6350" cap="flat" cmpd="sng" algn="ctr">
+                      <a:solidFill>
+                        <a:srgbClr val="E6E8F0"/>
+                      </a:solidFill>
+                      <a:prstDash val="solid"/>
+                      <a:round/>
+                      <a:headEnd type="none" w="med" len="med"/>
+                      <a:tailEnd type="none" w="med" len="med"/>
+                    </a:lnB>
+                    <a:solidFill>
+                      <a:srgbClr val="F5F7FE"/>
+                    </a:solidFill>
+                  </a:tcPr>
+                </a:tc>
+                <a:tc>
+                  <a:txBody>
+                    <a:bodyPr/>
+                    <a:lstStyle/>
+                    <a:p>
+                      <a:pPr algn="r" indent="0" marL="0">
+                        <a:buNone/>
+                      </a:pPr>
+                      <a:r>
+                        <a:rPr lang="en-US" sz="1250" dirty="0">
+                          <a:solidFill>
+                            <a:srgbClr val="4A5568"/>
+                          </a:solidFill>
+                          <a:latin typeface="Calibri" pitchFamily="34" charset="0"/>
+                          <a:ea typeface="Calibri" pitchFamily="34" charset="-122"/>
+                          <a:cs typeface="Calibri" pitchFamily="34" charset="-120"/>
+                        </a:rPr>
+                        <a:t>~RM0.04</a:t>
+                      </a:r>
+                      <a:endParaRPr lang="en-US" sz="1250" dirty="0">
+                        <a:latin typeface="Calibri" charset="0"/>
+                        <a:ea typeface="Calibri" charset="0"/>
+                        <a:cs typeface="Calibri" charset="0"/>
+                      </a:endParaRPr>
+                    </a:p>
+                  </a:txBody>
+                  <a:tcPr marL="76200" marR="76200" marT="25400" marB="25400" anchor="ctr">
+                    <a:lnL w="6350" cap="flat" cmpd="sng" algn="ctr">
+                      <a:solidFill>
+                        <a:srgbClr val="E6E8F0"/>
+                      </a:solidFill>
+                      <a:prstDash val="solid"/>
+                      <a:round/>
+                      <a:headEnd type="none" w="med" len="med"/>
+                      <a:tailEnd type="none" w="med" len="med"/>
+                    </a:lnL>
+                    <a:lnR w="6350" cap="flat" cmpd="sng" algn="ctr">
+                      <a:solidFill>
+                        <a:srgbClr val="E6E8F0"/>
+                      </a:solidFill>
+                      <a:prstDash val="solid"/>
+                      <a:round/>
+                      <a:headEnd type="none" w="med" len="med"/>
+                      <a:tailEnd type="none" w="med" len="med"/>
+                    </a:lnR>
+                    <a:lnT w="6350" cap="flat" cmpd="sng" algn="ctr">
+                      <a:solidFill>
+                        <a:srgbClr val="E6E8F0"/>
+                      </a:solidFill>
+                      <a:prstDash val="solid"/>
+                      <a:round/>
+                      <a:headEnd type="none" w="med" len="med"/>
+                      <a:tailEnd type="none" w="med" len="med"/>
+                    </a:lnT>
+                    <a:lnB w="6350" cap="flat" cmpd="sng" algn="ctr">
+                      <a:solidFill>
+                        <a:srgbClr val="E6E8F0"/>
+                      </a:solidFill>
+                      <a:prstDash val="solid"/>
+                      <a:round/>
+                      <a:headEnd type="none" w="med" len="med"/>
+                      <a:tailEnd type="none" w="med" len="med"/>
+                    </a:lnB>
+                    <a:solidFill>
+                      <a:srgbClr val="F5F7FE"/>
+                    </a:solidFill>
+                  </a:tcPr>
+                </a:tc>
+                <a:tc>
+                  <a:txBody>
+                    <a:bodyPr/>
+                    <a:lstStyle/>
+                    <a:p>
+                      <a:pPr algn="r" indent="0" marL="0">
+                        <a:buNone/>
+                      </a:pPr>
+                      <a:r>
+                        <a:rPr lang="en-US" sz="1250" dirty="0">
+                          <a:solidFill>
+                            <a:srgbClr val="4A5568"/>
+                          </a:solidFill>
+                          <a:latin typeface="Calibri" pitchFamily="34" charset="0"/>
+                          <a:ea typeface="Calibri" pitchFamily="34" charset="-122"/>
+                          <a:cs typeface="Calibri" pitchFamily="34" charset="-120"/>
+                        </a:rPr>
+                        <a:t>~RM0.04</a:t>
+                      </a:r>
+                      <a:endParaRPr lang="en-US" sz="1250" dirty="0">
+                        <a:latin typeface="Calibri" charset="0"/>
+                        <a:ea typeface="Calibri" charset="0"/>
+                        <a:cs typeface="Calibri" charset="0"/>
+                      </a:endParaRPr>
+                    </a:p>
+                  </a:txBody>
+                  <a:tcPr marL="76200" marR="76200" marT="25400" marB="25400" anchor="ctr">
+                    <a:lnL w="6350" cap="flat" cmpd="sng" algn="ctr">
+                      <a:solidFill>
+                        <a:srgbClr val="E6E8F0"/>
+                      </a:solidFill>
+                      <a:prstDash val="solid"/>
+                      <a:round/>
+                      <a:headEnd type="none" w="med" len="med"/>
+                      <a:tailEnd type="none" w="med" len="med"/>
+                    </a:lnL>
+                    <a:lnR w="6350" cap="flat" cmpd="sng" algn="ctr">
+                      <a:solidFill>
+                        <a:srgbClr val="E6E8F0"/>
+                      </a:solidFill>
+                      <a:prstDash val="solid"/>
+                      <a:round/>
+                      <a:headEnd type="none" w="med" len="med"/>
+                      <a:tailEnd type="none" w="med" len="med"/>
+                    </a:lnR>
+                    <a:lnT w="6350" cap="flat" cmpd="sng" algn="ctr">
+                      <a:solidFill>
+                        <a:srgbClr val="E6E8F0"/>
+                      </a:solidFill>
+                      <a:prstDash val="solid"/>
+                      <a:round/>
+                      <a:headEnd type="none" w="med" len="med"/>
+                      <a:tailEnd type="none" w="med" len="med"/>
+                    </a:lnT>
+                    <a:lnB w="6350" cap="flat" cmpd="sng" algn="ctr">
+                      <a:solidFill>
+                        <a:srgbClr val="E6E8F0"/>
+                      </a:solidFill>
+                      <a:prstDash val="solid"/>
+                      <a:round/>
+                      <a:headEnd type="none" w="med" len="med"/>
+                      <a:tailEnd type="none" w="med" len="med"/>
+                    </a:lnB>
+                    <a:solidFill>
+                      <a:srgbClr val="F5F7FE"/>
+                    </a:solidFill>
+                  </a:tcPr>
+                </a:tc>
+                <a:tc>
+                  <a:txBody>
+                    <a:bodyPr/>
+                    <a:lstStyle/>
+                    <a:p>
+                      <a:pPr algn="r" indent="0" marL="0">
+                        <a:buNone/>
+                      </a:pPr>
+                      <a:r>
+                        <a:rPr lang="en-US" sz="1250" b="1" dirty="0">
+                          <a:solidFill>
+                            <a:srgbClr val="16A34A"/>
+                          </a:solidFill>
+                          <a:latin typeface="Calibri" pitchFamily="34" charset="0"/>
+                          <a:ea typeface="Calibri" pitchFamily="34" charset="-122"/>
+                          <a:cs typeface="Calibri" pitchFamily="34" charset="-120"/>
+                        </a:rPr>
+                        <a:t>89%</a:t>
+                      </a:r>
+                      <a:endParaRPr lang="en-US" sz="1250" dirty="0">
+                        <a:latin typeface="Calibri" charset="0"/>
+                        <a:ea typeface="Calibri" charset="0"/>
+                        <a:cs typeface="Calibri" charset="0"/>
+                      </a:endParaRPr>
+                    </a:p>
+                  </a:txBody>
+                  <a:tcPr marL="76200" marR="76200" marT="25400" marB="25400" anchor="ctr">
+                    <a:lnL w="6350" cap="flat" cmpd="sng" algn="ctr">
+                      <a:solidFill>
+                        <a:srgbClr val="E6E8F0"/>
+                      </a:solidFill>
+                      <a:prstDash val="solid"/>
+                      <a:round/>
+                      <a:headEnd type="none" w="med" len="med"/>
+                      <a:tailEnd type="none" w="med" len="med"/>
+                    </a:lnL>
+                    <a:lnR w="6350" cap="flat" cmpd="sng" algn="ctr">
+                      <a:solidFill>
+                        <a:srgbClr val="E6E8F0"/>
+                      </a:solidFill>
+                      <a:prstDash val="solid"/>
+                      <a:round/>
+                      <a:headEnd type="none" w="med" len="med"/>
+                      <a:tailEnd type="none" w="med" len="med"/>
+                    </a:lnR>
+                    <a:lnT w="6350" cap="flat" cmpd="sng" algn="ctr">
+                      <a:solidFill>
+                        <a:srgbClr val="E6E8F0"/>
+                      </a:solidFill>
+                      <a:prstDash val="solid"/>
+                      <a:round/>
+                      <a:headEnd type="none" w="med" len="med"/>
+                      <a:tailEnd type="none" w="med" len="med"/>
+                    </a:lnT>
+                    <a:lnB w="6350" cap="flat" cmpd="sng" algn="ctr">
+                      <a:solidFill>
+                        <a:srgbClr val="E6E8F0"/>
+                      </a:solidFill>
+                      <a:prstDash val="solid"/>
+                      <a:round/>
+                      <a:headEnd type="none" w="med" len="med"/>
+                      <a:tailEnd type="none" w="med" len="med"/>
+                    </a:lnB>
+                    <a:solidFill>
+                      <a:srgbClr val="F5F7FE"/>
                     </a:solidFill>
                   </a:tcPr>
                 </a:tc>
@@ -25565,7 +26930,7 @@
                       <a:tailEnd type="none" w="med" len="med"/>
                     </a:lnB>
                     <a:solidFill>
-                      <a:srgbClr val="F5F7FE"/>
+                      <a:srgbClr val="FFFFFF"/>
                     </a:solidFill>
                   </a:tcPr>
                 </a:tc>
@@ -25633,7 +26998,7 @@
                       <a:tailEnd type="none" w="med" len="med"/>
                     </a:lnB>
                     <a:solidFill>
-                      <a:srgbClr val="F5F7FE"/>
+                      <a:srgbClr val="FFFFFF"/>
                     </a:solidFill>
                   </a:tcPr>
                 </a:tc>
@@ -25701,7 +27066,7 @@
                       <a:tailEnd type="none" w="med" len="med"/>
                     </a:lnB>
                     <a:solidFill>
-                      <a:srgbClr val="F5F7FE"/>
+                      <a:srgbClr val="FFFFFF"/>
                     </a:solidFill>
                   </a:tcPr>
                 </a:tc>
@@ -25769,7 +27134,7 @@
                       <a:tailEnd type="none" w="med" len="med"/>
                     </a:lnB>
                     <a:solidFill>
-                      <a:srgbClr val="F5F7FE"/>
+                      <a:srgbClr val="FFFFFF"/>
                     </a:solidFill>
                   </a:tcPr>
                 </a:tc>
@@ -25837,7 +27202,7 @@
                       <a:tailEnd type="none" w="med" len="med"/>
                     </a:lnB>
                     <a:solidFill>
-                      <a:srgbClr val="F5F7FE"/>
+                      <a:srgbClr val="FFFFFF"/>
                     </a:solidFill>
                   </a:tcPr>
                 </a:tc>
@@ -25905,7 +27270,7 @@
                       <a:tailEnd type="none" w="med" len="med"/>
                     </a:lnB>
                     <a:solidFill>
-                      <a:srgbClr val="F5F7FE"/>
+                      <a:srgbClr val="FFFFFF"/>
                     </a:solidFill>
                   </a:tcPr>
                 </a:tc>
@@ -26184,7 +27549,7 @@
                 <a:ea typeface="Calibri" pitchFamily="34" charset="-122"/>
                 <a:cs typeface="Calibri" pitchFamily="34" charset="-120"/>
               </a:rPr>
-              <a:t>RM2.85</a:t>
+              <a:t>RM2.82</a:t>
             </a:r>
             <a:pPr algn="l" indent="0" marL="0">
               <a:lnSpc>
@@ -28677,7 +30042,7 @@
                           <a:ea typeface="Calibri" pitchFamily="34" charset="-122"/>
                           <a:cs typeface="Calibri" pitchFamily="34" charset="-120"/>
                         </a:rPr>
-                        <a:t>10% of each sale</a:t>
+                        <a:t>10% of each plan sale</a:t>
                       </a:r>
                       <a:endParaRPr lang="en-US" sz="1200" dirty="0">
                         <a:latin typeface="Calibri" charset="0"/>

--- a/docs/aster-pricing.pptx
+++ b/docs/aster-pricing.pptx
@@ -19,9 +19,10 @@
     <p:sldId id="267" r:id="rId13"/>
     <p:sldId id="268" r:id="rId14"/>
     <p:sldId id="269" r:id="rId15"/>
+    <p:sldId id="270" r:id="rId16"/>
   </p:sldIdLst>
   <p:notesMasterIdLst>
-    <p:notesMasterId r:id="rId16"/>
+    <p:notesMasterId r:id="rId17"/>
   </p:notesMasterIdLst>
   <p:sldSz cx="12192000" cy="6858000"/>
   <p:notesSz cx="6858000" cy="12192000"/>
@@ -979,6 +980,94 @@
             <a:fld id="{F7021451-1387-4CA6-816F-3879F97B5CBC}" type="slidenum">
               <a:rPr lang="en-US"/>
               <a:t>14</a:t>
+            </a:fld>
+            <a:endParaRPr lang="en-US"/>
+          </a:p>
+        </p:txBody>
+      </p:sp>
+    </p:spTree>
+    <p:extLst>
+      <p:ext uri="{BB962C8B-B14F-4D97-AF65-F5344CB8AC3E}">
+        <p14:creationId xmlns:p14="http://schemas.microsoft.com/office/powerpoint/2010/main" val="1024086991"/>
+      </p:ext>
+    </p:extLst>
+  </p:cSld>
+  <p:clrMapOvr>
+    <a:masterClrMapping/>
+  </p:clrMapOvr>
+</p:notes>
+</file>
+
+<file path=ppt/notesSlides/notesSlide15.xml><?xml version="1.0" encoding="utf-8"?>
+<p:notes xmlns:a="http://schemas.openxmlformats.org/drawingml/2006/main" xmlns:r="http://schemas.openxmlformats.org/officeDocument/2006/relationships" xmlns:p="http://schemas.openxmlformats.org/presentationml/2006/main">
+  <p:cSld>
+    <p:spTree>
+      <p:nvGrpSpPr>
+        <p:cNvPr id="1" name=""/>
+        <p:cNvGrpSpPr/>
+        <p:nvPr/>
+      </p:nvGrpSpPr>
+      <p:grpSpPr>
+        <a:xfrm>
+          <a:off x="0" y="0"/>
+          <a:ext cx="0" cy="0"/>
+          <a:chOff x="0" y="0"/>
+          <a:chExt cx="0" cy="0"/>
+        </a:xfrm>
+      </p:grpSpPr>
+      <p:sp>
+        <p:nvSpPr>
+          <p:cNvPr id="2" name="Slide Image Placeholder 1"/>
+          <p:cNvSpPr>
+            <a:spLocks noGrp="1" noRot="1" noChangeAspect="1"/>
+          </p:cNvSpPr>
+          <p:nvPr>
+            <p:ph type="sldImg"/>
+          </p:nvPr>
+        </p:nvSpPr>
+        <p:spPr/>
+      </p:sp>
+      <p:sp>
+        <p:nvSpPr>
+          <p:cNvPr id="3" name="Notes Placeholder 2"/>
+          <p:cNvSpPr>
+            <a:spLocks noGrp="1"/>
+          </p:cNvSpPr>
+          <p:nvPr>
+            <p:ph type="body" idx="1"/>
+          </p:nvPr>
+        </p:nvSpPr>
+        <p:spPr/>
+        <p:txBody>
+          <a:bodyPr/>
+          <a:lstStyle/>
+          <a:p>
+            <a:r>
+              <a:rPr lang="en-US" dirty="0"/>
+              <a:t/>
+            </a:r>
+            <a:endParaRPr lang="en-US" dirty="0"/>
+          </a:p>
+        </p:txBody>
+      </p:sp>
+      <p:sp>
+        <p:nvSpPr>
+          <p:cNvPr id="4" name="Slide Number Placeholder 3"/>
+          <p:cNvSpPr>
+            <a:spLocks noGrp="1"/>
+          </p:cNvSpPr>
+          <p:nvPr>
+            <p:ph type="sldNum" sz="quarter" idx="10"/>
+          </p:nvPr>
+        </p:nvSpPr>
+        <p:spPr/>
+        <p:txBody>
+          <a:bodyPr/>
+          <a:lstStyle/>
+          <a:p>
+            <a:fld id="{F7021451-1387-4CA6-816F-3879F97B5CBC}" type="slidenum">
+              <a:rPr lang="en-US"/>
+              <a:t>15</a:t>
             </a:fld>
             <a:endParaRPr lang="en-US"/>
           </a:p>
@@ -8373,6 +8462,1514 @@
                 <a:ea typeface="Calibri" pitchFamily="34" charset="-122"/>
                 <a:cs typeface="Calibri" pitchFamily="34" charset="-120"/>
               </a:rPr>
+              <a:t>CUSTOM LICENSING</a:t>
+            </a:r>
+            <a:endParaRPr lang="en-US" sz="1200" dirty="0"/>
+          </a:p>
+        </p:txBody>
+      </p:sp>
+      <p:sp>
+        <p:nvSpPr>
+          <p:cNvPr id="3" name="Text 1"/>
+          <p:cNvSpPr/>
+          <p:nvPr/>
+        </p:nvSpPr>
+        <p:spPr>
+          <a:xfrm>
+            <a:off x="548640" y="777240"/>
+            <a:ext cx="11064240" cy="822960"/>
+          </a:xfrm>
+          <a:prstGeom prst="rect">
+            <a:avLst/>
+          </a:prstGeom>
+          <a:noFill/>
+          <a:ln/>
+        </p:spPr>
+        <p:txBody>
+          <a:bodyPr wrap="square" lIns="0" tIns="0" rIns="0" bIns="0" rtlCol="0" anchor="ctr"/>
+          <a:lstStyle/>
+          <a:p>
+            <a:pPr algn="l" indent="0" marL="0">
+              <a:buNone/>
+            </a:pPr>
+            <a:r>
+              <a:rPr lang="en-US" sz="3400" b="1" dirty="0">
+                <a:solidFill>
+                  <a:srgbClr val="12132A"/>
+                </a:solidFill>
+                <a:latin typeface="Calibri" pitchFamily="34" charset="0"/>
+                <a:ea typeface="Calibri" pitchFamily="34" charset="-122"/>
+                <a:cs typeface="Calibri" pitchFamily="34" charset="-120"/>
+              </a:rPr>
+              <a:t>Enterprise pricing</a:t>
+            </a:r>
+            <a:endParaRPr lang="en-US" sz="3400" dirty="0"/>
+          </a:p>
+        </p:txBody>
+      </p:sp>
+      <p:sp>
+        <p:nvSpPr>
+          <p:cNvPr id="4" name="Text 2"/>
+          <p:cNvSpPr/>
+          <p:nvPr/>
+        </p:nvSpPr>
+        <p:spPr>
+          <a:xfrm>
+            <a:off x="548640" y="1463040"/>
+            <a:ext cx="11064240" cy="548640"/>
+          </a:xfrm>
+          <a:prstGeom prst="rect">
+            <a:avLst/>
+          </a:prstGeom>
+          <a:noFill/>
+          <a:ln/>
+        </p:spPr>
+        <p:txBody>
+          <a:bodyPr wrap="square" lIns="0" tIns="0" rIns="0" bIns="0" rtlCol="0" anchor="ctr"/>
+          <a:lstStyle/>
+          <a:p>
+            <a:pPr algn="l" indent="0" marL="0">
+              <a:buNone/>
+            </a:pPr>
+            <a:r>
+              <a:rPr lang="en-US" sz="1350" dirty="0">
+                <a:solidFill>
+                  <a:srgbClr val="4A5568"/>
+                </a:solidFill>
+                <a:latin typeface="Calibri" pitchFamily="34" charset="0"/>
+                <a:ea typeface="Calibri" pitchFamily="34" charset="-122"/>
+                <a:cs typeface="Calibri" pitchFamily="34" charset="-120"/>
+              </a:rPr>
+              <a:t>Enterprise is a custom annual licence, floored at RM30,000 / mo and scaled by volume. The customer runs AI on its own account, so we license the platform, compliance and support, not usage.</a:t>
+            </a:r>
+            <a:endParaRPr lang="en-US" sz="1350" dirty="0"/>
+          </a:p>
+        </p:txBody>
+      </p:sp>
+      <p:sp>
+        <p:nvSpPr>
+          <p:cNvPr id="5" name="Shape 3"/>
+          <p:cNvSpPr/>
+          <p:nvPr/>
+        </p:nvSpPr>
+        <p:spPr>
+          <a:xfrm>
+            <a:off x="594360" y="2167128"/>
+            <a:ext cx="384048" cy="384048"/>
+          </a:xfrm>
+          <a:prstGeom prst="ellipse">
+            <a:avLst/>
+          </a:prstGeom>
+          <a:solidFill>
+            <a:srgbClr val="0B2AE0"/>
+          </a:solidFill>
+          <a:ln/>
+        </p:spPr>
+      </p:sp>
+      <p:sp>
+        <p:nvSpPr>
+          <p:cNvPr id="6" name="Text 4"/>
+          <p:cNvSpPr/>
+          <p:nvPr/>
+        </p:nvSpPr>
+        <p:spPr>
+          <a:xfrm>
+            <a:off x="594360" y="2157984"/>
+            <a:ext cx="384048" cy="384048"/>
+          </a:xfrm>
+          <a:prstGeom prst="rect">
+            <a:avLst/>
+          </a:prstGeom>
+          <a:noFill/>
+          <a:ln/>
+        </p:spPr>
+        <p:txBody>
+          <a:bodyPr wrap="square" lIns="0" tIns="0" rIns="0" bIns="0" rtlCol="0" anchor="ctr"/>
+          <a:lstStyle/>
+          <a:p>
+            <a:pPr algn="ctr" indent="0" marL="0">
+              <a:buNone/>
+            </a:pPr>
+            <a:r>
+              <a:rPr lang="en-US" sz="1500" b="1" dirty="0">
+                <a:solidFill>
+                  <a:srgbClr val="FFFFFF"/>
+                </a:solidFill>
+                <a:latin typeface="Calibri" pitchFamily="34" charset="0"/>
+                <a:ea typeface="Calibri" pitchFamily="34" charset="-122"/>
+                <a:cs typeface="Calibri" pitchFamily="34" charset="-120"/>
+              </a:rPr>
+              <a:t>1</a:t>
+            </a:r>
+            <a:endParaRPr lang="en-US" sz="1500" dirty="0"/>
+          </a:p>
+        </p:txBody>
+      </p:sp>
+      <p:sp>
+        <p:nvSpPr>
+          <p:cNvPr id="7" name="Text 5"/>
+          <p:cNvSpPr/>
+          <p:nvPr/>
+        </p:nvSpPr>
+        <p:spPr>
+          <a:xfrm>
+            <a:off x="1143000" y="2103120"/>
+            <a:ext cx="5943600" cy="274320"/>
+          </a:xfrm>
+          <a:prstGeom prst="rect">
+            <a:avLst/>
+          </a:prstGeom>
+          <a:noFill/>
+          <a:ln/>
+        </p:spPr>
+        <p:txBody>
+          <a:bodyPr wrap="square" lIns="0" tIns="0" rIns="0" bIns="0" rtlCol="0" anchor="ctr"/>
+          <a:lstStyle/>
+          <a:p>
+            <a:pPr algn="l" indent="0" marL="0">
+              <a:buNone/>
+            </a:pPr>
+            <a:r>
+              <a:rPr lang="en-US" sz="1450" b="1" dirty="0">
+                <a:solidFill>
+                  <a:srgbClr val="12132A"/>
+                </a:solidFill>
+                <a:latin typeface="Calibri" pitchFamily="34" charset="0"/>
+                <a:ea typeface="Calibri" pitchFamily="34" charset="-122"/>
+                <a:cs typeface="Calibri" pitchFamily="34" charset="-120"/>
+              </a:rPr>
+              <a:t>Floor</a:t>
+            </a:r>
+            <a:endParaRPr lang="en-US" sz="1450" dirty="0"/>
+          </a:p>
+        </p:txBody>
+      </p:sp>
+      <p:sp>
+        <p:nvSpPr>
+          <p:cNvPr id="8" name="Text 6"/>
+          <p:cNvSpPr/>
+          <p:nvPr/>
+        </p:nvSpPr>
+        <p:spPr>
+          <a:xfrm>
+            <a:off x="1143000" y="2404872"/>
+            <a:ext cx="5943600" cy="502920"/>
+          </a:xfrm>
+          <a:prstGeom prst="rect">
+            <a:avLst/>
+          </a:prstGeom>
+          <a:noFill/>
+          <a:ln/>
+        </p:spPr>
+        <p:txBody>
+          <a:bodyPr wrap="square" lIns="0" tIns="0" rIns="0" bIns="0" rtlCol="0" anchor="ctr"/>
+          <a:lstStyle/>
+          <a:p>
+            <a:pPr algn="l" indent="0" marL="0">
+              <a:buNone/>
+            </a:pPr>
+            <a:r>
+              <a:rPr lang="en-US" sz="1200" dirty="0">
+                <a:solidFill>
+                  <a:srgbClr val="4A5568"/>
+                </a:solidFill>
+                <a:latin typeface="Calibri" pitchFamily="34" charset="0"/>
+                <a:ea typeface="Calibri" pitchFamily="34" charset="-122"/>
+                <a:cs typeface="Calibri" pitchFamily="34" charset="-120"/>
+              </a:rPr>
+              <a:t>RM30,000 / mo (RM360k / yr), annual commitment.</a:t>
+            </a:r>
+            <a:endParaRPr lang="en-US" sz="1200" dirty="0"/>
+          </a:p>
+        </p:txBody>
+      </p:sp>
+      <p:sp>
+        <p:nvSpPr>
+          <p:cNvPr id="9" name="Shape 7"/>
+          <p:cNvSpPr/>
+          <p:nvPr/>
+        </p:nvSpPr>
+        <p:spPr>
+          <a:xfrm>
+            <a:off x="594360" y="3035808"/>
+            <a:ext cx="384048" cy="384048"/>
+          </a:xfrm>
+          <a:prstGeom prst="ellipse">
+            <a:avLst/>
+          </a:prstGeom>
+          <a:solidFill>
+            <a:srgbClr val="0B2AE0"/>
+          </a:solidFill>
+          <a:ln/>
+        </p:spPr>
+      </p:sp>
+      <p:sp>
+        <p:nvSpPr>
+          <p:cNvPr id="10" name="Text 8"/>
+          <p:cNvSpPr/>
+          <p:nvPr/>
+        </p:nvSpPr>
+        <p:spPr>
+          <a:xfrm>
+            <a:off x="594360" y="3026664"/>
+            <a:ext cx="384048" cy="384048"/>
+          </a:xfrm>
+          <a:prstGeom prst="rect">
+            <a:avLst/>
+          </a:prstGeom>
+          <a:noFill/>
+          <a:ln/>
+        </p:spPr>
+        <p:txBody>
+          <a:bodyPr wrap="square" lIns="0" tIns="0" rIns="0" bIns="0" rtlCol="0" anchor="ctr"/>
+          <a:lstStyle/>
+          <a:p>
+            <a:pPr algn="ctr" indent="0" marL="0">
+              <a:buNone/>
+            </a:pPr>
+            <a:r>
+              <a:rPr lang="en-US" sz="1500" b="1" dirty="0">
+                <a:solidFill>
+                  <a:srgbClr val="FFFFFF"/>
+                </a:solidFill>
+                <a:latin typeface="Calibri" pitchFamily="34" charset="0"/>
+                <a:ea typeface="Calibri" pitchFamily="34" charset="-122"/>
+                <a:cs typeface="Calibri" pitchFamily="34" charset="-120"/>
+              </a:rPr>
+              <a:t>2</a:t>
+            </a:r>
+            <a:endParaRPr lang="en-US" sz="1500" dirty="0"/>
+          </a:p>
+        </p:txBody>
+      </p:sp>
+      <p:sp>
+        <p:nvSpPr>
+          <p:cNvPr id="11" name="Text 9"/>
+          <p:cNvSpPr/>
+          <p:nvPr/>
+        </p:nvSpPr>
+        <p:spPr>
+          <a:xfrm>
+            <a:off x="1143000" y="2971800"/>
+            <a:ext cx="5943600" cy="274320"/>
+          </a:xfrm>
+          <a:prstGeom prst="rect">
+            <a:avLst/>
+          </a:prstGeom>
+          <a:noFill/>
+          <a:ln/>
+        </p:spPr>
+        <p:txBody>
+          <a:bodyPr wrap="square" lIns="0" tIns="0" rIns="0" bIns="0" rtlCol="0" anchor="ctr"/>
+          <a:lstStyle/>
+          <a:p>
+            <a:pPr algn="l" indent="0" marL="0">
+              <a:buNone/>
+            </a:pPr>
+            <a:r>
+              <a:rPr lang="en-US" sz="1450" b="1" dirty="0">
+                <a:solidFill>
+                  <a:srgbClr val="12132A"/>
+                </a:solidFill>
+                <a:latin typeface="Calibri" pitchFamily="34" charset="0"/>
+                <a:ea typeface="Calibri" pitchFamily="34" charset="-122"/>
+                <a:cs typeface="Calibri" pitchFamily="34" charset="-120"/>
+              </a:rPr>
+              <a:t>Scales by volume</a:t>
+            </a:r>
+            <a:endParaRPr lang="en-US" sz="1450" dirty="0"/>
+          </a:p>
+        </p:txBody>
+      </p:sp>
+      <p:sp>
+        <p:nvSpPr>
+          <p:cNvPr id="12" name="Text 10"/>
+          <p:cNvSpPr/>
+          <p:nvPr/>
+        </p:nvSpPr>
+        <p:spPr>
+          <a:xfrm>
+            <a:off x="1143000" y="3273552"/>
+            <a:ext cx="5943600" cy="502920"/>
+          </a:xfrm>
+          <a:prstGeom prst="rect">
+            <a:avLst/>
+          </a:prstGeom>
+          <a:noFill/>
+          <a:ln/>
+        </p:spPr>
+        <p:txBody>
+          <a:bodyPr wrap="square" lIns="0" tIns="0" rIns="0" bIns="0" rtlCol="0" anchor="ctr"/>
+          <a:lstStyle/>
+          <a:p>
+            <a:pPr algn="l" indent="0" marL="0">
+              <a:buNone/>
+            </a:pPr>
+            <a:r>
+              <a:rPr lang="en-US" sz="1200" dirty="0">
+                <a:solidFill>
+                  <a:srgbClr val="4A5568"/>
+                </a:solidFill>
+                <a:latin typeface="Calibri" pitchFamily="34" charset="0"/>
+                <a:ea typeface="Calibri" pitchFamily="34" charset="-122"/>
+                <a:cs typeface="Calibri" pitchFamily="34" charset="-120"/>
+              </a:rPr>
+              <a:t>Open roles / annual hires, hiring seats, number of entities &amp; regions.</a:t>
+            </a:r>
+            <a:endParaRPr lang="en-US" sz="1200" dirty="0"/>
+          </a:p>
+        </p:txBody>
+      </p:sp>
+      <p:sp>
+        <p:nvSpPr>
+          <p:cNvPr id="13" name="Shape 11"/>
+          <p:cNvSpPr/>
+          <p:nvPr/>
+        </p:nvSpPr>
+        <p:spPr>
+          <a:xfrm>
+            <a:off x="594360" y="3904488"/>
+            <a:ext cx="384048" cy="384048"/>
+          </a:xfrm>
+          <a:prstGeom prst="ellipse">
+            <a:avLst/>
+          </a:prstGeom>
+          <a:solidFill>
+            <a:srgbClr val="0B2AE0"/>
+          </a:solidFill>
+          <a:ln/>
+        </p:spPr>
+      </p:sp>
+      <p:sp>
+        <p:nvSpPr>
+          <p:cNvPr id="14" name="Text 12"/>
+          <p:cNvSpPr/>
+          <p:nvPr/>
+        </p:nvSpPr>
+        <p:spPr>
+          <a:xfrm>
+            <a:off x="594360" y="3895344"/>
+            <a:ext cx="384048" cy="384048"/>
+          </a:xfrm>
+          <a:prstGeom prst="rect">
+            <a:avLst/>
+          </a:prstGeom>
+          <a:noFill/>
+          <a:ln/>
+        </p:spPr>
+        <p:txBody>
+          <a:bodyPr wrap="square" lIns="0" tIns="0" rIns="0" bIns="0" rtlCol="0" anchor="ctr"/>
+          <a:lstStyle/>
+          <a:p>
+            <a:pPr algn="ctr" indent="0" marL="0">
+              <a:buNone/>
+            </a:pPr>
+            <a:r>
+              <a:rPr lang="en-US" sz="1500" b="1" dirty="0">
+                <a:solidFill>
+                  <a:srgbClr val="FFFFFF"/>
+                </a:solidFill>
+                <a:latin typeface="Calibri" pitchFamily="34" charset="0"/>
+                <a:ea typeface="Calibri" pitchFamily="34" charset="-122"/>
+                <a:cs typeface="Calibri" pitchFamily="34" charset="-120"/>
+              </a:rPr>
+              <a:t>3</a:t>
+            </a:r>
+            <a:endParaRPr lang="en-US" sz="1500" dirty="0"/>
+          </a:p>
+        </p:txBody>
+      </p:sp>
+      <p:sp>
+        <p:nvSpPr>
+          <p:cNvPr id="15" name="Text 13"/>
+          <p:cNvSpPr/>
+          <p:nvPr/>
+        </p:nvSpPr>
+        <p:spPr>
+          <a:xfrm>
+            <a:off x="1143000" y="3840480"/>
+            <a:ext cx="5943600" cy="274320"/>
+          </a:xfrm>
+          <a:prstGeom prst="rect">
+            <a:avLst/>
+          </a:prstGeom>
+          <a:noFill/>
+          <a:ln/>
+        </p:spPr>
+        <p:txBody>
+          <a:bodyPr wrap="square" lIns="0" tIns="0" rIns="0" bIns="0" rtlCol="0" anchor="ctr"/>
+          <a:lstStyle/>
+          <a:p>
+            <a:pPr algn="l" indent="0" marL="0">
+              <a:buNone/>
+            </a:pPr>
+            <a:r>
+              <a:rPr lang="en-US" sz="1450" b="1" dirty="0">
+                <a:solidFill>
+                  <a:srgbClr val="12132A"/>
+                </a:solidFill>
+                <a:latin typeface="Calibri" pitchFamily="34" charset="0"/>
+                <a:ea typeface="Calibri" pitchFamily="34" charset="-122"/>
+                <a:cs typeface="Calibri" pitchFamily="34" charset="-120"/>
+              </a:rPr>
+              <a:t>Included</a:t>
+            </a:r>
+            <a:endParaRPr lang="en-US" sz="1450" dirty="0"/>
+          </a:p>
+        </p:txBody>
+      </p:sp>
+      <p:sp>
+        <p:nvSpPr>
+          <p:cNvPr id="16" name="Text 14"/>
+          <p:cNvSpPr/>
+          <p:nvPr/>
+        </p:nvSpPr>
+        <p:spPr>
+          <a:xfrm>
+            <a:off x="1143000" y="4142232"/>
+            <a:ext cx="5943600" cy="502920"/>
+          </a:xfrm>
+          <a:prstGeom prst="rect">
+            <a:avLst/>
+          </a:prstGeom>
+          <a:noFill/>
+          <a:ln/>
+        </p:spPr>
+        <p:txBody>
+          <a:bodyPr wrap="square" lIns="0" tIns="0" rIns="0" bIns="0" rtlCol="0" anchor="ctr"/>
+          <a:lstStyle/>
+          <a:p>
+            <a:pPr algn="l" indent="0" marL="0">
+              <a:buNone/>
+            </a:pPr>
+            <a:r>
+              <a:rPr lang="en-US" sz="1200" dirty="0">
+                <a:solidFill>
+                  <a:srgbClr val="4A5568"/>
+                </a:solidFill>
+                <a:latin typeface="Calibri" pitchFamily="34" charset="0"/>
+                <a:ea typeface="Calibri" pitchFamily="34" charset="-122"/>
+                <a:cs typeface="Calibri" pitchFamily="34" charset="-120"/>
+              </a:rPr>
+              <a:t>Unlimited jobs &amp; seats, SSO, audit logs, white-label career site, dedicated CSM + SLA.</a:t>
+            </a:r>
+            <a:endParaRPr lang="en-US" sz="1200" dirty="0"/>
+          </a:p>
+        </p:txBody>
+      </p:sp>
+      <p:sp>
+        <p:nvSpPr>
+          <p:cNvPr id="17" name="Shape 15"/>
+          <p:cNvSpPr/>
+          <p:nvPr/>
+        </p:nvSpPr>
+        <p:spPr>
+          <a:xfrm>
+            <a:off x="594360" y="4773168"/>
+            <a:ext cx="384048" cy="384048"/>
+          </a:xfrm>
+          <a:prstGeom prst="ellipse">
+            <a:avLst/>
+          </a:prstGeom>
+          <a:solidFill>
+            <a:srgbClr val="0B2AE0"/>
+          </a:solidFill>
+          <a:ln/>
+        </p:spPr>
+      </p:sp>
+      <p:sp>
+        <p:nvSpPr>
+          <p:cNvPr id="18" name="Text 16"/>
+          <p:cNvSpPr/>
+          <p:nvPr/>
+        </p:nvSpPr>
+        <p:spPr>
+          <a:xfrm>
+            <a:off x="594360" y="4764024"/>
+            <a:ext cx="384048" cy="384048"/>
+          </a:xfrm>
+          <a:prstGeom prst="rect">
+            <a:avLst/>
+          </a:prstGeom>
+          <a:noFill/>
+          <a:ln/>
+        </p:spPr>
+        <p:txBody>
+          <a:bodyPr wrap="square" lIns="0" tIns="0" rIns="0" bIns="0" rtlCol="0" anchor="ctr"/>
+          <a:lstStyle/>
+          <a:p>
+            <a:pPr algn="ctr" indent="0" marL="0">
+              <a:buNone/>
+            </a:pPr>
+            <a:r>
+              <a:rPr lang="en-US" sz="1500" b="1" dirty="0">
+                <a:solidFill>
+                  <a:srgbClr val="FFFFFF"/>
+                </a:solidFill>
+                <a:latin typeface="Calibri" pitchFamily="34" charset="0"/>
+                <a:ea typeface="Calibri" pitchFamily="34" charset="-122"/>
+                <a:cs typeface="Calibri" pitchFamily="34" charset="-120"/>
+              </a:rPr>
+              <a:t>4</a:t>
+            </a:r>
+            <a:endParaRPr lang="en-US" sz="1500" dirty="0"/>
+          </a:p>
+        </p:txBody>
+      </p:sp>
+      <p:sp>
+        <p:nvSpPr>
+          <p:cNvPr id="19" name="Text 17"/>
+          <p:cNvSpPr/>
+          <p:nvPr/>
+        </p:nvSpPr>
+        <p:spPr>
+          <a:xfrm>
+            <a:off x="1143000" y="4709160"/>
+            <a:ext cx="5943600" cy="274320"/>
+          </a:xfrm>
+          <a:prstGeom prst="rect">
+            <a:avLst/>
+          </a:prstGeom>
+          <a:noFill/>
+          <a:ln/>
+        </p:spPr>
+        <p:txBody>
+          <a:bodyPr wrap="square" lIns="0" tIns="0" rIns="0" bIns="0" rtlCol="0" anchor="ctr"/>
+          <a:lstStyle/>
+          <a:p>
+            <a:pPr algn="l" indent="0" marL="0">
+              <a:buNone/>
+            </a:pPr>
+            <a:r>
+              <a:rPr lang="en-US" sz="1450" b="1" dirty="0">
+                <a:solidFill>
+                  <a:srgbClr val="12132A"/>
+                </a:solidFill>
+                <a:latin typeface="Calibri" pitchFamily="34" charset="0"/>
+                <a:ea typeface="Calibri" pitchFamily="34" charset="-122"/>
+                <a:cs typeface="Calibri" pitchFamily="34" charset="-120"/>
+              </a:rPr>
+              <a:t>Own AI account</a:t>
+            </a:r>
+            <a:endParaRPr lang="en-US" sz="1450" dirty="0"/>
+          </a:p>
+        </p:txBody>
+      </p:sp>
+      <p:sp>
+        <p:nvSpPr>
+          <p:cNvPr id="20" name="Text 18"/>
+          <p:cNvSpPr/>
+          <p:nvPr/>
+        </p:nvSpPr>
+        <p:spPr>
+          <a:xfrm>
+            <a:off x="1143000" y="5010912"/>
+            <a:ext cx="5943600" cy="502920"/>
+          </a:xfrm>
+          <a:prstGeom prst="rect">
+            <a:avLst/>
+          </a:prstGeom>
+          <a:noFill/>
+          <a:ln/>
+        </p:spPr>
+        <p:txBody>
+          <a:bodyPr wrap="square" lIns="0" tIns="0" rIns="0" bIns="0" rtlCol="0" anchor="ctr"/>
+          <a:lstStyle/>
+          <a:p>
+            <a:pPr algn="l" indent="0" marL="0">
+              <a:buNone/>
+            </a:pPr>
+            <a:r>
+              <a:rPr lang="en-US" sz="1200" dirty="0">
+                <a:solidFill>
+                  <a:srgbClr val="4A5568"/>
+                </a:solidFill>
+                <a:latin typeface="Calibri" pitchFamily="34" charset="0"/>
+                <a:ea typeface="Calibri" pitchFamily="34" charset="-122"/>
+                <a:cs typeface="Calibri" pitchFamily="34" charset="-120"/>
+              </a:rPr>
+              <a:t>AI billed directly to the customer by Anthropic, so no AI COGS to Aster.</a:t>
+            </a:r>
+            <a:endParaRPr lang="en-US" sz="1200" dirty="0"/>
+          </a:p>
+        </p:txBody>
+      </p:sp>
+      <p:graphicFrame>
+        <p:nvGraphicFramePr>
+          <p:cNvPr id="13" name="Table 0"/>
+          <p:cNvGraphicFramePr>
+            <a:graphicFrameLocks noGrp="1"/>
+          </p:cNvGraphicFramePr>
+          <p:nvPr>
+            <p:extLst>
+              <p:ext uri="{D42A27DB-BD31-4B8C-83A1-F6EECF244321}">
+                <p14:modId xmlns:p14="http://schemas.microsoft.com/office/powerpoint/2010/main" val="1579011935"/>
+              </p:ext>
+            </p:extLst>
+          </p:nvPr>
+        </p:nvGraphicFramePr>
+        <p:xfrm>
+          <a:off x="7452360" y="2148840"/>
+          <a:ext cx="4187952" cy="914400"/>
+        </p:xfrm>
+        <a:graphic>
+          <a:graphicData uri="http://schemas.openxmlformats.org/drawingml/2006/table">
+            <a:tbl>
+              <a:tblPr/>
+              <a:tblGrid>
+                <a:gridCol w="2907792"/>
+                <a:gridCol w="1280160"/>
+              </a:tblGrid>
+              <a:tr h="502920">
+                <a:tc>
+                  <a:txBody>
+                    <a:bodyPr/>
+                    <a:lstStyle/>
+                    <a:p>
+                      <a:pPr algn="l" indent="0" marL="0">
+                        <a:buNone/>
+                      </a:pPr>
+                      <a:r>
+                        <a:rPr lang="en-US" sz="1200" b="1" dirty="0">
+                          <a:solidFill>
+                            <a:srgbClr val="FFFFFF"/>
+                          </a:solidFill>
+                          <a:latin typeface="Calibri" pitchFamily="34" charset="0"/>
+                          <a:ea typeface="Calibri" pitchFamily="34" charset="-122"/>
+                          <a:cs typeface="Calibri" pitchFamily="34" charset="-120"/>
+                        </a:rPr>
+                        <a:t>Band</a:t>
+                      </a:r>
+                      <a:endParaRPr lang="en-US" sz="1200" dirty="0">
+                        <a:latin typeface="Calibri" charset="0"/>
+                        <a:ea typeface="Calibri" charset="0"/>
+                        <a:cs typeface="Calibri" charset="0"/>
+                      </a:endParaRPr>
+                    </a:p>
+                  </a:txBody>
+                  <a:tcPr marL="76200" marR="76200" marT="25400" marB="25400" anchor="ctr">
+                    <a:lnL w="6350" cap="flat" cmpd="sng" algn="ctr">
+                      <a:solidFill>
+                        <a:srgbClr val="E6E8F0"/>
+                      </a:solidFill>
+                      <a:prstDash val="solid"/>
+                      <a:round/>
+                      <a:headEnd type="none" w="med" len="med"/>
+                      <a:tailEnd type="none" w="med" len="med"/>
+                    </a:lnL>
+                    <a:lnR w="6350" cap="flat" cmpd="sng" algn="ctr">
+                      <a:solidFill>
+                        <a:srgbClr val="E6E8F0"/>
+                      </a:solidFill>
+                      <a:prstDash val="solid"/>
+                      <a:round/>
+                      <a:headEnd type="none" w="med" len="med"/>
+                      <a:tailEnd type="none" w="med" len="med"/>
+                    </a:lnR>
+                    <a:lnT w="6350" cap="flat" cmpd="sng" algn="ctr">
+                      <a:solidFill>
+                        <a:srgbClr val="E6E8F0"/>
+                      </a:solidFill>
+                      <a:prstDash val="solid"/>
+                      <a:round/>
+                      <a:headEnd type="none" w="med" len="med"/>
+                      <a:tailEnd type="none" w="med" len="med"/>
+                    </a:lnT>
+                    <a:lnB w="6350" cap="flat" cmpd="sng" algn="ctr">
+                      <a:solidFill>
+                        <a:srgbClr val="E6E8F0"/>
+                      </a:solidFill>
+                      <a:prstDash val="solid"/>
+                      <a:round/>
+                      <a:headEnd type="none" w="med" len="med"/>
+                      <a:tailEnd type="none" w="med" len="med"/>
+                    </a:lnB>
+                    <a:solidFill>
+                      <a:srgbClr val="0A1FC2"/>
+                    </a:solidFill>
+                  </a:tcPr>
+                </a:tc>
+                <a:tc>
+                  <a:txBody>
+                    <a:bodyPr/>
+                    <a:lstStyle/>
+                    <a:p>
+                      <a:pPr algn="r" indent="0" marL="0">
+                        <a:buNone/>
+                      </a:pPr>
+                      <a:r>
+                        <a:rPr lang="en-US" sz="1200" b="1" dirty="0">
+                          <a:solidFill>
+                            <a:srgbClr val="FFFFFF"/>
+                          </a:solidFill>
+                          <a:latin typeface="Calibri" pitchFamily="34" charset="0"/>
+                          <a:ea typeface="Calibri" pitchFamily="34" charset="-122"/>
+                          <a:cs typeface="Calibri" pitchFamily="34" charset="-120"/>
+                        </a:rPr>
+                        <a:t>Licence / mo</a:t>
+                      </a:r>
+                      <a:endParaRPr lang="en-US" sz="1200" dirty="0">
+                        <a:latin typeface="Calibri" charset="0"/>
+                        <a:ea typeface="Calibri" charset="0"/>
+                        <a:cs typeface="Calibri" charset="0"/>
+                      </a:endParaRPr>
+                    </a:p>
+                  </a:txBody>
+                  <a:tcPr marL="76200" marR="76200" marT="25400" marB="25400" anchor="ctr">
+                    <a:lnL w="6350" cap="flat" cmpd="sng" algn="ctr">
+                      <a:solidFill>
+                        <a:srgbClr val="E6E8F0"/>
+                      </a:solidFill>
+                      <a:prstDash val="solid"/>
+                      <a:round/>
+                      <a:headEnd type="none" w="med" len="med"/>
+                      <a:tailEnd type="none" w="med" len="med"/>
+                    </a:lnL>
+                    <a:lnR w="6350" cap="flat" cmpd="sng" algn="ctr">
+                      <a:solidFill>
+                        <a:srgbClr val="E6E8F0"/>
+                      </a:solidFill>
+                      <a:prstDash val="solid"/>
+                      <a:round/>
+                      <a:headEnd type="none" w="med" len="med"/>
+                      <a:tailEnd type="none" w="med" len="med"/>
+                    </a:lnR>
+                    <a:lnT w="6350" cap="flat" cmpd="sng" algn="ctr">
+                      <a:solidFill>
+                        <a:srgbClr val="E6E8F0"/>
+                      </a:solidFill>
+                      <a:prstDash val="solid"/>
+                      <a:round/>
+                      <a:headEnd type="none" w="med" len="med"/>
+                      <a:tailEnd type="none" w="med" len="med"/>
+                    </a:lnT>
+                    <a:lnB w="6350" cap="flat" cmpd="sng" algn="ctr">
+                      <a:solidFill>
+                        <a:srgbClr val="E6E8F0"/>
+                      </a:solidFill>
+                      <a:prstDash val="solid"/>
+                      <a:round/>
+                      <a:headEnd type="none" w="med" len="med"/>
+                      <a:tailEnd type="none" w="med" len="med"/>
+                    </a:lnB>
+                    <a:solidFill>
+                      <a:srgbClr val="0A1FC2"/>
+                    </a:solidFill>
+                  </a:tcPr>
+                </a:tc>
+              </a:tr>
+              <a:tr h="502920">
+                <a:tc>
+                  <a:txBody>
+                    <a:bodyPr/>
+                    <a:lstStyle/>
+                    <a:p>
+                      <a:pPr algn="l" indent="0" marL="0">
+                        <a:buNone/>
+                      </a:pPr>
+                      <a:r>
+                        <a:rPr lang="en-US" sz="1150" dirty="0">
+                          <a:solidFill>
+                            <a:srgbClr val="12132A"/>
+                          </a:solidFill>
+                          <a:latin typeface="Calibri" pitchFamily="34" charset="0"/>
+                          <a:ea typeface="Calibri" pitchFamily="34" charset="-122"/>
+                          <a:cs typeface="Calibri" pitchFamily="34" charset="-120"/>
+                        </a:rPr>
+                        <a:t>Standard — 1 entity, ≤ ~50 roles</a:t>
+                      </a:r>
+                      <a:endParaRPr lang="en-US" sz="1150" dirty="0">
+                        <a:latin typeface="Calibri" charset="0"/>
+                        <a:ea typeface="Calibri" charset="0"/>
+                        <a:cs typeface="Calibri" charset="0"/>
+                      </a:endParaRPr>
+                    </a:p>
+                  </a:txBody>
+                  <a:tcPr marL="76200" marR="76200" marT="25400" marB="25400" anchor="ctr">
+                    <a:lnL w="6350" cap="flat" cmpd="sng" algn="ctr">
+                      <a:solidFill>
+                        <a:srgbClr val="E6E8F0"/>
+                      </a:solidFill>
+                      <a:prstDash val="solid"/>
+                      <a:round/>
+                      <a:headEnd type="none" w="med" len="med"/>
+                      <a:tailEnd type="none" w="med" len="med"/>
+                    </a:lnL>
+                    <a:lnR w="6350" cap="flat" cmpd="sng" algn="ctr">
+                      <a:solidFill>
+                        <a:srgbClr val="E6E8F0"/>
+                      </a:solidFill>
+                      <a:prstDash val="solid"/>
+                      <a:round/>
+                      <a:headEnd type="none" w="med" len="med"/>
+                      <a:tailEnd type="none" w="med" len="med"/>
+                    </a:lnR>
+                    <a:lnT w="6350" cap="flat" cmpd="sng" algn="ctr">
+                      <a:solidFill>
+                        <a:srgbClr val="E6E8F0"/>
+                      </a:solidFill>
+                      <a:prstDash val="solid"/>
+                      <a:round/>
+                      <a:headEnd type="none" w="med" len="med"/>
+                      <a:tailEnd type="none" w="med" len="med"/>
+                    </a:lnT>
+                    <a:lnB w="6350" cap="flat" cmpd="sng" algn="ctr">
+                      <a:solidFill>
+                        <a:srgbClr val="E6E8F0"/>
+                      </a:solidFill>
+                      <a:prstDash val="solid"/>
+                      <a:round/>
+                      <a:headEnd type="none" w="med" len="med"/>
+                      <a:tailEnd type="none" w="med" len="med"/>
+                    </a:lnB>
+                    <a:solidFill>
+                      <a:srgbClr val="FFFFFF"/>
+                    </a:solidFill>
+                  </a:tcPr>
+                </a:tc>
+                <a:tc>
+                  <a:txBody>
+                    <a:bodyPr/>
+                    <a:lstStyle/>
+                    <a:p>
+                      <a:pPr algn="r" indent="0" marL="0">
+                        <a:buNone/>
+                      </a:pPr>
+                      <a:r>
+                        <a:rPr lang="en-US" sz="1150" b="1" dirty="0">
+                          <a:solidFill>
+                            <a:srgbClr val="0B2AE0"/>
+                          </a:solidFill>
+                          <a:latin typeface="Calibri" pitchFamily="34" charset="0"/>
+                          <a:ea typeface="Calibri" pitchFamily="34" charset="-122"/>
+                          <a:cs typeface="Calibri" pitchFamily="34" charset="-120"/>
+                        </a:rPr>
+                        <a:t>RM30k</a:t>
+                      </a:r>
+                      <a:endParaRPr lang="en-US" sz="1150" dirty="0">
+                        <a:latin typeface="Calibri" charset="0"/>
+                        <a:ea typeface="Calibri" charset="0"/>
+                        <a:cs typeface="Calibri" charset="0"/>
+                      </a:endParaRPr>
+                    </a:p>
+                  </a:txBody>
+                  <a:tcPr marL="76200" marR="76200" marT="25400" marB="25400" anchor="ctr">
+                    <a:lnL w="6350" cap="flat" cmpd="sng" algn="ctr">
+                      <a:solidFill>
+                        <a:srgbClr val="E6E8F0"/>
+                      </a:solidFill>
+                      <a:prstDash val="solid"/>
+                      <a:round/>
+                      <a:headEnd type="none" w="med" len="med"/>
+                      <a:tailEnd type="none" w="med" len="med"/>
+                    </a:lnL>
+                    <a:lnR w="6350" cap="flat" cmpd="sng" algn="ctr">
+                      <a:solidFill>
+                        <a:srgbClr val="E6E8F0"/>
+                      </a:solidFill>
+                      <a:prstDash val="solid"/>
+                      <a:round/>
+                      <a:headEnd type="none" w="med" len="med"/>
+                      <a:tailEnd type="none" w="med" len="med"/>
+                    </a:lnR>
+                    <a:lnT w="6350" cap="flat" cmpd="sng" algn="ctr">
+                      <a:solidFill>
+                        <a:srgbClr val="E6E8F0"/>
+                      </a:solidFill>
+                      <a:prstDash val="solid"/>
+                      <a:round/>
+                      <a:headEnd type="none" w="med" len="med"/>
+                      <a:tailEnd type="none" w="med" len="med"/>
+                    </a:lnT>
+                    <a:lnB w="6350" cap="flat" cmpd="sng" algn="ctr">
+                      <a:solidFill>
+                        <a:srgbClr val="E6E8F0"/>
+                      </a:solidFill>
+                      <a:prstDash val="solid"/>
+                      <a:round/>
+                      <a:headEnd type="none" w="med" len="med"/>
+                      <a:tailEnd type="none" w="med" len="med"/>
+                    </a:lnB>
+                    <a:solidFill>
+                      <a:srgbClr val="FFFFFF"/>
+                    </a:solidFill>
+                  </a:tcPr>
+                </a:tc>
+              </a:tr>
+              <a:tr h="502920">
+                <a:tc>
+                  <a:txBody>
+                    <a:bodyPr/>
+                    <a:lstStyle/>
+                    <a:p>
+                      <a:pPr algn="l" indent="0" marL="0">
+                        <a:buNone/>
+                      </a:pPr>
+                      <a:r>
+                        <a:rPr lang="en-US" sz="1150" dirty="0">
+                          <a:solidFill>
+                            <a:srgbClr val="12132A"/>
+                          </a:solidFill>
+                          <a:latin typeface="Calibri" pitchFamily="34" charset="0"/>
+                          <a:ea typeface="Calibri" pitchFamily="34" charset="-122"/>
+                          <a:cs typeface="Calibri" pitchFamily="34" charset="-120"/>
+                        </a:rPr>
+                        <a:t>Growth — multi-team, ≤ ~150 roles</a:t>
+                      </a:r>
+                      <a:endParaRPr lang="en-US" sz="1150" dirty="0">
+                        <a:latin typeface="Calibri" charset="0"/>
+                        <a:ea typeface="Calibri" charset="0"/>
+                        <a:cs typeface="Calibri" charset="0"/>
+                      </a:endParaRPr>
+                    </a:p>
+                  </a:txBody>
+                  <a:tcPr marL="76200" marR="76200" marT="25400" marB="25400" anchor="ctr">
+                    <a:lnL w="6350" cap="flat" cmpd="sng" algn="ctr">
+                      <a:solidFill>
+                        <a:srgbClr val="E6E8F0"/>
+                      </a:solidFill>
+                      <a:prstDash val="solid"/>
+                      <a:round/>
+                      <a:headEnd type="none" w="med" len="med"/>
+                      <a:tailEnd type="none" w="med" len="med"/>
+                    </a:lnL>
+                    <a:lnR w="6350" cap="flat" cmpd="sng" algn="ctr">
+                      <a:solidFill>
+                        <a:srgbClr val="E6E8F0"/>
+                      </a:solidFill>
+                      <a:prstDash val="solid"/>
+                      <a:round/>
+                      <a:headEnd type="none" w="med" len="med"/>
+                      <a:tailEnd type="none" w="med" len="med"/>
+                    </a:lnR>
+                    <a:lnT w="6350" cap="flat" cmpd="sng" algn="ctr">
+                      <a:solidFill>
+                        <a:srgbClr val="E6E8F0"/>
+                      </a:solidFill>
+                      <a:prstDash val="solid"/>
+                      <a:round/>
+                      <a:headEnd type="none" w="med" len="med"/>
+                      <a:tailEnd type="none" w="med" len="med"/>
+                    </a:lnT>
+                    <a:lnB w="6350" cap="flat" cmpd="sng" algn="ctr">
+                      <a:solidFill>
+                        <a:srgbClr val="E6E8F0"/>
+                      </a:solidFill>
+                      <a:prstDash val="solid"/>
+                      <a:round/>
+                      <a:headEnd type="none" w="med" len="med"/>
+                      <a:tailEnd type="none" w="med" len="med"/>
+                    </a:lnB>
+                    <a:solidFill>
+                      <a:srgbClr val="F5F7FE"/>
+                    </a:solidFill>
+                  </a:tcPr>
+                </a:tc>
+                <a:tc>
+                  <a:txBody>
+                    <a:bodyPr/>
+                    <a:lstStyle/>
+                    <a:p>
+                      <a:pPr algn="r" indent="0" marL="0">
+                        <a:buNone/>
+                      </a:pPr>
+                      <a:r>
+                        <a:rPr lang="en-US" sz="1150" b="1" dirty="0">
+                          <a:solidFill>
+                            <a:srgbClr val="0B2AE0"/>
+                          </a:solidFill>
+                          <a:latin typeface="Calibri" pitchFamily="34" charset="0"/>
+                          <a:ea typeface="Calibri" pitchFamily="34" charset="-122"/>
+                          <a:cs typeface="Calibri" pitchFamily="34" charset="-120"/>
+                        </a:rPr>
+                        <a:t>RM45–60k</a:t>
+                      </a:r>
+                      <a:endParaRPr lang="en-US" sz="1150" dirty="0">
+                        <a:latin typeface="Calibri" charset="0"/>
+                        <a:ea typeface="Calibri" charset="0"/>
+                        <a:cs typeface="Calibri" charset="0"/>
+                      </a:endParaRPr>
+                    </a:p>
+                  </a:txBody>
+                  <a:tcPr marL="76200" marR="76200" marT="25400" marB="25400" anchor="ctr">
+                    <a:lnL w="6350" cap="flat" cmpd="sng" algn="ctr">
+                      <a:solidFill>
+                        <a:srgbClr val="E6E8F0"/>
+                      </a:solidFill>
+                      <a:prstDash val="solid"/>
+                      <a:round/>
+                      <a:headEnd type="none" w="med" len="med"/>
+                      <a:tailEnd type="none" w="med" len="med"/>
+                    </a:lnL>
+                    <a:lnR w="6350" cap="flat" cmpd="sng" algn="ctr">
+                      <a:solidFill>
+                        <a:srgbClr val="E6E8F0"/>
+                      </a:solidFill>
+                      <a:prstDash val="solid"/>
+                      <a:round/>
+                      <a:headEnd type="none" w="med" len="med"/>
+                      <a:tailEnd type="none" w="med" len="med"/>
+                    </a:lnR>
+                    <a:lnT w="6350" cap="flat" cmpd="sng" algn="ctr">
+                      <a:solidFill>
+                        <a:srgbClr val="E6E8F0"/>
+                      </a:solidFill>
+                      <a:prstDash val="solid"/>
+                      <a:round/>
+                      <a:headEnd type="none" w="med" len="med"/>
+                      <a:tailEnd type="none" w="med" len="med"/>
+                    </a:lnT>
+                    <a:lnB w="6350" cap="flat" cmpd="sng" algn="ctr">
+                      <a:solidFill>
+                        <a:srgbClr val="E6E8F0"/>
+                      </a:solidFill>
+                      <a:prstDash val="solid"/>
+                      <a:round/>
+                      <a:headEnd type="none" w="med" len="med"/>
+                      <a:tailEnd type="none" w="med" len="med"/>
+                    </a:lnB>
+                    <a:solidFill>
+                      <a:srgbClr val="F5F7FE"/>
+                    </a:solidFill>
+                  </a:tcPr>
+                </a:tc>
+              </a:tr>
+              <a:tr h="502920">
+                <a:tc>
+                  <a:txBody>
+                    <a:bodyPr/>
+                    <a:lstStyle/>
+                    <a:p>
+                      <a:pPr algn="l" indent="0" marL="0">
+                        <a:buNone/>
+                      </a:pPr>
+                      <a:r>
+                        <a:rPr lang="en-US" sz="1150" dirty="0">
+                          <a:solidFill>
+                            <a:srgbClr val="12132A"/>
+                          </a:solidFill>
+                          <a:latin typeface="Calibri" pitchFamily="34" charset="0"/>
+                          <a:ea typeface="Calibri" pitchFamily="34" charset="-122"/>
+                          <a:cs typeface="Calibri" pitchFamily="34" charset="-120"/>
+                        </a:rPr>
+                        <a:t>Group — multi-entity, 250+ roles</a:t>
+                      </a:r>
+                      <a:endParaRPr lang="en-US" sz="1150" dirty="0">
+                        <a:latin typeface="Calibri" charset="0"/>
+                        <a:ea typeface="Calibri" charset="0"/>
+                        <a:cs typeface="Calibri" charset="0"/>
+                      </a:endParaRPr>
+                    </a:p>
+                  </a:txBody>
+                  <a:tcPr marL="76200" marR="76200" marT="25400" marB="25400" anchor="ctr">
+                    <a:lnL w="6350" cap="flat" cmpd="sng" algn="ctr">
+                      <a:solidFill>
+                        <a:srgbClr val="E6E8F0"/>
+                      </a:solidFill>
+                      <a:prstDash val="solid"/>
+                      <a:round/>
+                      <a:headEnd type="none" w="med" len="med"/>
+                      <a:tailEnd type="none" w="med" len="med"/>
+                    </a:lnL>
+                    <a:lnR w="6350" cap="flat" cmpd="sng" algn="ctr">
+                      <a:solidFill>
+                        <a:srgbClr val="E6E8F0"/>
+                      </a:solidFill>
+                      <a:prstDash val="solid"/>
+                      <a:round/>
+                      <a:headEnd type="none" w="med" len="med"/>
+                      <a:tailEnd type="none" w="med" len="med"/>
+                    </a:lnR>
+                    <a:lnT w="6350" cap="flat" cmpd="sng" algn="ctr">
+                      <a:solidFill>
+                        <a:srgbClr val="E6E8F0"/>
+                      </a:solidFill>
+                      <a:prstDash val="solid"/>
+                      <a:round/>
+                      <a:headEnd type="none" w="med" len="med"/>
+                      <a:tailEnd type="none" w="med" len="med"/>
+                    </a:lnT>
+                    <a:lnB w="6350" cap="flat" cmpd="sng" algn="ctr">
+                      <a:solidFill>
+                        <a:srgbClr val="E6E8F0"/>
+                      </a:solidFill>
+                      <a:prstDash val="solid"/>
+                      <a:round/>
+                      <a:headEnd type="none" w="med" len="med"/>
+                      <a:tailEnd type="none" w="med" len="med"/>
+                    </a:lnB>
+                    <a:solidFill>
+                      <a:srgbClr val="FFFFFF"/>
+                    </a:solidFill>
+                  </a:tcPr>
+                </a:tc>
+                <a:tc>
+                  <a:txBody>
+                    <a:bodyPr/>
+                    <a:lstStyle/>
+                    <a:p>
+                      <a:pPr algn="r" indent="0" marL="0">
+                        <a:buNone/>
+                      </a:pPr>
+                      <a:r>
+                        <a:rPr lang="en-US" sz="1150" b="1" dirty="0">
+                          <a:solidFill>
+                            <a:srgbClr val="0B2AE0"/>
+                          </a:solidFill>
+                          <a:latin typeface="Calibri" pitchFamily="34" charset="0"/>
+                          <a:ea typeface="Calibri" pitchFamily="34" charset="-122"/>
+                          <a:cs typeface="Calibri" pitchFamily="34" charset="-120"/>
+                        </a:rPr>
+                        <a:t>RM75k+</a:t>
+                      </a:r>
+                      <a:endParaRPr lang="en-US" sz="1150" dirty="0">
+                        <a:latin typeface="Calibri" charset="0"/>
+                        <a:ea typeface="Calibri" charset="0"/>
+                        <a:cs typeface="Calibri" charset="0"/>
+                      </a:endParaRPr>
+                    </a:p>
+                  </a:txBody>
+                  <a:tcPr marL="76200" marR="76200" marT="25400" marB="25400" anchor="ctr">
+                    <a:lnL w="6350" cap="flat" cmpd="sng" algn="ctr">
+                      <a:solidFill>
+                        <a:srgbClr val="E6E8F0"/>
+                      </a:solidFill>
+                      <a:prstDash val="solid"/>
+                      <a:round/>
+                      <a:headEnd type="none" w="med" len="med"/>
+                      <a:tailEnd type="none" w="med" len="med"/>
+                    </a:lnL>
+                    <a:lnR w="6350" cap="flat" cmpd="sng" algn="ctr">
+                      <a:solidFill>
+                        <a:srgbClr val="E6E8F0"/>
+                      </a:solidFill>
+                      <a:prstDash val="solid"/>
+                      <a:round/>
+                      <a:headEnd type="none" w="med" len="med"/>
+                      <a:tailEnd type="none" w="med" len="med"/>
+                    </a:lnR>
+                    <a:lnT w="6350" cap="flat" cmpd="sng" algn="ctr">
+                      <a:solidFill>
+                        <a:srgbClr val="E6E8F0"/>
+                      </a:solidFill>
+                      <a:prstDash val="solid"/>
+                      <a:round/>
+                      <a:headEnd type="none" w="med" len="med"/>
+                      <a:tailEnd type="none" w="med" len="med"/>
+                    </a:lnT>
+                    <a:lnB w="6350" cap="flat" cmpd="sng" algn="ctr">
+                      <a:solidFill>
+                        <a:srgbClr val="E6E8F0"/>
+                      </a:solidFill>
+                      <a:prstDash val="solid"/>
+                      <a:round/>
+                      <a:headEnd type="none" w="med" len="med"/>
+                      <a:tailEnd type="none" w="med" len="med"/>
+                    </a:lnB>
+                    <a:solidFill>
+                      <a:srgbClr val="FFFFFF"/>
+                    </a:solidFill>
+                  </a:tcPr>
+                </a:tc>
+              </a:tr>
+            </a:tbl>
+          </a:graphicData>
+        </a:graphic>
+      </p:graphicFrame>
+      <p:sp>
+        <p:nvSpPr>
+          <p:cNvPr id="22" name="Shape 19"/>
+          <p:cNvSpPr/>
+          <p:nvPr/>
+        </p:nvSpPr>
+        <p:spPr>
+          <a:xfrm>
+            <a:off x="7452360" y="4297680"/>
+            <a:ext cx="4187952" cy="1417320"/>
+          </a:xfrm>
+          <a:prstGeom prst="roundRect">
+            <a:avLst>
+              <a:gd name="adj" fmla="val 7742"/>
+            </a:avLst>
+          </a:prstGeom>
+          <a:solidFill>
+            <a:srgbClr val="DCFCE7"/>
+          </a:solidFill>
+          <a:ln w="12700">
+            <a:solidFill>
+              <a:srgbClr val="BBE6C6"/>
+            </a:solidFill>
+            <a:prstDash val="solid"/>
+          </a:ln>
+          <a:effectLst>
+            <a:outerShdw sx="100000" sy="100000" kx="0" ky="0" algn="bl" rotWithShape="0" blurRad="101600" dist="25400" dir="5400000">
+              <a:srgbClr val="9AA0B5">
+                <a:alpha val="18000"/>
+              </a:srgbClr>
+            </a:outerShdw>
+          </a:effectLst>
+        </p:spPr>
+      </p:sp>
+      <p:sp>
+        <p:nvSpPr>
+          <p:cNvPr id="23" name="Text 20"/>
+          <p:cNvSpPr/>
+          <p:nvPr/>
+        </p:nvSpPr>
+        <p:spPr>
+          <a:xfrm>
+            <a:off x="7680960" y="4480560"/>
+            <a:ext cx="3749040" cy="411480"/>
+          </a:xfrm>
+          <a:prstGeom prst="rect">
+            <a:avLst/>
+          </a:prstGeom>
+          <a:noFill/>
+          <a:ln/>
+        </p:spPr>
+        <p:txBody>
+          <a:bodyPr wrap="square" lIns="0" tIns="0" rIns="0" bIns="0" rtlCol="0" anchor="ctr"/>
+          <a:lstStyle/>
+          <a:p>
+            <a:pPr algn="l" indent="0" marL="0">
+              <a:buNone/>
+            </a:pPr>
+            <a:r>
+              <a:rPr lang="en-US" sz="1700" b="1" dirty="0">
+                <a:solidFill>
+                  <a:srgbClr val="166534"/>
+                </a:solidFill>
+                <a:latin typeface="Calibri" pitchFamily="34" charset="0"/>
+                <a:ea typeface="Calibri" pitchFamily="34" charset="-122"/>
+                <a:cs typeface="Calibri" pitchFamily="34" charset="-120"/>
+              </a:rPr>
+              <a:t>~75–85% gross margin</a:t>
+            </a:r>
+            <a:endParaRPr lang="en-US" sz="1700" dirty="0"/>
+          </a:p>
+        </p:txBody>
+      </p:sp>
+      <p:sp>
+        <p:nvSpPr>
+          <p:cNvPr id="24" name="Text 21"/>
+          <p:cNvSpPr/>
+          <p:nvPr/>
+        </p:nvSpPr>
+        <p:spPr>
+          <a:xfrm>
+            <a:off x="7680960" y="4919472"/>
+            <a:ext cx="3749040" cy="731520"/>
+          </a:xfrm>
+          <a:prstGeom prst="rect">
+            <a:avLst/>
+          </a:prstGeom>
+          <a:noFill/>
+          <a:ln/>
+        </p:spPr>
+        <p:txBody>
+          <a:bodyPr wrap="square" lIns="0" tIns="0" rIns="0" bIns="0" rtlCol="0" anchor="ctr"/>
+          <a:lstStyle/>
+          <a:p>
+            <a:pPr algn="l" indent="0" marL="0">
+              <a:buNone/>
+            </a:pPr>
+            <a:r>
+              <a:rPr lang="en-US" sz="1200" dirty="0">
+                <a:solidFill>
+                  <a:srgbClr val="1E6B3A"/>
+                </a:solidFill>
+                <a:latin typeface="Calibri" pitchFamily="34" charset="0"/>
+                <a:ea typeface="Calibri" pitchFamily="34" charset="-122"/>
+                <a:cs typeface="Calibri" pitchFamily="34" charset="-120"/>
+              </a:rPr>
+              <a:t>No AI COGS (customer's own account). The main cost is dedicated support, so the licence is near-pure margin.</a:t>
+            </a:r>
+            <a:endParaRPr lang="en-US" sz="1200" dirty="0"/>
+          </a:p>
+        </p:txBody>
+      </p:sp>
+      <p:sp>
+        <p:nvSpPr>
+          <p:cNvPr id="25" name="Text 22"/>
+          <p:cNvSpPr/>
+          <p:nvPr/>
+        </p:nvSpPr>
+        <p:spPr>
+          <a:xfrm>
+            <a:off x="548640" y="6035040"/>
+            <a:ext cx="11064240" cy="274320"/>
+          </a:xfrm>
+          <a:prstGeom prst="rect">
+            <a:avLst/>
+          </a:prstGeom>
+          <a:noFill/>
+          <a:ln/>
+        </p:spPr>
+        <p:txBody>
+          <a:bodyPr wrap="square" lIns="0" tIns="0" rIns="0" bIns="0" rtlCol="0" anchor="ctr"/>
+          <a:lstStyle/>
+          <a:p>
+            <a:pPr algn="l" indent="0" marL="0">
+              <a:buNone/>
+            </a:pPr>
+            <a:r>
+              <a:rPr lang="en-US" sz="1000" i="1" dirty="0">
+                <a:solidFill>
+                  <a:srgbClr val="6B7280"/>
+                </a:solidFill>
+                <a:latin typeface="Calibri" pitchFamily="34" charset="0"/>
+                <a:ea typeface="Calibri" pitchFamily="34" charset="-122"/>
+                <a:cs typeface="Calibri" pitchFamily="34" charset="-120"/>
+              </a:rPr>
+              <a:t>Floor and bands are internal targets for negotiation; the customer-facing plan stays "custom / contact sales". Partner share (10%) applies only if the deal comes through a channel partner.</a:t>
+            </a:r>
+            <a:endParaRPr lang="en-US" sz="1000" dirty="0"/>
+          </a:p>
+        </p:txBody>
+      </p:sp>
+      <p:sp>
+        <p:nvSpPr>
+          <p:cNvPr id="26" name="Text 23"/>
+          <p:cNvSpPr/>
+          <p:nvPr/>
+        </p:nvSpPr>
+        <p:spPr>
+          <a:xfrm>
+            <a:off x="548640" y="6455664"/>
+            <a:ext cx="7315200" cy="274320"/>
+          </a:xfrm>
+          <a:prstGeom prst="rect">
+            <a:avLst/>
+          </a:prstGeom>
+          <a:noFill/>
+          <a:ln/>
+        </p:spPr>
+        <p:txBody>
+          <a:bodyPr wrap="square" lIns="0" tIns="0" rIns="0" bIns="0" rtlCol="0" anchor="ctr"/>
+          <a:lstStyle/>
+          <a:p>
+            <a:pPr algn="l" indent="0" marL="0">
+              <a:buNone/>
+            </a:pPr>
+            <a:r>
+              <a:rPr lang="en-US" sz="900" dirty="0">
+                <a:solidFill>
+                  <a:srgbClr val="6B7280"/>
+                </a:solidFill>
+                <a:latin typeface="Calibri" pitchFamily="34" charset="0"/>
+                <a:ea typeface="Calibri" pitchFamily="34" charset="-122"/>
+                <a:cs typeface="Calibri" pitchFamily="34" charset="-120"/>
+              </a:rPr>
+              <a:t>Aster  ·  Pricing model</a:t>
+            </a:r>
+            <a:endParaRPr lang="en-US" sz="900" dirty="0"/>
+          </a:p>
+        </p:txBody>
+      </p:sp>
+      <p:sp>
+        <p:nvSpPr>
+          <p:cNvPr id="27" name="Text 24"/>
+          <p:cNvSpPr/>
+          <p:nvPr/>
+        </p:nvSpPr>
+        <p:spPr>
+          <a:xfrm>
+            <a:off x="11338560" y="6455664"/>
+            <a:ext cx="365760" cy="274320"/>
+          </a:xfrm>
+          <a:prstGeom prst="rect">
+            <a:avLst/>
+          </a:prstGeom>
+          <a:noFill/>
+          <a:ln/>
+        </p:spPr>
+        <p:txBody>
+          <a:bodyPr wrap="square" lIns="0" tIns="0" rIns="0" bIns="0" rtlCol="0" anchor="ctr"/>
+          <a:lstStyle/>
+          <a:p>
+            <a:pPr algn="r" indent="0" marL="0">
+              <a:buNone/>
+            </a:pPr>
+            <a:r>
+              <a:rPr lang="en-US" sz="900" dirty="0">
+                <a:solidFill>
+                  <a:srgbClr val="6B7280"/>
+                </a:solidFill>
+                <a:latin typeface="Calibri" pitchFamily="34" charset="0"/>
+                <a:ea typeface="Calibri" pitchFamily="34" charset="-122"/>
+                <a:cs typeface="Calibri" pitchFamily="34" charset="-120"/>
+              </a:rPr>
+              <a:t>12</a:t>
+            </a:r>
+            <a:endParaRPr lang="en-US" sz="900" dirty="0"/>
+          </a:p>
+        </p:txBody>
+      </p:sp>
+    </p:spTree>
+  </p:cSld>
+  <p:clrMapOvr>
+    <a:masterClrMapping/>
+  </p:clrMapOvr>
+</p:sld>
+</file>
+
+<file path=ppt/slides/slide13.xml><?xml version="1.0" encoding="utf-8"?>
+<p:sld xmlns:a="http://schemas.openxmlformats.org/drawingml/2006/main" xmlns:r="http://schemas.openxmlformats.org/officeDocument/2006/relationships" xmlns:p="http://schemas.openxmlformats.org/presentationml/2006/main">
+  <p:cSld name="Slide 13">
+    <p:bg>
+      <p:bgPr>
+        <a:solidFill>
+          <a:srgbClr val="FFFFFF"/>
+        </a:solidFill>
+      </p:bgPr>
+    </p:bg>
+    <p:spTree>
+      <p:nvGrpSpPr>
+        <p:cNvPr id="1" name=""/>
+        <p:cNvGrpSpPr/>
+        <p:nvPr/>
+      </p:nvGrpSpPr>
+      <p:grpSpPr>
+        <a:xfrm>
+          <a:off x="0" y="0"/>
+          <a:ext cx="0" cy="0"/>
+          <a:chOff x="0" y="0"/>
+          <a:chExt cx="0" cy="0"/>
+        </a:xfrm>
+      </p:grpSpPr>
+      <p:sp>
+        <p:nvSpPr>
+          <p:cNvPr id="2" name="Text 0"/>
+          <p:cNvSpPr/>
+          <p:nvPr/>
+        </p:nvSpPr>
+        <p:spPr>
+          <a:xfrm>
+            <a:off x="548640" y="502920"/>
+            <a:ext cx="8229600" cy="274320"/>
+          </a:xfrm>
+          <a:prstGeom prst="rect">
+            <a:avLst/>
+          </a:prstGeom>
+          <a:noFill/>
+          <a:ln/>
+        </p:spPr>
+        <p:txBody>
+          <a:bodyPr wrap="square" lIns="0" tIns="0" rIns="0" bIns="0" rtlCol="0" anchor="ctr"/>
+          <a:lstStyle/>
+          <a:p>
+            <a:pPr algn="l" indent="0" marL="0">
+              <a:buNone/>
+            </a:pPr>
+            <a:r>
+              <a:rPr lang="en-US" sz="1200" b="1" spc="200" kern="0" dirty="0">
+                <a:solidFill>
+                  <a:srgbClr val="0B2AE0"/>
+                </a:solidFill>
+                <a:latin typeface="Calibri" pitchFamily="34" charset="0"/>
+                <a:ea typeface="Calibri" pitchFamily="34" charset="-122"/>
+                <a:cs typeface="Calibri" pitchFamily="34" charset="-120"/>
+              </a:rPr>
               <a:t>REVENUE MODEL</a:t>
             </a:r>
             <a:endParaRPr lang="en-US" sz="1200" dirty="0"/>
@@ -8420,7 +10017,7 @@
       </p:sp>
       <p:graphicFrame>
         <p:nvGraphicFramePr>
-          <p:cNvPr id="13" name="Table 0"/>
+          <p:cNvPr id="14" name="Table 0"/>
           <p:cNvGraphicFramePr>
             <a:graphicFrameLocks noGrp="1"/>
           </p:cNvGraphicFramePr>
@@ -9617,7 +11214,7 @@
                           <a:ea typeface="Calibri" pitchFamily="34" charset="-122"/>
                           <a:cs typeface="Calibri" pitchFamily="34" charset="-120"/>
                         </a:rPr>
-                        <a:t>2</a:t>
+                        <a:t>1</a:t>
                       </a:r>
                       <a:endParaRPr lang="en-US" sz="1250" dirty="0">
                         <a:latin typeface="Calibri" charset="0"/>
@@ -9685,7 +11282,7 @@
                           <a:ea typeface="Calibri" pitchFamily="34" charset="-122"/>
                           <a:cs typeface="Calibri" pitchFamily="34" charset="-120"/>
                         </a:rPr>
-                        <a:t>6</a:t>
+                        <a:t>3</a:t>
                       </a:r>
                       <a:endParaRPr lang="en-US" sz="1250" dirty="0">
                         <a:latin typeface="Calibri" charset="0"/>
@@ -9753,7 +11350,7 @@
                           <a:ea typeface="Calibri" pitchFamily="34" charset="-122"/>
                           <a:cs typeface="Calibri" pitchFamily="34" charset="-120"/>
                         </a:rPr>
-                        <a:t>15</a:t>
+                        <a:t>8</a:t>
                       </a:r>
                       <a:endParaRPr lang="en-US" sz="1250" dirty="0">
                         <a:latin typeface="Calibri" charset="0"/>
@@ -9891,7 +11488,7 @@
                           <a:ea typeface="Calibri" pitchFamily="34" charset="-122"/>
                           <a:cs typeface="Calibri" pitchFamily="34" charset="-120"/>
                         </a:rPr>
-                        <a:t>RM49,900</a:t>
+                        <a:t>RM67,900</a:t>
                       </a:r>
                       <a:endParaRPr lang="en-US" sz="1250" dirty="0">
                         <a:latin typeface="Calibri" charset="0"/>
@@ -9959,7 +11556,7 @@
                           <a:ea typeface="Calibri" pitchFamily="34" charset="-122"/>
                           <a:cs typeface="Calibri" pitchFamily="34" charset="-120"/>
                         </a:rPr>
-                        <a:t>RM124,785</a:t>
+                        <a:t>RM178,785</a:t>
                       </a:r>
                       <a:endParaRPr lang="en-US" sz="1250" dirty="0">
                         <a:latin typeface="Calibri" charset="0"/>
@@ -10027,7 +11624,7 @@
                           <a:ea typeface="Calibri" pitchFamily="34" charset="-122"/>
                           <a:cs typeface="Calibri" pitchFamily="34" charset="-120"/>
                         </a:rPr>
-                        <a:t>RM288,540</a:t>
+                        <a:t>RM438,540</a:t>
                       </a:r>
                       <a:endParaRPr lang="en-US" sz="1250" dirty="0">
                         <a:latin typeface="Calibri" charset="0"/>
@@ -10097,7 +11694,7 @@
                           <a:ea typeface="Calibri" pitchFamily="34" charset="-122"/>
                           <a:cs typeface="Calibri" pitchFamily="34" charset="-120"/>
                         </a:rPr>
-                        <a:t>+ Top-up uplift (≈15%)</a:t>
+                        <a:t>+ Top-up uplift (≈15% of SMB)</a:t>
                       </a:r>
                       <a:endParaRPr lang="en-US" sz="1250" dirty="0">
                         <a:latin typeface="Calibri" charset="0"/>
@@ -10165,7 +11762,7 @@
                           <a:ea typeface="Calibri" pitchFamily="34" charset="-122"/>
                           <a:cs typeface="Calibri" pitchFamily="34" charset="-120"/>
                         </a:rPr>
-                        <a:t>RM7,485</a:t>
+                        <a:t>RM5,685</a:t>
                       </a:r>
                       <a:endParaRPr lang="en-US" sz="1250" dirty="0">
                         <a:latin typeface="Calibri" charset="0"/>
@@ -10233,7 +11830,7 @@
                           <a:ea typeface="Calibri" pitchFamily="34" charset="-122"/>
                           <a:cs typeface="Calibri" pitchFamily="34" charset="-120"/>
                         </a:rPr>
-                        <a:t>RM18,718</a:t>
+                        <a:t>RM13,318</a:t>
                       </a:r>
                       <a:endParaRPr lang="en-US" sz="1250" dirty="0">
                         <a:latin typeface="Calibri" charset="0"/>
@@ -10301,7 +11898,7 @@
                           <a:ea typeface="Calibri" pitchFamily="34" charset="-122"/>
                           <a:cs typeface="Calibri" pitchFamily="34" charset="-120"/>
                         </a:rPr>
-                        <a:t>RM43,281</a:t>
+                        <a:t>RM29,781</a:t>
                       </a:r>
                       <a:endParaRPr lang="en-US" sz="1250" dirty="0">
                         <a:latin typeface="Calibri" charset="0"/>
@@ -10439,7 +12036,7 @@
                           <a:ea typeface="Calibri" pitchFamily="34" charset="-122"/>
                           <a:cs typeface="Calibri" pitchFamily="34" charset="-120"/>
                         </a:rPr>
-                        <a:t>RM57,385</a:t>
+                        <a:t>RM73,585</a:t>
                       </a:r>
                       <a:endParaRPr lang="en-US" sz="1400" dirty="0">
                         <a:latin typeface="Calibri" charset="0"/>
@@ -10507,7 +12104,7 @@
                           <a:ea typeface="Calibri" pitchFamily="34" charset="-122"/>
                           <a:cs typeface="Calibri" pitchFamily="34" charset="-120"/>
                         </a:rPr>
-                        <a:t>RM143,503</a:t>
+                        <a:t>RM192,103</a:t>
                       </a:r>
                       <a:endParaRPr lang="en-US" sz="1400" dirty="0">
                         <a:latin typeface="Calibri" charset="0"/>
@@ -10575,7 +12172,7 @@
                           <a:ea typeface="Calibri" pitchFamily="34" charset="-122"/>
                           <a:cs typeface="Calibri" pitchFamily="34" charset="-120"/>
                         </a:rPr>
-                        <a:t>RM331,821</a:t>
+                        <a:t>RM468,321</a:t>
                       </a:r>
                       <a:endParaRPr lang="en-US" sz="1400" dirty="0">
                         <a:latin typeface="Calibri" charset="0"/>
@@ -10713,7 +12310,7 @@
                           <a:ea typeface="Calibri" pitchFamily="34" charset="-122"/>
                           <a:cs typeface="Calibri" pitchFamily="34" charset="-120"/>
                         </a:rPr>
-                        <a:t>RM689K</a:t>
+                        <a:t>RM883K</a:t>
                       </a:r>
                       <a:endParaRPr lang="en-US" sz="1400" dirty="0">
                         <a:latin typeface="Calibri" charset="0"/>
@@ -10781,7 +12378,7 @@
                           <a:ea typeface="Calibri" pitchFamily="34" charset="-122"/>
                           <a:cs typeface="Calibri" pitchFamily="34" charset="-120"/>
                         </a:rPr>
-                        <a:t>RM1.72M</a:t>
+                        <a:t>RM2.31M</a:t>
                       </a:r>
                       <a:endParaRPr lang="en-US" sz="1400" dirty="0">
                         <a:latin typeface="Calibri" charset="0"/>
@@ -10849,7 +12446,7 @@
                           <a:ea typeface="Calibri" pitchFamily="34" charset="-122"/>
                           <a:cs typeface="Calibri" pitchFamily="34" charset="-120"/>
                         </a:rPr>
-                        <a:t>RM3.98M</a:t>
+                        <a:t>RM5.62M</a:t>
                       </a:r>
                       <a:endParaRPr lang="en-US" sz="1400" dirty="0">
                         <a:latin typeface="Calibri" charset="0"/>
@@ -11011,7 +12608,7 @@
                 <a:ea typeface="Calibri" pitchFamily="34" charset="-122"/>
                 <a:cs typeface="Calibri" pitchFamily="34" charset="-120"/>
               </a:rPr>
-              <a:t>RM1.72M</a:t>
+              <a:t>RM2.31M</a:t>
             </a:r>
             <a:endParaRPr lang="en-US" sz="4000" dirty="0"/>
           </a:p>
@@ -11112,7 +12709,7 @@
                 <a:ea typeface="Calibri" pitchFamily="34" charset="-122"/>
                 <a:cs typeface="Calibri" pitchFamily="34" charset="-120"/>
               </a:rPr>
-              <a:t>221 </a:t>
+              <a:t>218 </a:t>
             </a:r>
             <a:pPr algn="l" indent="0" marL="0">
               <a:buNone/>
@@ -11165,7 +12762,7 @@
                 <a:ea typeface="Calibri" pitchFamily="34" charset="-122"/>
                 <a:cs typeface="Calibri" pitchFamily="34" charset="-120"/>
               </a:rPr>
-              <a:t>RM649 </a:t>
+              <a:t>RM881 </a:t>
             </a:r>
             <a:pPr algn="l" indent="0" marL="0">
               <a:buNone/>
@@ -11218,7 +12815,7 @@
                 <a:ea typeface="Calibri" pitchFamily="34" charset="-122"/>
                 <a:cs typeface="Calibri" pitchFamily="34" charset="-120"/>
               </a:rPr>
-              <a:t>~64% </a:t>
+              <a:t>~68% </a:t>
             </a:r>
             <a:pPr algn="l" indent="0" marL="0">
               <a:buNone/>
@@ -11310,7 +12907,7 @@
                 <a:ea typeface="Calibri" pitchFamily="34" charset="-122"/>
                 <a:cs typeface="Calibri" pitchFamily="34" charset="-120"/>
               </a:rPr>
-              <a:t>Illustrative. Enterprise is a custom plan with no list price; modelled here at an assumed ~RM6,000/mo for the scenario only. ARR is gross revenue; the 10% partner share is captured in the margins on slide 10. Adjust mix, Enterprise deal size, and top-up rate as pricing is finalised.</a:t>
+              <a:t>Illustrative. Enterprise modelled at the RM30k/mo floor (slide 12); Enterprise buys no credit top-ups (own AI), so uplift is 15% of SMB subscription only. ARR is gross; the 10% partner share sits in the plan margins on slide 10.</a:t>
             </a:r>
             <a:endParaRPr lang="en-US" sz="1000" dirty="0"/>
           </a:p>
@@ -11388,7 +12985,7 @@
                 <a:ea typeface="Calibri" pitchFamily="34" charset="-122"/>
                 <a:cs typeface="Calibri" pitchFamily="34" charset="-120"/>
               </a:rPr>
-              <a:t>12</a:t>
+              <a:t>13</a:t>
             </a:r>
             <a:endParaRPr lang="en-US" sz="900" dirty="0"/>
           </a:p>
@@ -11402,9 +12999,9 @@
 </p:sld>
 </file>
 
-<file path=ppt/slides/slide13.xml><?xml version="1.0" encoding="utf-8"?>
+<file path=ppt/slides/slide14.xml><?xml version="1.0" encoding="utf-8"?>
 <p:sld xmlns:a="http://schemas.openxmlformats.org/drawingml/2006/main" xmlns:r="http://schemas.openxmlformats.org/officeDocument/2006/relationships" xmlns:p="http://schemas.openxmlformats.org/presentationml/2006/main">
-  <p:cSld name="Slide 13">
+  <p:cSld name="Slide 14">
     <p:bg>
       <p:bgPr>
         <a:solidFill>
@@ -11676,7 +13273,7 @@
                 <a:ea typeface="Calibri" pitchFamily="34" charset="-122"/>
                 <a:cs typeface="Calibri" pitchFamily="34" charset="-120"/>
               </a:rPr>
-              <a:t>Set the Enterprise floor and what the premium buys (SSO, audit, white-label).</a:t>
+              <a:t>Confirm the Enterprise floor (RM30k/mo) and volume bands on slide 12.</a:t>
             </a:r>
             <a:endParaRPr lang="en-US" sz="1250" dirty="0"/>
           </a:p>
@@ -12110,7 +13707,7 @@
                 <a:ea typeface="Calibri" pitchFamily="34" charset="-122"/>
                 <a:cs typeface="Calibri" pitchFamily="34" charset="-120"/>
               </a:rPr>
-              <a:t>13</a:t>
+              <a:t>14</a:t>
             </a:r>
             <a:endParaRPr lang="en-US" sz="900" dirty="0"/>
           </a:p>
@@ -12124,9 +13721,9 @@
 </p:sld>
 </file>
 
-<file path=ppt/slides/slide14.xml><?xml version="1.0" encoding="utf-8"?>
+<file path=ppt/slides/slide15.xml><?xml version="1.0" encoding="utf-8"?>
 <p:sld xmlns:a="http://schemas.openxmlformats.org/drawingml/2006/main" xmlns:r="http://schemas.openxmlformats.org/officeDocument/2006/relationships" xmlns:p="http://schemas.openxmlformats.org/presentationml/2006/main">
-  <p:cSld name="Slide 14">
+  <p:cSld name="Slide 15">
     <p:bg>
       <p:bgPr>
         <a:solidFill>
@@ -21083,7 +22680,7 @@
                 <a:ea typeface="Calibri" pitchFamily="34" charset="-122"/>
                 <a:cs typeface="Calibri" pitchFamily="34" charset="-120"/>
               </a:rPr>
-              <a:t>Job drafts are sold only as credits on every tier, including Enterprise, so drafting is pure add-on revenue.</a:t>
+              <a:t>Job drafts are sold only as credits, never bundled, so drafting is pure add-on revenue. Enterprise runs AI on its own account.</a:t>
             </a:r>
             <a:endParaRPr lang="en-US" sz="1000" dirty="0"/>
           </a:p>
@@ -23986,8 +25583,8 @@
         </p:nvSpPr>
         <p:spPr>
           <a:xfrm>
-            <a:off x="6858000" y="2331720"/>
-            <a:ext cx="3200400" cy="320040"/>
+            <a:off x="6858000" y="2249424"/>
+            <a:ext cx="1828800" cy="292608"/>
           </a:xfrm>
           <a:prstGeom prst="rect">
             <a:avLst/>
@@ -24025,8 +25622,8 @@
         </p:nvSpPr>
         <p:spPr>
           <a:xfrm>
-            <a:off x="10058400" y="2331720"/>
-            <a:ext cx="1371600" cy="320040"/>
+            <a:off x="8686800" y="2249424"/>
+            <a:ext cx="2743200" cy="292608"/>
           </a:xfrm>
           <a:prstGeom prst="rect">
             <a:avLst/>
@@ -24064,8 +25661,8 @@
         </p:nvSpPr>
         <p:spPr>
           <a:xfrm>
-            <a:off x="6858000" y="2715768"/>
-            <a:ext cx="3200400" cy="320040"/>
+            <a:off x="6858000" y="2587752"/>
+            <a:ext cx="1828800" cy="292608"/>
           </a:xfrm>
           <a:prstGeom prst="rect">
             <a:avLst/>
@@ -24103,8 +25700,8 @@
         </p:nvSpPr>
         <p:spPr>
           <a:xfrm>
-            <a:off x="10058400" y="2715768"/>
-            <a:ext cx="1371600" cy="320040"/>
+            <a:off x="8686800" y="2587752"/>
+            <a:ext cx="2743200" cy="292608"/>
           </a:xfrm>
           <a:prstGeom prst="rect">
             <a:avLst/>
@@ -24142,8 +25739,8 @@
         </p:nvSpPr>
         <p:spPr>
           <a:xfrm>
-            <a:off x="6858000" y="3099816"/>
-            <a:ext cx="3200400" cy="320040"/>
+            <a:off x="6858000" y="2926080"/>
+            <a:ext cx="1828800" cy="292608"/>
           </a:xfrm>
           <a:prstGeom prst="rect">
             <a:avLst/>
@@ -24167,7 +25764,7 @@
                 <a:ea typeface="Calibri" pitchFamily="34" charset="-122"/>
                 <a:cs typeface="Calibri" pitchFamily="34" charset="-120"/>
               </a:rPr>
-              <a:t>Elite / Enterprise</a:t>
+              <a:t>Elite</a:t>
             </a:r>
             <a:endParaRPr lang="en-US" sz="1300" dirty="0"/>
           </a:p>
@@ -24181,8 +25778,8 @@
         </p:nvSpPr>
         <p:spPr>
           <a:xfrm>
-            <a:off x="10058400" y="3099816"/>
-            <a:ext cx="1371600" cy="320040"/>
+            <a:off x="8686800" y="2926080"/>
+            <a:ext cx="2743200" cy="292608"/>
           </a:xfrm>
           <a:prstGeom prst="rect">
             <a:avLst/>
@@ -24214,7 +25811,85 @@
       </p:sp>
       <p:sp>
         <p:nvSpPr>
-          <p:cNvPr id="16" name="Shape 13"/>
+          <p:cNvPr id="16" name="Text 13"/>
+          <p:cNvSpPr/>
+          <p:nvPr/>
+        </p:nvSpPr>
+        <p:spPr>
+          <a:xfrm>
+            <a:off x="6858000" y="3264408"/>
+            <a:ext cx="1828800" cy="292608"/>
+          </a:xfrm>
+          <a:prstGeom prst="rect">
+            <a:avLst/>
+          </a:prstGeom>
+          <a:noFill/>
+          <a:ln/>
+        </p:spPr>
+        <p:txBody>
+          <a:bodyPr wrap="square" lIns="0" tIns="0" rIns="0" bIns="0" rtlCol="0" anchor="ctr"/>
+          <a:lstStyle/>
+          <a:p>
+            <a:pPr algn="l" indent="0" marL="0">
+              <a:buNone/>
+            </a:pPr>
+            <a:r>
+              <a:rPr lang="en-US" sz="1300" dirty="0">
+                <a:solidFill>
+                  <a:srgbClr val="4A5568"/>
+                </a:solidFill>
+                <a:latin typeface="Calibri" pitchFamily="34" charset="0"/>
+                <a:ea typeface="Calibri" pitchFamily="34" charset="-122"/>
+                <a:cs typeface="Calibri" pitchFamily="34" charset="-120"/>
+              </a:rPr>
+              <a:t>Enterprise</a:t>
+            </a:r>
+            <a:endParaRPr lang="en-US" sz="1300" dirty="0"/>
+          </a:p>
+        </p:txBody>
+      </p:sp>
+      <p:sp>
+        <p:nvSpPr>
+          <p:cNvPr id="17" name="Text 14"/>
+          <p:cNvSpPr/>
+          <p:nvPr/>
+        </p:nvSpPr>
+        <p:spPr>
+          <a:xfrm>
+            <a:off x="8686800" y="3264408"/>
+            <a:ext cx="2743200" cy="292608"/>
+          </a:xfrm>
+          <a:prstGeom prst="rect">
+            <a:avLst/>
+          </a:prstGeom>
+          <a:noFill/>
+          <a:ln/>
+        </p:spPr>
+        <p:txBody>
+          <a:bodyPr wrap="square" lIns="0" tIns="0" rIns="0" bIns="0" rtlCol="0" anchor="ctr"/>
+          <a:lstStyle/>
+          <a:p>
+            <a:pPr algn="r" indent="0" marL="0">
+              <a:buNone/>
+            </a:pPr>
+            <a:r>
+              <a:rPr lang="en-US" sz="1200" b="1" dirty="0">
+                <a:solidFill>
+                  <a:srgbClr val="0B2AE0"/>
+                </a:solidFill>
+                <a:latin typeface="Calibri" pitchFamily="34" charset="0"/>
+                <a:ea typeface="Calibri" pitchFamily="34" charset="-122"/>
+                <a:cs typeface="Calibri" pitchFamily="34" charset="-120"/>
+              </a:rPr>
+              <a:t>own AI account</a:t>
+            </a:r>
+            <a:endParaRPr lang="en-US" sz="1200" dirty="0"/>
+          </a:p>
+        </p:txBody>
+      </p:sp>
+      <p:sp>
+        <p:nvSpPr>
+          <p:cNvPr id="18" name="Shape 15"/>
           <p:cNvSpPr/>
           <p:nvPr/>
         </p:nvSpPr>
@@ -24248,7 +25923,7 @@
       </p:sp>
       <p:sp>
         <p:nvSpPr>
-          <p:cNvPr id="17" name="Text 14"/>
+          <p:cNvPr id="19" name="Text 16"/>
           <p:cNvSpPr/>
           <p:nvPr/>
         </p:nvSpPr>
@@ -24287,7 +25962,7 @@
       </p:sp>
       <p:sp>
         <p:nvSpPr>
-          <p:cNvPr id="18" name="Text 15"/>
+          <p:cNvPr id="20" name="Text 17"/>
           <p:cNvSpPr/>
           <p:nvPr/>
         </p:nvSpPr>
@@ -24326,7 +26001,7 @@
       </p:sp>
       <p:sp>
         <p:nvSpPr>
-          <p:cNvPr id="19" name="Text 16"/>
+          <p:cNvPr id="21" name="Text 18"/>
           <p:cNvSpPr/>
           <p:nvPr/>
         </p:nvSpPr>
@@ -24365,7 +26040,7 @@
       </p:sp>
       <p:sp>
         <p:nvSpPr>
-          <p:cNvPr id="20" name="Text 17"/>
+          <p:cNvPr id="22" name="Text 19"/>
           <p:cNvSpPr/>
           <p:nvPr/>
         </p:nvSpPr>
@@ -24404,7 +26079,7 @@
       </p:sp>
       <p:sp>
         <p:nvSpPr>
-          <p:cNvPr id="21" name="Text 18"/>
+          <p:cNvPr id="23" name="Text 20"/>
           <p:cNvSpPr/>
           <p:nvPr/>
         </p:nvSpPr>
@@ -24443,7 +26118,7 @@
       </p:sp>
       <p:sp>
         <p:nvSpPr>
-          <p:cNvPr id="22" name="Text 19"/>
+          <p:cNvPr id="24" name="Text 21"/>
           <p:cNvSpPr/>
           <p:nvPr/>
         </p:nvSpPr>
@@ -24482,7 +26157,7 @@
       </p:sp>
       <p:sp>
         <p:nvSpPr>
-          <p:cNvPr id="23" name="Text 20"/>
+          <p:cNvPr id="25" name="Text 22"/>
           <p:cNvSpPr/>
           <p:nvPr/>
         </p:nvSpPr>
@@ -24521,14 +26196,14 @@
       </p:sp>
       <p:sp>
         <p:nvSpPr>
-          <p:cNvPr id="24" name="Text 21"/>
+          <p:cNvPr id="26" name="Text 23"/>
           <p:cNvSpPr/>
           <p:nvPr/>
         </p:nvSpPr>
         <p:spPr>
           <a:xfrm>
-            <a:off x="548640" y="6035040"/>
-            <a:ext cx="11064240" cy="274320"/>
+            <a:off x="548640" y="5989320"/>
+            <a:ext cx="11064240" cy="365760"/>
           </a:xfrm>
           <a:prstGeom prst="rect">
             <a:avLst/>
@@ -24544,7 +26219,7 @@
               <a:buNone/>
             </a:pPr>
             <a:r>
-              <a:rPr lang="en-US" sz="1000" i="1" dirty="0">
+              <a:rPr lang="en-US" sz="950" i="1" dirty="0">
                 <a:solidFill>
                   <a:srgbClr val="6B7280"/>
                 </a:solidFill>
@@ -24552,15 +26227,15 @@
                 <a:ea typeface="Calibri" pitchFamily="34" charset="-122"/>
                 <a:cs typeface="Calibri" pitchFamily="34" charset="-120"/>
               </a:rPr>
-              <a:t>Prices are stored once as USD cents and shown here in MYR. Minimum top-up per credit is above; each top-up is one Stripe charge, folded into the credit margins on slide 11.</a:t>
+              <a:t>Prices stored as USD cents, shown in MYR. Enterprise connects its own AI account (billed directly by Anthropic), so it takes no credit discount. Min top-up per credit is above; each top-up is one Stripe charge, folded into slide 11's margins.</a:t>
             </a:r>
-            <a:endParaRPr lang="en-US" sz="1000" dirty="0"/>
+            <a:endParaRPr lang="en-US" sz="950" dirty="0"/>
           </a:p>
         </p:txBody>
       </p:sp>
       <p:sp>
         <p:nvSpPr>
-          <p:cNvPr id="25" name="Text 22"/>
+          <p:cNvPr id="27" name="Text 24"/>
           <p:cNvSpPr/>
           <p:nvPr/>
         </p:nvSpPr>
@@ -24599,7 +26274,7 @@
       </p:sp>
       <p:sp>
         <p:nvSpPr>
-          <p:cNvPr id="26" name="Text 23"/>
+          <p:cNvPr id="28" name="Text 25"/>
           <p:cNvSpPr/>
           <p:nvPr/>
         </p:nvSpPr>
@@ -28398,7 +30073,7 @@
                           <a:ea typeface="Calibri" pitchFamily="34" charset="-122"/>
                           <a:cs typeface="Calibri" pitchFamily="34" charset="-120"/>
                         </a:rPr>
-                        <a:t>Per action, from tokens</a:t>
+                        <a:t>Per action · Enterprise: own AI</a:t>
                       </a:r>
                       <a:endParaRPr lang="en-US" sz="1200" dirty="0">
                         <a:latin typeface="Calibri" charset="0"/>
